--- a/11 integracao frete.pptx
+++ b/11 integracao frete.pptx
@@ -4,24 +4,24 @@
   <p:sldMasterIdLst>
     <p:sldMasterId id="2147483648" r:id="rId1"/>
   </p:sldMasterIdLst>
+  <p:notesMasterIdLst>
+    <p:notesMasterId r:id="rId14"/>
+  </p:notesMasterIdLst>
   <p:sldIdLst>
-    <p:sldId id="256" r:id="rId7"/>
-    <p:sldId id="257" r:id="rId9"/>
-    <p:sldId id="258" r:id="rId10"/>
-    <p:sldId id="259" r:id="rId11"/>
-    <p:sldId id="260" r:id="rId12"/>
-    <p:sldId id="261" r:id="rId13"/>
-    <p:sldId id="262" r:id="rId14"/>
-    <p:sldId id="263" r:id="rId15"/>
-    <p:sldId id="264" r:id="rId16"/>
-    <p:sldId id="265" r:id="rId17"/>
-    <p:sldId id="266" r:id="rId18"/>
-    <p:sldId id="267" r:id="rId19"/>
-    <p:sldId id="268" r:id="rId20"/>
-    <p:sldId id="269" r:id="rId21"/>
-    <p:sldId id="270" r:id="rId22"/>
+    <p:sldId id="271" r:id="rId2"/>
+    <p:sldId id="272" r:id="rId3"/>
+    <p:sldId id="276" r:id="rId4"/>
+    <p:sldId id="273" r:id="rId5"/>
+    <p:sldId id="274" r:id="rId6"/>
+    <p:sldId id="275" r:id="rId7"/>
+    <p:sldId id="277" r:id="rId8"/>
+    <p:sldId id="278" r:id="rId9"/>
+    <p:sldId id="279" r:id="rId10"/>
+    <p:sldId id="280" r:id="rId11"/>
+    <p:sldId id="281" r:id="rId12"/>
+    <p:sldId id="282" r:id="rId13"/>
   </p:sldIdLst>
-  <p:sldSz cx="12191695" cy="6858000" type="screen4x3"/>
+  <p:sldSz cx="12192000" cy="6858000"/>
   <p:notesSz cx="6858000" cy="9144000"/>
   <p:defaultTextStyle>
     <a:defPPr>
@@ -118,11 +118,27 @@
       </a:defRPr>
     </a:lvl9pPr>
   </p:defaultTextStyle>
+  <p:extLst>
+    <p:ext uri="{EFAFB233-063F-42B5-8137-9DF3F51BA10A}">
+      <p15:sldGuideLst xmlns:p15="http://schemas.microsoft.com/office/powerpoint/2012/main">
+        <p15:guide id="1" orient="horz" pos="2160">
+          <p15:clr>
+            <a:srgbClr val="A4A3A4"/>
+          </p15:clr>
+        </p15:guide>
+        <p15:guide id="2" pos="2880">
+          <p15:clr>
+            <a:srgbClr val="A4A3A4"/>
+          </p15:clr>
+        </p15:guide>
+      </p15:sldGuideLst>
+    </p:ext>
+  </p:extLst>
 </p:presentation>
 </file>
 
 <file path=ppt/notesMasters/notesMaster1.xml><?xml version="1.0" encoding="utf-8"?>
-<p:notesMaster xmlns:a="http://schemas.openxmlformats.org/drawingml/2006/main" xmlns:p="http://schemas.openxmlformats.org/presentationml/2006/main" xmlns:r="http://schemas.openxmlformats.org/officeDocument/2006/relationships">
+<p:notesMaster xmlns:a="http://schemas.openxmlformats.org/drawingml/2006/main" xmlns:r="http://schemas.openxmlformats.org/officeDocument/2006/relationships" xmlns:p="http://schemas.openxmlformats.org/presentationml/2006/main">
   <p:cSld>
     <p:bg>
       <p:bgRef idx="1001">
@@ -143,241 +159,16 @@
           <a:chExt cx="0" cy="0"/>
         </a:xfrm>
       </p:grpSpPr>
-      <p:sp>
-        <p:nvSpPr>
-          <p:cNvPr id="2" name="Header Placeholder 1"/>
-          <p:cNvSpPr>
-            <a:spLocks noGrp="1"/>
-          </p:cNvSpPr>
-          <p:nvPr>
-            <p:ph type="hdr" sz="quarter"/>
-          </p:nvPr>
-        </p:nvSpPr>
-        <p:spPr>
-          <a:xfrm>
-            <a:off x="0" y="0"/>
-            <a:ext cx="2971800" cy="457200"/>
-          </a:xfrm>
-          <a:prstGeom prst="rect">
-            <a:avLst/>
-          </a:prstGeom>
-        </p:spPr>
-        <p:txBody>
-          <a:bodyPr vert="horz" lIns="91440" tIns="45720" rIns="91440" bIns="45720" rtlCol="0"/>
-          <a:lstStyle>
-            <a:lvl1pPr algn="l">
-              <a:defRPr sz="1200"/>
-            </a:lvl1pPr>
-          </a:lstStyle>
-          <a:p>
-            <a:endParaRPr lang="en-US"/>
-          </a:p>
-        </p:txBody>
-      </p:sp>
-      <p:sp>
-        <p:nvSpPr>
-          <p:cNvPr id="3" name="Date Placeholder 2"/>
-          <p:cNvSpPr>
-            <a:spLocks noGrp="1"/>
-          </p:cNvSpPr>
-          <p:nvPr>
-            <p:ph type="dt" idx="1"/>
-          </p:nvPr>
-        </p:nvSpPr>
-        <p:spPr>
-          <a:xfrm>
-            <a:off x="3884613" y="0"/>
-            <a:ext cx="2971800" cy="457200"/>
-          </a:xfrm>
-          <a:prstGeom prst="rect">
-            <a:avLst/>
-          </a:prstGeom>
-        </p:spPr>
-        <p:txBody>
-          <a:bodyPr vert="horz" lIns="91440" tIns="45720" rIns="91440" bIns="45720" rtlCol="0"/>
-          <a:lstStyle>
-            <a:lvl1pPr algn="r">
-              <a:defRPr sz="1200"/>
-            </a:lvl1pPr>
-          </a:lstStyle>
-          <a:p>
-            <a:fld id="{0F89C1C7-3DCD-1040-A9CF-14679D8B5DDD}" type="datetimeFigureOut">
-              <a:rPr lang="en-US" smtClean="0"/>
-              <a:t>10/17/16</a:t>
-            </a:fld>
-            <a:endParaRPr lang="en-US"/>
-          </a:p>
-        </p:txBody>
-      </p:sp>
-      <p:sp>
-        <p:nvSpPr>
-          <p:cNvPr id="4" name="Slide Image Placeholder 3"/>
-          <p:cNvSpPr>
-            <a:spLocks noGrp="1" noRot="1" noChangeAspect="1"/>
-          </p:cNvSpPr>
-          <p:nvPr>
-            <p:ph type="sldImg" idx="2"/>
-          </p:nvPr>
-        </p:nvSpPr>
-        <p:spPr>
-          <a:xfrm>
-            <a:off x="1143000" y="685800"/>
-            <a:ext cx="4572000" cy="3429000"/>
-          </a:xfrm>
-          <a:prstGeom prst="rect">
-            <a:avLst/>
-          </a:prstGeom>
-          <a:noFill/>
-          <a:ln w="12700">
-            <a:solidFill>
-              <a:prstClr val="black"/>
-            </a:solidFill>
-          </a:ln>
-        </p:spPr>
-        <p:txBody>
-          <a:bodyPr vert="horz" lIns="91440" tIns="45720" rIns="91440" bIns="45720" rtlCol="0" anchor="ctr"/>
-          <a:lstStyle/>
-          <a:p>
-            <a:endParaRPr lang="en-US"/>
-          </a:p>
-        </p:txBody>
-      </p:sp>
-      <p:sp>
-        <p:nvSpPr>
-          <p:cNvPr id="5" name="Notes Placeholder 4"/>
-          <p:cNvSpPr>
-            <a:spLocks noGrp="1"/>
-          </p:cNvSpPr>
-          <p:nvPr>
-            <p:ph type="body" sz="quarter" idx="3"/>
-          </p:nvPr>
-        </p:nvSpPr>
-        <p:spPr>
-          <a:xfrm>
-            <a:off x="685800" y="4343400"/>
-            <a:ext cx="5486400" cy="4114800"/>
-          </a:xfrm>
-          <a:prstGeom prst="rect">
-            <a:avLst/>
-          </a:prstGeom>
-        </p:spPr>
-        <p:txBody>
-          <a:bodyPr vert="horz" lIns="91440" tIns="45720" rIns="91440" bIns="45720" rtlCol="0"/>
-          <a:lstStyle/>
-          <a:p>
-            <a:pPr lvl="0"/>
-            <a:r>
-              <a:rPr lang="en-US" smtClean="0"/>
-              <a:t>Click to edit Master text styles</a:t>
-            </a:r>
-          </a:p>
-          <a:p>
-            <a:pPr lvl="1"/>
-            <a:r>
-              <a:rPr lang="en-US" smtClean="0"/>
-              <a:t>Second level</a:t>
-            </a:r>
-          </a:p>
-          <a:p>
-            <a:pPr lvl="2"/>
-            <a:r>
-              <a:rPr lang="en-US" smtClean="0"/>
-              <a:t>Third level</a:t>
-            </a:r>
-          </a:p>
-          <a:p>
-            <a:pPr lvl="3"/>
-            <a:r>
-              <a:rPr lang="en-US" smtClean="0"/>
-              <a:t>Fourth level</a:t>
-            </a:r>
-          </a:p>
-          <a:p>
-            <a:pPr lvl="4"/>
-            <a:r>
-              <a:rPr lang="en-US" smtClean="0"/>
-              <a:t>Fifth level</a:t>
-            </a:r>
-            <a:endParaRPr lang="en-US"/>
-          </a:p>
-        </p:txBody>
-      </p:sp>
-      <p:sp>
-        <p:nvSpPr>
-          <p:cNvPr id="6" name="Footer Placeholder 5"/>
-          <p:cNvSpPr>
-            <a:spLocks noGrp="1"/>
-          </p:cNvSpPr>
-          <p:nvPr>
-            <p:ph type="ftr" sz="quarter" idx="4"/>
-          </p:nvPr>
-        </p:nvSpPr>
-        <p:spPr>
-          <a:xfrm>
-            <a:off x="0" y="8685213"/>
-            <a:ext cx="2971800" cy="457200"/>
-          </a:xfrm>
-          <a:prstGeom prst="rect">
-            <a:avLst/>
-          </a:prstGeom>
-        </p:spPr>
-        <p:txBody>
-          <a:bodyPr vert="horz" lIns="91440" tIns="45720" rIns="91440" bIns="45720" rtlCol="0" anchor="b"/>
-          <a:lstStyle>
-            <a:lvl1pPr algn="l">
-              <a:defRPr sz="1200"/>
-            </a:lvl1pPr>
-          </a:lstStyle>
-          <a:p>
-            <a:endParaRPr lang="en-US"/>
-          </a:p>
-        </p:txBody>
-      </p:sp>
-      <p:sp>
-        <p:nvSpPr>
-          <p:cNvPr id="7" name="Slide Number Placeholder 6"/>
-          <p:cNvSpPr>
-            <a:spLocks noGrp="1"/>
-          </p:cNvSpPr>
-          <p:nvPr>
-            <p:ph type="sldNum" sz="quarter" idx="5"/>
-          </p:nvPr>
-        </p:nvSpPr>
-        <p:spPr>
-          <a:xfrm>
-            <a:off x="3884613" y="8685213"/>
-            <a:ext cx="2971800" cy="457200"/>
-          </a:xfrm>
-          <a:prstGeom prst="rect">
-            <a:avLst/>
-          </a:prstGeom>
-        </p:spPr>
-        <p:txBody>
-          <a:bodyPr vert="horz" lIns="91440" tIns="45720" rIns="91440" bIns="45720" rtlCol="0" anchor="b"/>
-          <a:lstStyle>
-            <a:lvl1pPr algn="r">
-              <a:defRPr sz="1200"/>
-            </a:lvl1pPr>
-          </a:lstStyle>
-          <a:p>
-            <a:fld id="{BB5E49A5-4136-284D-997B-48E1D791AD67}" type="slidenum">
-              <a:rPr lang="en-US" smtClean="0"/>
-              <a:t>‹#›</a:t>
-            </a:fld>
-            <a:endParaRPr lang="en-US"/>
-          </a:p>
-        </p:txBody>
-      </p:sp>
     </p:spTree>
     <p:extLst>
       <p:ext uri="{BB962C8B-B14F-4D97-AF65-F5344CB8AC3E}">
-        <p14:creationId xmlns:p14="http://schemas.microsoft.com/office/powerpoint/2010/main" val="2623252185"/>
+        <p14:creationId xmlns:p14="http://schemas.microsoft.com/office/powerpoint/2010/main" val="794807666"/>
       </p:ext>
     </p:extLst>
   </p:cSld>
   <p:clrMap bg1="lt1" tx1="dk1" bg2="lt2" tx2="dk2" accent1="accent1" accent2="accent2" accent3="accent3" accent4="accent4" accent5="accent5" accent6="accent6" hlink="hlink" folHlink="folHlink"/>
   <p:notesStyle>
-    <a:lvl1pPr marL="0" algn="l" defTabSz="457200" rtl="0" eaLnBrk="1" latinLnBrk="0" hangingPunct="1">
+    <a:lvl1pPr marL="0" algn="l" defTabSz="914400" rtl="0" eaLnBrk="1" latinLnBrk="0" hangingPunct="1">
       <a:defRPr sz="1200" kern="1200">
         <a:solidFill>
           <a:schemeClr val="tx1"/>
@@ -387,7 +178,7 @@
         <a:cs typeface="+mn-cs"/>
       </a:defRPr>
     </a:lvl1pPr>
-    <a:lvl2pPr marL="457200" algn="l" defTabSz="457200" rtl="0" eaLnBrk="1" latinLnBrk="0" hangingPunct="1">
+    <a:lvl2pPr marL="457200" algn="l" defTabSz="914400" rtl="0" eaLnBrk="1" latinLnBrk="0" hangingPunct="1">
       <a:defRPr sz="1200" kern="1200">
         <a:solidFill>
           <a:schemeClr val="tx1"/>
@@ -397,7 +188,7 @@
         <a:cs typeface="+mn-cs"/>
       </a:defRPr>
     </a:lvl2pPr>
-    <a:lvl3pPr marL="914400" algn="l" defTabSz="457200" rtl="0" eaLnBrk="1" latinLnBrk="0" hangingPunct="1">
+    <a:lvl3pPr marL="914400" algn="l" defTabSz="914400" rtl="0" eaLnBrk="1" latinLnBrk="0" hangingPunct="1">
       <a:defRPr sz="1200" kern="1200">
         <a:solidFill>
           <a:schemeClr val="tx1"/>
@@ -407,7 +198,7 @@
         <a:cs typeface="+mn-cs"/>
       </a:defRPr>
     </a:lvl3pPr>
-    <a:lvl4pPr marL="1371600" algn="l" defTabSz="457200" rtl="0" eaLnBrk="1" latinLnBrk="0" hangingPunct="1">
+    <a:lvl4pPr marL="1371600" algn="l" defTabSz="914400" rtl="0" eaLnBrk="1" latinLnBrk="0" hangingPunct="1">
       <a:defRPr sz="1200" kern="1200">
         <a:solidFill>
           <a:schemeClr val="tx1"/>
@@ -417,7 +208,7 @@
         <a:cs typeface="+mn-cs"/>
       </a:defRPr>
     </a:lvl4pPr>
-    <a:lvl5pPr marL="1828800" algn="l" defTabSz="457200" rtl="0" eaLnBrk="1" latinLnBrk="0" hangingPunct="1">
+    <a:lvl5pPr marL="1828800" algn="l" defTabSz="914400" rtl="0" eaLnBrk="1" latinLnBrk="0" hangingPunct="1">
       <a:defRPr sz="1200" kern="1200">
         <a:solidFill>
           <a:schemeClr val="tx1"/>
@@ -427,7 +218,7 @@
         <a:cs typeface="+mn-cs"/>
       </a:defRPr>
     </a:lvl5pPr>
-    <a:lvl6pPr marL="2286000" algn="l" defTabSz="457200" rtl="0" eaLnBrk="1" latinLnBrk="0" hangingPunct="1">
+    <a:lvl6pPr marL="2286000" algn="l" defTabSz="914400" rtl="0" eaLnBrk="1" latinLnBrk="0" hangingPunct="1">
       <a:defRPr sz="1200" kern="1200">
         <a:solidFill>
           <a:schemeClr val="tx1"/>
@@ -437,7 +228,7 @@
         <a:cs typeface="+mn-cs"/>
       </a:defRPr>
     </a:lvl6pPr>
-    <a:lvl7pPr marL="2743200" algn="l" defTabSz="457200" rtl="0" eaLnBrk="1" latinLnBrk="0" hangingPunct="1">
+    <a:lvl7pPr marL="2743200" algn="l" defTabSz="914400" rtl="0" eaLnBrk="1" latinLnBrk="0" hangingPunct="1">
       <a:defRPr sz="1200" kern="1200">
         <a:solidFill>
           <a:schemeClr val="tx1"/>
@@ -447,7 +238,7 @@
         <a:cs typeface="+mn-cs"/>
       </a:defRPr>
     </a:lvl7pPr>
-    <a:lvl8pPr marL="3200400" algn="l" defTabSz="457200" rtl="0" eaLnBrk="1" latinLnBrk="0" hangingPunct="1">
+    <a:lvl8pPr marL="3200400" algn="l" defTabSz="914400" rtl="0" eaLnBrk="1" latinLnBrk="0" hangingPunct="1">
       <a:defRPr sz="1200" kern="1200">
         <a:solidFill>
           <a:schemeClr val="tx1"/>
@@ -457,7 +248,7 @@
         <a:cs typeface="+mn-cs"/>
       </a:defRPr>
     </a:lvl8pPr>
-    <a:lvl9pPr marL="3657600" algn="l" defTabSz="457200" rtl="0" eaLnBrk="1" latinLnBrk="0" hangingPunct="1">
+    <a:lvl9pPr marL="3657600" algn="l" defTabSz="914400" rtl="0" eaLnBrk="1" latinLnBrk="0" hangingPunct="1">
       <a:defRPr sz="1200" kern="1200">
         <a:solidFill>
           <a:schemeClr val="tx1"/>
@@ -472,7 +263,7 @@
 </file>
 
 <file path=ppt/notesSlides/notesSlide1.xml><?xml version="1.0" encoding="utf-8"?>
-<p:notes xmlns:a="http://schemas.openxmlformats.org/drawingml/2006/main" xmlns:p="http://schemas.openxmlformats.org/presentationml/2006/main" xmlns:r="http://schemas.openxmlformats.org/officeDocument/2006/relationships">
+<p:notes xmlns:a="http://schemas.openxmlformats.org/drawingml/2006/main" xmlns:r="http://schemas.openxmlformats.org/officeDocument/2006/relationships" xmlns:p="http://schemas.openxmlformats.org/presentationml/2006/main">
   <p:cSld>
     <p:spTree>
       <p:nvGrpSpPr>
@@ -492,7 +283,7 @@
         <p:nvSpPr>
           <p:cNvPr id="2" name="Slide Image Placeholder 1"/>
           <p:cNvSpPr>
-            <a:spLocks noGrp="1"/>
+            <a:spLocks noGrp="1" noRot="1" noChangeAspect="1"/>
           </p:cNvSpPr>
           <p:nvPr>
             <p:ph type="sldImg" idx="2"/>
@@ -507,7 +298,7 @@
             <a:spLocks noGrp="1"/>
           </p:cNvSpPr>
           <p:nvPr>
-            <p:ph type="body" idx="3" sz="quarter"/>
+            <p:ph type="body" sz="quarter" idx="3"/>
           </p:nvPr>
         </p:nvSpPr>
         <p:spPr/>
@@ -533,12 +324,17 @@
             <a:spLocks noGrp="1"/>
           </p:cNvSpPr>
           <p:nvPr>
-            <p:ph type="sldNum" idx="5" sz="quarter"/>
+            <p:ph type="sldNum" sz="quarter" idx="5"/>
           </p:nvPr>
         </p:nvSpPr>
         <p:spPr/>
       </p:sp>
     </p:spTree>
+    <p:extLst>
+      <p:ext uri="{BB962C8B-B14F-4D97-AF65-F5344CB8AC3E}">
+        <p14:creationId xmlns:p14="http://schemas.microsoft.com/office/powerpoint/2010/main" val="3715135756"/>
+      </p:ext>
+    </p:extLst>
   </p:cSld>
   <p:clrMapOvr>
     <a:masterClrMapping/>
@@ -547,7 +343,7 @@
 </file>
 
 <file path=ppt/notesSlides/notesSlide10.xml><?xml version="1.0" encoding="utf-8"?>
-<p:notes xmlns:a="http://schemas.openxmlformats.org/drawingml/2006/main" xmlns:p="http://schemas.openxmlformats.org/presentationml/2006/main" xmlns:r="http://schemas.openxmlformats.org/officeDocument/2006/relationships">
+<p:notes xmlns:a="http://schemas.openxmlformats.org/drawingml/2006/main" xmlns:r="http://schemas.openxmlformats.org/officeDocument/2006/relationships" xmlns:p="http://schemas.openxmlformats.org/presentationml/2006/main">
   <p:cSld>
     <p:spTree>
       <p:nvGrpSpPr>
@@ -567,7 +363,7 @@
         <p:nvSpPr>
           <p:cNvPr id="2" name="Slide Image Placeholder 1"/>
           <p:cNvSpPr>
-            <a:spLocks noGrp="1"/>
+            <a:spLocks noGrp="1" noRot="1" noChangeAspect="1"/>
           </p:cNvSpPr>
           <p:nvPr>
             <p:ph type="sldImg" idx="2"/>
@@ -582,21 +378,21 @@
             <a:spLocks noGrp="1"/>
           </p:cNvSpPr>
           <p:nvPr>
-            <p:ph type="body" idx="3" sz="quarter"/>
-          </p:nvPr>
-        </p:nvSpPr>
-        <p:spPr/>
-        <p:txBody>
-          <a:bodyPr/>
-          <a:lstStyle/>
-          <a:p>
-            <a:r>
-              <a:t>[AULA E-COMMERCE - MODULO 10 - SLIDE 10]</a:t>
-            </a:r>
-          </a:p>
-          <a:p>
-            <a:r>
-              <a:t>Selecao de Transportadoras: Apresentar as vantagens de cada parceiro (PAC, SEDEX, Jadlog Package, Jadlog .Com, Loggi e Azul Cargo).</a:t>
+            <p:ph type="body" sz="quarter" idx="3"/>
+          </p:nvPr>
+        </p:nvSpPr>
+        <p:spPr/>
+        <p:txBody>
+          <a:bodyPr/>
+          <a:lstStyle/>
+          <a:p>
+            <a:r>
+              <a:t>[AULA E-COMMERCE - MODULO 10 - SLIDE 1]</a:t>
+            </a:r>
+          </a:p>
+          <a:p>
+            <a:r>
+              <a:t>Abertura do Modulo 10: Integracao de Frete e Logistica no WooCommerce. Apresentar o papel critico do frete no e-commerce brasileiro e os topicos que serao abordados na aula.</a:t>
             </a:r>
           </a:p>
         </p:txBody>
@@ -608,12 +404,17 @@
             <a:spLocks noGrp="1"/>
           </p:cNvSpPr>
           <p:nvPr>
-            <p:ph type="sldNum" idx="5" sz="quarter"/>
+            <p:ph type="sldNum" sz="quarter" idx="5"/>
           </p:nvPr>
         </p:nvSpPr>
         <p:spPr/>
       </p:sp>
     </p:spTree>
+    <p:extLst>
+      <p:ext uri="{BB962C8B-B14F-4D97-AF65-F5344CB8AC3E}">
+        <p14:creationId xmlns:p14="http://schemas.microsoft.com/office/powerpoint/2010/main" val="1452581127"/>
+      </p:ext>
+    </p:extLst>
   </p:cSld>
   <p:clrMapOvr>
     <a:masterClrMapping/>
@@ -622,7 +423,7 @@
 </file>
 
 <file path=ppt/notesSlides/notesSlide11.xml><?xml version="1.0" encoding="utf-8"?>
-<p:notes xmlns:a="http://schemas.openxmlformats.org/drawingml/2006/main" xmlns:p="http://schemas.openxmlformats.org/presentationml/2006/main" xmlns:r="http://schemas.openxmlformats.org/officeDocument/2006/relationships">
+<p:notes xmlns:a="http://schemas.openxmlformats.org/drawingml/2006/main" xmlns:r="http://schemas.openxmlformats.org/officeDocument/2006/relationships" xmlns:p="http://schemas.openxmlformats.org/presentationml/2006/main">
   <p:cSld>
     <p:spTree>
       <p:nvGrpSpPr>
@@ -642,7 +443,7 @@
         <p:nvSpPr>
           <p:cNvPr id="2" name="Slide Image Placeholder 1"/>
           <p:cNvSpPr>
-            <a:spLocks noGrp="1"/>
+            <a:spLocks noGrp="1" noRot="1" noChangeAspect="1"/>
           </p:cNvSpPr>
           <p:nvPr>
             <p:ph type="sldImg" idx="2"/>
@@ -657,21 +458,21 @@
             <a:spLocks noGrp="1"/>
           </p:cNvSpPr>
           <p:nvPr>
-            <p:ph type="body" idx="3" sz="quarter"/>
-          </p:nvPr>
-        </p:nvSpPr>
-        <p:spPr/>
-        <p:txBody>
-          <a:bodyPr/>
-          <a:lstStyle/>
-          <a:p>
-            <a:r>
-              <a:t>[AULA E-COMMERCE - MODULO 10 - SLIDE 11]</a:t>
-            </a:r>
-          </a:p>
-          <a:p>
-            <a:r>
-              <a:t>Lead Time e Margem: Ensinar os alunos a adicionar 1 a 2 dias uteis no prazo exibido para dar tempo de separar e embalar a encomenda, alem de margem para custear a caixa de papelao.</a:t>
+            <p:ph type="body" sz="quarter" idx="3"/>
+          </p:nvPr>
+        </p:nvSpPr>
+        <p:spPr/>
+        <p:txBody>
+          <a:bodyPr/>
+          <a:lstStyle/>
+          <a:p>
+            <a:r>
+              <a:t>[AULA E-COMMERCE - MODULO 10 - SLIDE 1]</a:t>
+            </a:r>
+          </a:p>
+          <a:p>
+            <a:r>
+              <a:t>Abertura do Modulo 10: Integracao de Frete e Logistica no WooCommerce. Apresentar o papel critico do frete no e-commerce brasileiro e os topicos que serao abordados na aula.</a:t>
             </a:r>
           </a:p>
         </p:txBody>
@@ -683,12 +484,17 @@
             <a:spLocks noGrp="1"/>
           </p:cNvSpPr>
           <p:nvPr>
-            <p:ph type="sldNum" idx="5" sz="quarter"/>
+            <p:ph type="sldNum" sz="quarter" idx="5"/>
           </p:nvPr>
         </p:nvSpPr>
         <p:spPr/>
       </p:sp>
     </p:spTree>
+    <p:extLst>
+      <p:ext uri="{BB962C8B-B14F-4D97-AF65-F5344CB8AC3E}">
+        <p14:creationId xmlns:p14="http://schemas.microsoft.com/office/powerpoint/2010/main" val="3359384183"/>
+      </p:ext>
+    </p:extLst>
   </p:cSld>
   <p:clrMapOvr>
     <a:masterClrMapping/>
@@ -697,7 +503,7 @@
 </file>
 
 <file path=ppt/notesSlides/notesSlide12.xml><?xml version="1.0" encoding="utf-8"?>
-<p:notes xmlns:a="http://schemas.openxmlformats.org/drawingml/2006/main" xmlns:p="http://schemas.openxmlformats.org/presentationml/2006/main" xmlns:r="http://schemas.openxmlformats.org/officeDocument/2006/relationships">
+<p:notes xmlns:a="http://schemas.openxmlformats.org/drawingml/2006/main" xmlns:r="http://schemas.openxmlformats.org/officeDocument/2006/relationships" xmlns:p="http://schemas.openxmlformats.org/presentationml/2006/main">
   <p:cSld>
     <p:spTree>
       <p:nvGrpSpPr>
@@ -717,7 +523,7 @@
         <p:nvSpPr>
           <p:cNvPr id="2" name="Slide Image Placeholder 1"/>
           <p:cNvSpPr>
-            <a:spLocks noGrp="1"/>
+            <a:spLocks noGrp="1" noRot="1" noChangeAspect="1"/>
           </p:cNvSpPr>
           <p:nvPr>
             <p:ph type="sldImg" idx="2"/>
@@ -732,21 +538,21 @@
             <a:spLocks noGrp="1"/>
           </p:cNvSpPr>
           <p:nvPr>
-            <p:ph type="body" idx="3" sz="quarter"/>
-          </p:nvPr>
-        </p:nvSpPr>
-        <p:spPr/>
-        <p:txBody>
-          <a:bodyPr/>
-          <a:lstStyle/>
-          <a:p>
-            <a:r>
-              <a:t>[AULA E-COMMERCE - MODULO 10 - SLIDE 12]</a:t>
-            </a:r>
-          </a:p>
-          <a:p>
-            <a:r>
-              <a:t>Simulador de Frete na Pagina do Produto: Apresentar o beneficio de permitir o calculo antecipado de frete antes do carrinho para evitar surpresas no checkout.</a:t>
+            <p:ph type="body" sz="quarter" idx="3"/>
+          </p:nvPr>
+        </p:nvSpPr>
+        <p:spPr/>
+        <p:txBody>
+          <a:bodyPr/>
+          <a:lstStyle/>
+          <a:p>
+            <a:r>
+              <a:t>[AULA E-COMMERCE - MODULO 10 - SLIDE 1]</a:t>
+            </a:r>
+          </a:p>
+          <a:p>
+            <a:r>
+              <a:t>Abertura do Modulo 10: Integracao de Frete e Logistica no WooCommerce. Apresentar o papel critico do frete no e-commerce brasileiro e os topicos que serao abordados na aula.</a:t>
             </a:r>
           </a:p>
         </p:txBody>
@@ -758,12 +564,17 @@
             <a:spLocks noGrp="1"/>
           </p:cNvSpPr>
           <p:nvPr>
-            <p:ph type="sldNum" idx="5" sz="quarter"/>
+            <p:ph type="sldNum" sz="quarter" idx="5"/>
           </p:nvPr>
         </p:nvSpPr>
         <p:spPr/>
       </p:sp>
     </p:spTree>
+    <p:extLst>
+      <p:ext uri="{BB962C8B-B14F-4D97-AF65-F5344CB8AC3E}">
+        <p14:creationId xmlns:p14="http://schemas.microsoft.com/office/powerpoint/2010/main" val="1653932573"/>
+      </p:ext>
+    </p:extLst>
   </p:cSld>
   <p:clrMapOvr>
     <a:masterClrMapping/>
@@ -771,8 +582,8 @@
 </p:notes>
 </file>
 
-<file path=ppt/notesSlides/notesSlide13.xml><?xml version="1.0" encoding="utf-8"?>
-<p:notes xmlns:a="http://schemas.openxmlformats.org/drawingml/2006/main" xmlns:p="http://schemas.openxmlformats.org/presentationml/2006/main" xmlns:r="http://schemas.openxmlformats.org/officeDocument/2006/relationships">
+<file path=ppt/notesSlides/notesSlide2.xml><?xml version="1.0" encoding="utf-8"?>
+<p:notes xmlns:a="http://schemas.openxmlformats.org/drawingml/2006/main" xmlns:r="http://schemas.openxmlformats.org/officeDocument/2006/relationships" xmlns:p="http://schemas.openxmlformats.org/presentationml/2006/main">
   <p:cSld>
     <p:spTree>
       <p:nvGrpSpPr>
@@ -792,7 +603,7 @@
         <p:nvSpPr>
           <p:cNvPr id="2" name="Slide Image Placeholder 1"/>
           <p:cNvSpPr>
-            <a:spLocks noGrp="1"/>
+            <a:spLocks noGrp="1" noRot="1" noChangeAspect="1"/>
           </p:cNvSpPr>
           <p:nvPr>
             <p:ph type="sldImg" idx="2"/>
@@ -807,21 +618,21 @@
             <a:spLocks noGrp="1"/>
           </p:cNvSpPr>
           <p:nvPr>
-            <p:ph type="body" idx="3" sz="quarter"/>
-          </p:nvPr>
-        </p:nvSpPr>
-        <p:spPr/>
-        <p:txBody>
-          <a:bodyPr/>
-          <a:lstStyle/>
-          <a:p>
-            <a:r>
-              <a:t>[AULA E-COMMERCE - MODULO 10 - SLIDE 13]</a:t>
-            </a:r>
-          </a:p>
-          <a:p>
-            <a:r>
-              <a:t>Validacao e Testes: Roteiro pratico de testes simulando CEPs locais, interestaduais e do interior, alem de solucionar problemas comuns de calculo zerado.</a:t>
+            <p:ph type="body" sz="quarter" idx="3"/>
+          </p:nvPr>
+        </p:nvSpPr>
+        <p:spPr/>
+        <p:txBody>
+          <a:bodyPr/>
+          <a:lstStyle/>
+          <a:p>
+            <a:r>
+              <a:t>[AULA E-COMMERCE - MODULO 10 - SLIDE 1]</a:t>
+            </a:r>
+          </a:p>
+          <a:p>
+            <a:r>
+              <a:t>Abertura do Modulo 10: Integracao de Frete e Logistica no WooCommerce. Apresentar o papel critico do frete no e-commerce brasileiro e os topicos que serao abordados na aula.</a:t>
             </a:r>
           </a:p>
         </p:txBody>
@@ -833,12 +644,17 @@
             <a:spLocks noGrp="1"/>
           </p:cNvSpPr>
           <p:nvPr>
-            <p:ph type="sldNum" idx="5" sz="quarter"/>
+            <p:ph type="sldNum" sz="quarter" idx="5"/>
           </p:nvPr>
         </p:nvSpPr>
         <p:spPr/>
       </p:sp>
     </p:spTree>
+    <p:extLst>
+      <p:ext uri="{BB962C8B-B14F-4D97-AF65-F5344CB8AC3E}">
+        <p14:creationId xmlns:p14="http://schemas.microsoft.com/office/powerpoint/2010/main" val="2815448152"/>
+      </p:ext>
+    </p:extLst>
   </p:cSld>
   <p:clrMapOvr>
     <a:masterClrMapping/>
@@ -846,8 +662,8 @@
 </p:notes>
 </file>
 
-<file path=ppt/notesSlides/notesSlide14.xml><?xml version="1.0" encoding="utf-8"?>
-<p:notes xmlns:a="http://schemas.openxmlformats.org/drawingml/2006/main" xmlns:p="http://schemas.openxmlformats.org/presentationml/2006/main" xmlns:r="http://schemas.openxmlformats.org/officeDocument/2006/relationships">
+<file path=ppt/notesSlides/notesSlide3.xml><?xml version="1.0" encoding="utf-8"?>
+<p:notes xmlns:a="http://schemas.openxmlformats.org/drawingml/2006/main" xmlns:r="http://schemas.openxmlformats.org/officeDocument/2006/relationships" xmlns:p="http://schemas.openxmlformats.org/presentationml/2006/main">
   <p:cSld>
     <p:spTree>
       <p:nvGrpSpPr>
@@ -867,7 +683,7 @@
         <p:nvSpPr>
           <p:cNvPr id="2" name="Slide Image Placeholder 1"/>
           <p:cNvSpPr>
-            <a:spLocks noGrp="1"/>
+            <a:spLocks noGrp="1" noRot="1" noChangeAspect="1"/>
           </p:cNvSpPr>
           <p:nvPr>
             <p:ph type="sldImg" idx="2"/>
@@ -882,21 +698,21 @@
             <a:spLocks noGrp="1"/>
           </p:cNvSpPr>
           <p:nvPr>
-            <p:ph type="body" idx="3" sz="quarter"/>
-          </p:nvPr>
-        </p:nvSpPr>
-        <p:spPr/>
-        <p:txBody>
-          <a:bodyPr/>
-          <a:lstStyle/>
-          <a:p>
-            <a:r>
-              <a:t>[AULA E-COMMERCE - MODULO 10 - SLIDE 14]</a:t>
-            </a:r>
-          </a:p>
-          <a:p>
-            <a:r>
-              <a:t>Rotina de Expedicao: Do pedido pago no WooCommerce a emissao da etiqueta no Melhor Envio, embalagem do pacote e despacho na agencia dos Correios ou Jadlog.</a:t>
+            <p:ph type="body" sz="quarter" idx="3"/>
+          </p:nvPr>
+        </p:nvSpPr>
+        <p:spPr/>
+        <p:txBody>
+          <a:bodyPr/>
+          <a:lstStyle/>
+          <a:p>
+            <a:r>
+              <a:t>[AULA E-COMMERCE - MODULO 10 - SLIDE 1]</a:t>
+            </a:r>
+          </a:p>
+          <a:p>
+            <a:r>
+              <a:t>Abertura do Modulo 10: Integracao de Frete e Logistica no WooCommerce. Apresentar o papel critico do frete no e-commerce brasileiro e os topicos que serao abordados na aula.</a:t>
             </a:r>
           </a:p>
         </p:txBody>
@@ -908,12 +724,17 @@
             <a:spLocks noGrp="1"/>
           </p:cNvSpPr>
           <p:nvPr>
-            <p:ph type="sldNum" idx="5" sz="quarter"/>
+            <p:ph type="sldNum" sz="quarter" idx="5"/>
           </p:nvPr>
         </p:nvSpPr>
         <p:spPr/>
       </p:sp>
     </p:spTree>
+    <p:extLst>
+      <p:ext uri="{BB962C8B-B14F-4D97-AF65-F5344CB8AC3E}">
+        <p14:creationId xmlns:p14="http://schemas.microsoft.com/office/powerpoint/2010/main" val="2200067669"/>
+      </p:ext>
+    </p:extLst>
   </p:cSld>
   <p:clrMapOvr>
     <a:masterClrMapping/>
@@ -921,8 +742,8 @@
 </p:notes>
 </file>
 
-<file path=ppt/notesSlides/notesSlide15.xml><?xml version="1.0" encoding="utf-8"?>
-<p:notes xmlns:a="http://schemas.openxmlformats.org/drawingml/2006/main" xmlns:p="http://schemas.openxmlformats.org/presentationml/2006/main" xmlns:r="http://schemas.openxmlformats.org/officeDocument/2006/relationships">
+<file path=ppt/notesSlides/notesSlide4.xml><?xml version="1.0" encoding="utf-8"?>
+<p:notes xmlns:a="http://schemas.openxmlformats.org/drawingml/2006/main" xmlns:r="http://schemas.openxmlformats.org/officeDocument/2006/relationships" xmlns:p="http://schemas.openxmlformats.org/presentationml/2006/main">
   <p:cSld>
     <p:spTree>
       <p:nvGrpSpPr>
@@ -942,7 +763,7 @@
         <p:nvSpPr>
           <p:cNvPr id="2" name="Slide Image Placeholder 1"/>
           <p:cNvSpPr>
-            <a:spLocks noGrp="1"/>
+            <a:spLocks noGrp="1" noRot="1" noChangeAspect="1"/>
           </p:cNvSpPr>
           <p:nvPr>
             <p:ph type="sldImg" idx="2"/>
@@ -957,21 +778,21 @@
             <a:spLocks noGrp="1"/>
           </p:cNvSpPr>
           <p:nvPr>
-            <p:ph type="body" idx="3" sz="quarter"/>
-          </p:nvPr>
-        </p:nvSpPr>
-        <p:spPr/>
-        <p:txBody>
-          <a:bodyPr/>
-          <a:lstStyle/>
-          <a:p>
-            <a:r>
-              <a:t>[AULA E-COMMERCE - MODULO 10 - SLIDE 15]</a:t>
-            </a:r>
-          </a:p>
-          <a:p>
-            <a:r>
-              <a:t>Checklist Final: Revisao dos 8 pontos criticos para garantir que a loja esta 100% pronta para calcular fretes e enviar produtos.</a:t>
+            <p:ph type="body" sz="quarter" idx="3"/>
+          </p:nvPr>
+        </p:nvSpPr>
+        <p:spPr/>
+        <p:txBody>
+          <a:bodyPr/>
+          <a:lstStyle/>
+          <a:p>
+            <a:r>
+              <a:t>[AULA E-COMMERCE - MODULO 10 - SLIDE 1]</a:t>
+            </a:r>
+          </a:p>
+          <a:p>
+            <a:r>
+              <a:t>Abertura do Modulo 10: Integracao de Frete e Logistica no WooCommerce. Apresentar o papel critico do frete no e-commerce brasileiro e os topicos que serao abordados na aula.</a:t>
             </a:r>
           </a:p>
         </p:txBody>
@@ -983,12 +804,17 @@
             <a:spLocks noGrp="1"/>
           </p:cNvSpPr>
           <p:nvPr>
-            <p:ph type="sldNum" idx="5" sz="quarter"/>
+            <p:ph type="sldNum" sz="quarter" idx="5"/>
           </p:nvPr>
         </p:nvSpPr>
         <p:spPr/>
       </p:sp>
     </p:spTree>
+    <p:extLst>
+      <p:ext uri="{BB962C8B-B14F-4D97-AF65-F5344CB8AC3E}">
+        <p14:creationId xmlns:p14="http://schemas.microsoft.com/office/powerpoint/2010/main" val="3425633398"/>
+      </p:ext>
+    </p:extLst>
   </p:cSld>
   <p:clrMapOvr>
     <a:masterClrMapping/>
@@ -996,8 +822,8 @@
 </p:notes>
 </file>
 
-<file path=ppt/notesSlides/notesSlide2.xml><?xml version="1.0" encoding="utf-8"?>
-<p:notes xmlns:a="http://schemas.openxmlformats.org/drawingml/2006/main" xmlns:p="http://schemas.openxmlformats.org/presentationml/2006/main" xmlns:r="http://schemas.openxmlformats.org/officeDocument/2006/relationships">
+<file path=ppt/notesSlides/notesSlide5.xml><?xml version="1.0" encoding="utf-8"?>
+<p:notes xmlns:a="http://schemas.openxmlformats.org/drawingml/2006/main" xmlns:r="http://schemas.openxmlformats.org/officeDocument/2006/relationships" xmlns:p="http://schemas.openxmlformats.org/presentationml/2006/main">
   <p:cSld>
     <p:spTree>
       <p:nvGrpSpPr>
@@ -1017,7 +843,7 @@
         <p:nvSpPr>
           <p:cNvPr id="2" name="Slide Image Placeholder 1"/>
           <p:cNvSpPr>
-            <a:spLocks noGrp="1"/>
+            <a:spLocks noGrp="1" noRot="1" noChangeAspect="1"/>
           </p:cNvSpPr>
           <p:nvPr>
             <p:ph type="sldImg" idx="2"/>
@@ -1032,21 +858,21 @@
             <a:spLocks noGrp="1"/>
           </p:cNvSpPr>
           <p:nvPr>
-            <p:ph type="body" idx="3" sz="quarter"/>
-          </p:nvPr>
-        </p:nvSpPr>
-        <p:spPr/>
-        <p:txBody>
-          <a:bodyPr/>
-          <a:lstStyle/>
-          <a:p>
-            <a:r>
-              <a:t>[AULA E-COMMERCE - MODULO 10 - SLIDE 2]</a:t>
-            </a:r>
-          </a:p>
-          <a:p>
-            <a:r>
-              <a:t>Panorama de Logistica: Explicar aos alunos que frete caro e prazo longo sao responsaveis por 66% dos abandonos de carrinho. Destacar a importancia de sempre oferecer uma opcao economica e uma expressa.</a:t>
+            <p:ph type="body" sz="quarter" idx="3"/>
+          </p:nvPr>
+        </p:nvSpPr>
+        <p:spPr/>
+        <p:txBody>
+          <a:bodyPr/>
+          <a:lstStyle/>
+          <a:p>
+            <a:r>
+              <a:t>[AULA E-COMMERCE - MODULO 10 - SLIDE 1]</a:t>
+            </a:r>
+          </a:p>
+          <a:p>
+            <a:r>
+              <a:t>Abertura do Modulo 10: Integracao de Frete e Logistica no WooCommerce. Apresentar o papel critico do frete no e-commerce brasileiro e os topicos que serao abordados na aula.</a:t>
             </a:r>
           </a:p>
         </p:txBody>
@@ -1058,12 +884,17 @@
             <a:spLocks noGrp="1"/>
           </p:cNvSpPr>
           <p:nvPr>
-            <p:ph type="sldNum" idx="5" sz="quarter"/>
+            <p:ph type="sldNum" sz="quarter" idx="5"/>
           </p:nvPr>
         </p:nvSpPr>
         <p:spPr/>
       </p:sp>
     </p:spTree>
+    <p:extLst>
+      <p:ext uri="{BB962C8B-B14F-4D97-AF65-F5344CB8AC3E}">
+        <p14:creationId xmlns:p14="http://schemas.microsoft.com/office/powerpoint/2010/main" val="2829429600"/>
+      </p:ext>
+    </p:extLst>
   </p:cSld>
   <p:clrMapOvr>
     <a:masterClrMapping/>
@@ -1071,8 +902,8 @@
 </p:notes>
 </file>
 
-<file path=ppt/notesSlides/notesSlide3.xml><?xml version="1.0" encoding="utf-8"?>
-<p:notes xmlns:a="http://schemas.openxmlformats.org/drawingml/2006/main" xmlns:p="http://schemas.openxmlformats.org/presentationml/2006/main" xmlns:r="http://schemas.openxmlformats.org/officeDocument/2006/relationships">
+<file path=ppt/notesSlides/notesSlide6.xml><?xml version="1.0" encoding="utf-8"?>
+<p:notes xmlns:a="http://schemas.openxmlformats.org/drawingml/2006/main" xmlns:r="http://schemas.openxmlformats.org/officeDocument/2006/relationships" xmlns:p="http://schemas.openxmlformats.org/presentationml/2006/main">
   <p:cSld>
     <p:spTree>
       <p:nvGrpSpPr>
@@ -1092,7 +923,7 @@
         <p:nvSpPr>
           <p:cNvPr id="2" name="Slide Image Placeholder 1"/>
           <p:cNvSpPr>
-            <a:spLocks noGrp="1"/>
+            <a:spLocks noGrp="1" noRot="1" noChangeAspect="1"/>
           </p:cNvSpPr>
           <p:nvPr>
             <p:ph type="sldImg" idx="2"/>
@@ -1107,21 +938,21 @@
             <a:spLocks noGrp="1"/>
           </p:cNvSpPr>
           <p:nvPr>
-            <p:ph type="body" idx="3" sz="quarter"/>
-          </p:nvPr>
-        </p:nvSpPr>
-        <p:spPr/>
-        <p:txBody>
-          <a:bodyPr/>
-          <a:lstStyle/>
-          <a:p>
-            <a:r>
-              <a:t>[AULA E-COMMERCE - MODULO 10 - SLIDE 3]</a:t>
-            </a:r>
-          </a:p>
-          <a:p>
-            <a:r>
-              <a:t>Conceitos Basicos do WooCommerce: Detalhar a diferenca entre Areas de Entrega (geografia), Metodos de Envio (como sera entregue) e Classes de Entrega (tipos de produto volumoso/pequeno).</a:t>
+            <p:ph type="body" sz="quarter" idx="3"/>
+          </p:nvPr>
+        </p:nvSpPr>
+        <p:spPr/>
+        <p:txBody>
+          <a:bodyPr/>
+          <a:lstStyle/>
+          <a:p>
+            <a:r>
+              <a:t>[AULA E-COMMERCE - MODULO 10 - SLIDE 1]</a:t>
+            </a:r>
+          </a:p>
+          <a:p>
+            <a:r>
+              <a:t>Abertura do Modulo 10: Integracao de Frete e Logistica no WooCommerce. Apresentar o papel critico do frete no e-commerce brasileiro e os topicos que serao abordados na aula.</a:t>
             </a:r>
           </a:p>
         </p:txBody>
@@ -1133,12 +964,17 @@
             <a:spLocks noGrp="1"/>
           </p:cNvSpPr>
           <p:nvPr>
-            <p:ph type="sldNum" idx="5" sz="quarter"/>
+            <p:ph type="sldNum" sz="quarter" idx="5"/>
           </p:nvPr>
         </p:nvSpPr>
         <p:spPr/>
       </p:sp>
     </p:spTree>
+    <p:extLst>
+      <p:ext uri="{BB962C8B-B14F-4D97-AF65-F5344CB8AC3E}">
+        <p14:creationId xmlns:p14="http://schemas.microsoft.com/office/powerpoint/2010/main" val="851172806"/>
+      </p:ext>
+    </p:extLst>
   </p:cSld>
   <p:clrMapOvr>
     <a:masterClrMapping/>
@@ -1146,8 +982,8 @@
 </p:notes>
 </file>
 
-<file path=ppt/notesSlides/notesSlide4.xml><?xml version="1.0" encoding="utf-8"?>
-<p:notes xmlns:a="http://schemas.openxmlformats.org/drawingml/2006/main" xmlns:p="http://schemas.openxmlformats.org/presentationml/2006/main" xmlns:r="http://schemas.openxmlformats.org/officeDocument/2006/relationships">
+<file path=ppt/notesSlides/notesSlide7.xml><?xml version="1.0" encoding="utf-8"?>
+<p:notes xmlns:a="http://schemas.openxmlformats.org/drawingml/2006/main" xmlns:r="http://schemas.openxmlformats.org/officeDocument/2006/relationships" xmlns:p="http://schemas.openxmlformats.org/presentationml/2006/main">
   <p:cSld>
     <p:spTree>
       <p:nvGrpSpPr>
@@ -1167,7 +1003,7 @@
         <p:nvSpPr>
           <p:cNvPr id="2" name="Slide Image Placeholder 1"/>
           <p:cNvSpPr>
-            <a:spLocks noGrp="1"/>
+            <a:spLocks noGrp="1" noRot="1" noChangeAspect="1"/>
           </p:cNvSpPr>
           <p:nvPr>
             <p:ph type="sldImg" idx="2"/>
@@ -1182,21 +1018,21 @@
             <a:spLocks noGrp="1"/>
           </p:cNvSpPr>
           <p:nvPr>
-            <p:ph type="body" idx="3" sz="quarter"/>
-          </p:nvPr>
-        </p:nvSpPr>
-        <p:spPr/>
-        <p:txBody>
-          <a:bodyPr/>
-          <a:lstStyle/>
-          <a:p>
-            <a:r>
-              <a:t>[AULA E-COMMERCE - MODULO 10 - SLIDE 4]</a:t>
-            </a:r>
-          </a:p>
-          <a:p>
-            <a:r>
-              <a:t>Cubagem e Dimensoes: Explicar a formula oficial (C x L x A / 6000). Demonstrar com o exemplo pratico do travesseiro o enorme prejuizo que acontece quando a loja nao cadastra dimensoes.</a:t>
+            <p:ph type="body" sz="quarter" idx="3"/>
+          </p:nvPr>
+        </p:nvSpPr>
+        <p:spPr/>
+        <p:txBody>
+          <a:bodyPr/>
+          <a:lstStyle/>
+          <a:p>
+            <a:r>
+              <a:t>[AULA E-COMMERCE - MODULO 10 - SLIDE 1]</a:t>
+            </a:r>
+          </a:p>
+          <a:p>
+            <a:r>
+              <a:t>Abertura do Modulo 10: Integracao de Frete e Logistica no WooCommerce. Apresentar o papel critico do frete no e-commerce brasileiro e os topicos que serao abordados na aula.</a:t>
             </a:r>
           </a:p>
         </p:txBody>
@@ -1208,12 +1044,17 @@
             <a:spLocks noGrp="1"/>
           </p:cNvSpPr>
           <p:nvPr>
-            <p:ph type="sldNum" idx="5" sz="quarter"/>
+            <p:ph type="sldNum" sz="quarter" idx="5"/>
           </p:nvPr>
         </p:nvSpPr>
         <p:spPr/>
       </p:sp>
     </p:spTree>
+    <p:extLst>
+      <p:ext uri="{BB962C8B-B14F-4D97-AF65-F5344CB8AC3E}">
+        <p14:creationId xmlns:p14="http://schemas.microsoft.com/office/powerpoint/2010/main" val="2781291750"/>
+      </p:ext>
+    </p:extLst>
   </p:cSld>
   <p:clrMapOvr>
     <a:masterClrMapping/>
@@ -1221,8 +1062,8 @@
 </p:notes>
 </file>
 
-<file path=ppt/notesSlides/notesSlide5.xml><?xml version="1.0" encoding="utf-8"?>
-<p:notes xmlns:a="http://schemas.openxmlformats.org/drawingml/2006/main" xmlns:p="http://schemas.openxmlformats.org/presentationml/2006/main" xmlns:r="http://schemas.openxmlformats.org/officeDocument/2006/relationships">
+<file path=ppt/notesSlides/notesSlide8.xml><?xml version="1.0" encoding="utf-8"?>
+<p:notes xmlns:a="http://schemas.openxmlformats.org/drawingml/2006/main" xmlns:r="http://schemas.openxmlformats.org/officeDocument/2006/relationships" xmlns:p="http://schemas.openxmlformats.org/presentationml/2006/main">
   <p:cSld>
     <p:spTree>
       <p:nvGrpSpPr>
@@ -1242,7 +1083,7 @@
         <p:nvSpPr>
           <p:cNvPr id="2" name="Slide Image Placeholder 1"/>
           <p:cNvSpPr>
-            <a:spLocks noGrp="1"/>
+            <a:spLocks noGrp="1" noRot="1" noChangeAspect="1"/>
           </p:cNvSpPr>
           <p:nvPr>
             <p:ph type="sldImg" idx="2"/>
@@ -1257,21 +1098,21 @@
             <a:spLocks noGrp="1"/>
           </p:cNvSpPr>
           <p:nvPr>
-            <p:ph type="body" idx="3" sz="quarter"/>
-          </p:nvPr>
-        </p:nvSpPr>
-        <p:spPr/>
-        <p:txBody>
-          <a:bodyPr/>
-          <a:lstStyle/>
-          <a:p>
-            <a:r>
-              <a:t>[AULA E-COMMERCE - MODULO 10 - SLIDE 5]</a:t>
-            </a:r>
-          </a:p>
-          <a:p>
-            <a:r>
-              <a:t>Areas de Entrega Nativas: Navegar pelo painel WordPress &gt; WooCommerce &gt; Configuracoes &gt; Entrega. Explicar como criar zonas por estado e faixas de CEP especificas.</a:t>
+            <p:ph type="body" sz="quarter" idx="3"/>
+          </p:nvPr>
+        </p:nvSpPr>
+        <p:spPr/>
+        <p:txBody>
+          <a:bodyPr/>
+          <a:lstStyle/>
+          <a:p>
+            <a:r>
+              <a:t>[AULA E-COMMERCE - MODULO 10 - SLIDE 1]</a:t>
+            </a:r>
+          </a:p>
+          <a:p>
+            <a:r>
+              <a:t>Abertura do Modulo 10: Integracao de Frete e Logistica no WooCommerce. Apresentar o papel critico do frete no e-commerce brasileiro e os topicos que serao abordados na aula.</a:t>
             </a:r>
           </a:p>
         </p:txBody>
@@ -1283,12 +1124,17 @@
             <a:spLocks noGrp="1"/>
           </p:cNvSpPr>
           <p:nvPr>
-            <p:ph type="sldNum" idx="5" sz="quarter"/>
+            <p:ph type="sldNum" sz="quarter" idx="5"/>
           </p:nvPr>
         </p:nvSpPr>
         <p:spPr/>
       </p:sp>
     </p:spTree>
+    <p:extLst>
+      <p:ext uri="{BB962C8B-B14F-4D97-AF65-F5344CB8AC3E}">
+        <p14:creationId xmlns:p14="http://schemas.microsoft.com/office/powerpoint/2010/main" val="4154124878"/>
+      </p:ext>
+    </p:extLst>
   </p:cSld>
   <p:clrMapOvr>
     <a:masterClrMapping/>
@@ -1296,8 +1142,8 @@
 </p:notes>
 </file>
 
-<file path=ppt/notesSlides/notesSlide6.xml><?xml version="1.0" encoding="utf-8"?>
-<p:notes xmlns:a="http://schemas.openxmlformats.org/drawingml/2006/main" xmlns:p="http://schemas.openxmlformats.org/presentationml/2006/main" xmlns:r="http://schemas.openxmlformats.org/officeDocument/2006/relationships">
+<file path=ppt/notesSlides/notesSlide9.xml><?xml version="1.0" encoding="utf-8"?>
+<p:notes xmlns:a="http://schemas.openxmlformats.org/drawingml/2006/main" xmlns:r="http://schemas.openxmlformats.org/officeDocument/2006/relationships" xmlns:p="http://schemas.openxmlformats.org/presentationml/2006/main">
   <p:cSld>
     <p:spTree>
       <p:nvGrpSpPr>
@@ -1317,7 +1163,7 @@
         <p:nvSpPr>
           <p:cNvPr id="2" name="Slide Image Placeholder 1"/>
           <p:cNvSpPr>
-            <a:spLocks noGrp="1"/>
+            <a:spLocks noGrp="1" noRot="1" noChangeAspect="1"/>
           </p:cNvSpPr>
           <p:nvPr>
             <p:ph type="sldImg" idx="2"/>
@@ -1332,21 +1178,21 @@
             <a:spLocks noGrp="1"/>
           </p:cNvSpPr>
           <p:nvPr>
-            <p:ph type="body" idx="3" sz="quarter"/>
-          </p:nvPr>
-        </p:nvSpPr>
-        <p:spPr/>
-        <p:txBody>
-          <a:bodyPr/>
-          <a:lstStyle/>
-          <a:p>
-            <a:r>
-              <a:t>[AULA E-COMMERCE - MODULO 10 - SLIDE 6]</a:t>
-            </a:r>
-          </a:p>
-          <a:p>
-            <a:r>
-              <a:t>Metodos Nativos: Ensinar a configuracao de Taxa Fixa, as 4 regras de ativacao do Frete Gratis (valor minimo no carrinho) e a Retirada no Local sem custos.</a:t>
+            <p:ph type="body" sz="quarter" idx="3"/>
+          </p:nvPr>
+        </p:nvSpPr>
+        <p:spPr/>
+        <p:txBody>
+          <a:bodyPr/>
+          <a:lstStyle/>
+          <a:p>
+            <a:r>
+              <a:t>[AULA E-COMMERCE - MODULO 10 - SLIDE 1]</a:t>
+            </a:r>
+          </a:p>
+          <a:p>
+            <a:r>
+              <a:t>Abertura do Modulo 10: Integracao de Frete e Logistica no WooCommerce. Apresentar o papel critico do frete no e-commerce brasileiro e os topicos que serao abordados na aula.</a:t>
             </a:r>
           </a:p>
         </p:txBody>
@@ -1358,237 +1204,17 @@
             <a:spLocks noGrp="1"/>
           </p:cNvSpPr>
           <p:nvPr>
-            <p:ph type="sldNum" idx="5" sz="quarter"/>
+            <p:ph type="sldNum" sz="quarter" idx="5"/>
           </p:nvPr>
         </p:nvSpPr>
         <p:spPr/>
       </p:sp>
     </p:spTree>
-  </p:cSld>
-  <p:clrMapOvr>
-    <a:masterClrMapping/>
-  </p:clrMapOvr>
-</p:notes>
-</file>
-
-<file path=ppt/notesSlides/notesSlide7.xml><?xml version="1.0" encoding="utf-8"?>
-<p:notes xmlns:a="http://schemas.openxmlformats.org/drawingml/2006/main" xmlns:p="http://schemas.openxmlformats.org/presentationml/2006/main" xmlns:r="http://schemas.openxmlformats.org/officeDocument/2006/relationships">
-  <p:cSld>
-    <p:spTree>
-      <p:nvGrpSpPr>
-        <p:cNvPr id="1" name=""/>
-        <p:cNvGrpSpPr/>
-        <p:nvPr/>
-      </p:nvGrpSpPr>
-      <p:grpSpPr>
-        <a:xfrm>
-          <a:off x="0" y="0"/>
-          <a:ext cx="0" cy="0"/>
-          <a:chOff x="0" y="0"/>
-          <a:chExt cx="0" cy="0"/>
-        </a:xfrm>
-      </p:grpSpPr>
-      <p:sp>
-        <p:nvSpPr>
-          <p:cNvPr id="2" name="Slide Image Placeholder 1"/>
-          <p:cNvSpPr>
-            <a:spLocks noGrp="1"/>
-          </p:cNvSpPr>
-          <p:nvPr>
-            <p:ph type="sldImg" idx="2"/>
-          </p:nvPr>
-        </p:nvSpPr>
-        <p:spPr/>
-      </p:sp>
-      <p:sp>
-        <p:nvSpPr>
-          <p:cNvPr id="3" name="Notes Placeholder 2"/>
-          <p:cNvSpPr>
-            <a:spLocks noGrp="1"/>
-          </p:cNvSpPr>
-          <p:nvPr>
-            <p:ph type="body" idx="3" sz="quarter"/>
-          </p:nvPr>
-        </p:nvSpPr>
-        <p:spPr/>
-        <p:txBody>
-          <a:bodyPr/>
-          <a:lstStyle/>
-          <a:p>
-            <a:r>
-              <a:t>[AULA E-COMMERCE - MODULO 10 - SLIDE 7]</a:t>
-            </a:r>
-          </a:p>
-          <a:p>
-            <a:r>
-              <a:t>Comparativo Correios x Agregadores: Mostrar aos alunos porque o Melhor Envio e a melhor opcao para pequenas e medias lojas (descontos de 80%, sem contrato nem mensalidade, varias transportadoras).</a:t>
-            </a:r>
-          </a:p>
-        </p:txBody>
-      </p:sp>
-      <p:sp>
-        <p:nvSpPr>
-          <p:cNvPr id="4" name="Slide Number Placeholder 3"/>
-          <p:cNvSpPr>
-            <a:spLocks noGrp="1"/>
-          </p:cNvSpPr>
-          <p:nvPr>
-            <p:ph type="sldNum" idx="5" sz="quarter"/>
-          </p:nvPr>
-        </p:nvSpPr>
-        <p:spPr/>
-      </p:sp>
-    </p:spTree>
-  </p:cSld>
-  <p:clrMapOvr>
-    <a:masterClrMapping/>
-  </p:clrMapOvr>
-</p:notes>
-</file>
-
-<file path=ppt/notesSlides/notesSlide8.xml><?xml version="1.0" encoding="utf-8"?>
-<p:notes xmlns:a="http://schemas.openxmlformats.org/drawingml/2006/main" xmlns:p="http://schemas.openxmlformats.org/presentationml/2006/main" xmlns:r="http://schemas.openxmlformats.org/officeDocument/2006/relationships">
-  <p:cSld>
-    <p:spTree>
-      <p:nvGrpSpPr>
-        <p:cNvPr id="1" name=""/>
-        <p:cNvGrpSpPr/>
-        <p:nvPr/>
-      </p:nvGrpSpPr>
-      <p:grpSpPr>
-        <a:xfrm>
-          <a:off x="0" y="0"/>
-          <a:ext cx="0" cy="0"/>
-          <a:chOff x="0" y="0"/>
-          <a:chExt cx="0" cy="0"/>
-        </a:xfrm>
-      </p:grpSpPr>
-      <p:sp>
-        <p:nvSpPr>
-          <p:cNvPr id="2" name="Slide Image Placeholder 1"/>
-          <p:cNvSpPr>
-            <a:spLocks noGrp="1"/>
-          </p:cNvSpPr>
-          <p:nvPr>
-            <p:ph type="sldImg" idx="2"/>
-          </p:nvPr>
-        </p:nvSpPr>
-        <p:spPr/>
-      </p:sp>
-      <p:sp>
-        <p:nvSpPr>
-          <p:cNvPr id="3" name="Notes Placeholder 2"/>
-          <p:cNvSpPr>
-            <a:spLocks noGrp="1"/>
-          </p:cNvSpPr>
-          <p:nvPr>
-            <p:ph type="body" idx="3" sz="quarter"/>
-          </p:nvPr>
-        </p:nvSpPr>
-        <p:spPr/>
-        <p:txBody>
-          <a:bodyPr/>
-          <a:lstStyle/>
-          <a:p>
-            <a:r>
-              <a:t>[AULA E-COMMERCE - MODULO 10 - SLIDE 8]</a:t>
-            </a:r>
-          </a:p>
-          <a:p>
-            <a:r>
-              <a:t>Instalacao do Plugin Melhor Envio: Demonstrar a busca na aba Plugins &gt; Adicionar Novo e a ativacao do plugin oficial.</a:t>
-            </a:r>
-          </a:p>
-        </p:txBody>
-      </p:sp>
-      <p:sp>
-        <p:nvSpPr>
-          <p:cNvPr id="4" name="Slide Number Placeholder 3"/>
-          <p:cNvSpPr>
-            <a:spLocks noGrp="1"/>
-          </p:cNvSpPr>
-          <p:nvPr>
-            <p:ph type="sldNum" idx="5" sz="quarter"/>
-          </p:nvPr>
-        </p:nvSpPr>
-        <p:spPr/>
-      </p:sp>
-    </p:spTree>
-  </p:cSld>
-  <p:clrMapOvr>
-    <a:masterClrMapping/>
-  </p:clrMapOvr>
-</p:notes>
-</file>
-
-<file path=ppt/notesSlides/notesSlide9.xml><?xml version="1.0" encoding="utf-8"?>
-<p:notes xmlns:a="http://schemas.openxmlformats.org/drawingml/2006/main" xmlns:p="http://schemas.openxmlformats.org/presentationml/2006/main" xmlns:r="http://schemas.openxmlformats.org/officeDocument/2006/relationships">
-  <p:cSld>
-    <p:spTree>
-      <p:nvGrpSpPr>
-        <p:cNvPr id="1" name=""/>
-        <p:cNvGrpSpPr/>
-        <p:nvPr/>
-      </p:nvGrpSpPr>
-      <p:grpSpPr>
-        <a:xfrm>
-          <a:off x="0" y="0"/>
-          <a:ext cx="0" cy="0"/>
-          <a:chOff x="0" y="0"/>
-          <a:chExt cx="0" cy="0"/>
-        </a:xfrm>
-      </p:grpSpPr>
-      <p:sp>
-        <p:nvSpPr>
-          <p:cNvPr id="2" name="Slide Image Placeholder 1"/>
-          <p:cNvSpPr>
-            <a:spLocks noGrp="1"/>
-          </p:cNvSpPr>
-          <p:nvPr>
-            <p:ph type="sldImg" idx="2"/>
-          </p:nvPr>
-        </p:nvSpPr>
-        <p:spPr/>
-      </p:sp>
-      <p:sp>
-        <p:nvSpPr>
-          <p:cNvPr id="3" name="Notes Placeholder 2"/>
-          <p:cNvSpPr>
-            <a:spLocks noGrp="1"/>
-          </p:cNvSpPr>
-          <p:nvPr>
-            <p:ph type="body" idx="3" sz="quarter"/>
-          </p:nvPr>
-        </p:nvSpPr>
-        <p:spPr/>
-        <p:txBody>
-          <a:bodyPr/>
-          <a:lstStyle/>
-          <a:p>
-            <a:r>
-              <a:t>[AULA E-COMMERCE - MODULO 10 - SLIDE 9]</a:t>
-            </a:r>
-          </a:p>
-          <a:p>
-            <a:r>
-              <a:t>Autenticacao e Token: Explicar o que e um Token JWT, como gera-lo no painel do Melhor Envio e como colar no WooCommerce configurando o CEP de postagem.</a:t>
-            </a:r>
-          </a:p>
-        </p:txBody>
-      </p:sp>
-      <p:sp>
-        <p:nvSpPr>
-          <p:cNvPr id="4" name="Slide Number Placeholder 3"/>
-          <p:cNvSpPr>
-            <a:spLocks noGrp="1"/>
-          </p:cNvSpPr>
-          <p:nvPr>
-            <p:ph type="sldNum" idx="5" sz="quarter"/>
-          </p:nvPr>
-        </p:nvSpPr>
-        <p:spPr/>
-      </p:sp>
-    </p:spTree>
+    <p:extLst>
+      <p:ext uri="{BB962C8B-B14F-4D97-AF65-F5344CB8AC3E}">
+        <p14:creationId xmlns:p14="http://schemas.microsoft.com/office/powerpoint/2010/main" val="30681650"/>
+      </p:ext>
+    </p:extLst>
   </p:cSld>
   <p:clrMapOvr>
     <a:masterClrMapping/>
@@ -1634,10 +1260,9 @@
           <a:lstStyle/>
           <a:p>
             <a:r>
-              <a:rPr lang="en-US" smtClean="0"/>
+              <a:rPr lang="en-US"/>
               <a:t>Click to edit Master title style</a:t>
             </a:r>
-            <a:endParaRPr lang="en-US"/>
           </a:p>
         </p:txBody>
       </p:sp>
@@ -1753,10 +1378,9 @@
           </a:lstStyle>
           <a:p>
             <a:r>
-              <a:rPr lang="en-US" smtClean="0"/>
+              <a:rPr lang="en-US"/>
               <a:t>Click to edit Master subtitle style</a:t>
             </a:r>
-            <a:endParaRPr lang="en-US"/>
           </a:p>
         </p:txBody>
       </p:sp>
@@ -1777,7 +1401,7 @@
           <a:p>
             <a:fld id="{5BCAD085-E8A6-8845-BD4E-CB4CCA059FC4}" type="datetimeFigureOut">
               <a:rPr lang="en-US" smtClean="0"/>
-              <a:t>1/27/13</a:t>
+              <a:t>10/22/2026</a:t>
             </a:fld>
             <a:endParaRPr lang="en-US"/>
           </a:p>
@@ -1819,7 +1443,7 @@
           <a:p>
             <a:fld id="{C1FF6DA9-008F-8B48-92A6-B652298478BF}" type="slidenum">
               <a:rPr lang="en-US" smtClean="0"/>
-              <a:t>‹#›</a:t>
+              <a:t>‹nº›</a:t>
             </a:fld>
             <a:endParaRPr lang="en-US"/>
           </a:p>
@@ -1871,10 +1495,9 @@
           <a:lstStyle/>
           <a:p>
             <a:r>
-              <a:rPr lang="en-US" smtClean="0"/>
+              <a:rPr lang="en-US"/>
               <a:t>Click to edit Master title style</a:t>
             </a:r>
-            <a:endParaRPr lang="en-US"/>
           </a:p>
         </p:txBody>
       </p:sp>
@@ -1895,38 +1518,37 @@
           <a:p>
             <a:pPr lvl="0"/>
             <a:r>
-              <a:rPr lang="en-US" smtClean="0"/>
+              <a:rPr lang="en-US"/>
               <a:t>Click to edit Master text styles</a:t>
             </a:r>
           </a:p>
           <a:p>
             <a:pPr lvl="1"/>
             <a:r>
-              <a:rPr lang="en-US" smtClean="0"/>
+              <a:rPr lang="en-US"/>
               <a:t>Second level</a:t>
             </a:r>
           </a:p>
           <a:p>
             <a:pPr lvl="2"/>
             <a:r>
-              <a:rPr lang="en-US" smtClean="0"/>
+              <a:rPr lang="en-US"/>
               <a:t>Third level</a:t>
             </a:r>
           </a:p>
           <a:p>
             <a:pPr lvl="3"/>
             <a:r>
-              <a:rPr lang="en-US" smtClean="0"/>
+              <a:rPr lang="en-US"/>
               <a:t>Fourth level</a:t>
             </a:r>
           </a:p>
           <a:p>
             <a:pPr lvl="4"/>
             <a:r>
-              <a:rPr lang="en-US" smtClean="0"/>
+              <a:rPr lang="en-US"/>
               <a:t>Fifth level</a:t>
             </a:r>
-            <a:endParaRPr lang="en-US"/>
           </a:p>
         </p:txBody>
       </p:sp>
@@ -1947,7 +1569,7 @@
           <a:p>
             <a:fld id="{5BCAD085-E8A6-8845-BD4E-CB4CCA059FC4}" type="datetimeFigureOut">
               <a:rPr lang="en-US" smtClean="0"/>
-              <a:t>1/27/13</a:t>
+              <a:t>10/22/2026</a:t>
             </a:fld>
             <a:endParaRPr lang="en-US"/>
           </a:p>
@@ -1989,7 +1611,7 @@
           <a:p>
             <a:fld id="{C1FF6DA9-008F-8B48-92A6-B652298478BF}" type="slidenum">
               <a:rPr lang="en-US" smtClean="0"/>
-              <a:t>‹#›</a:t>
+              <a:t>‹nº›</a:t>
             </a:fld>
             <a:endParaRPr lang="en-US"/>
           </a:p>
@@ -2046,10 +1668,9 @@
           <a:lstStyle/>
           <a:p>
             <a:r>
-              <a:rPr lang="en-US" smtClean="0"/>
+              <a:rPr lang="en-US"/>
               <a:t>Click to edit Master title style</a:t>
             </a:r>
-            <a:endParaRPr lang="en-US"/>
           </a:p>
         </p:txBody>
       </p:sp>
@@ -2075,38 +1696,37 @@
           <a:p>
             <a:pPr lvl="0"/>
             <a:r>
-              <a:rPr lang="en-US" smtClean="0"/>
+              <a:rPr lang="en-US"/>
               <a:t>Click to edit Master text styles</a:t>
             </a:r>
           </a:p>
           <a:p>
             <a:pPr lvl="1"/>
             <a:r>
-              <a:rPr lang="en-US" smtClean="0"/>
+              <a:rPr lang="en-US"/>
               <a:t>Second level</a:t>
             </a:r>
           </a:p>
           <a:p>
             <a:pPr lvl="2"/>
             <a:r>
-              <a:rPr lang="en-US" smtClean="0"/>
+              <a:rPr lang="en-US"/>
               <a:t>Third level</a:t>
             </a:r>
           </a:p>
           <a:p>
             <a:pPr lvl="3"/>
             <a:r>
-              <a:rPr lang="en-US" smtClean="0"/>
+              <a:rPr lang="en-US"/>
               <a:t>Fourth level</a:t>
             </a:r>
           </a:p>
           <a:p>
             <a:pPr lvl="4"/>
             <a:r>
-              <a:rPr lang="en-US" smtClean="0"/>
+              <a:rPr lang="en-US"/>
               <a:t>Fifth level</a:t>
             </a:r>
-            <a:endParaRPr lang="en-US"/>
           </a:p>
         </p:txBody>
       </p:sp>
@@ -2127,7 +1747,7 @@
           <a:p>
             <a:fld id="{5BCAD085-E8A6-8845-BD4E-CB4CCA059FC4}" type="datetimeFigureOut">
               <a:rPr lang="en-US" smtClean="0"/>
-              <a:t>1/27/13</a:t>
+              <a:t>10/22/2026</a:t>
             </a:fld>
             <a:endParaRPr lang="en-US"/>
           </a:p>
@@ -2169,7 +1789,7 @@
           <a:p>
             <a:fld id="{C1FF6DA9-008F-8B48-92A6-B652298478BF}" type="slidenum">
               <a:rPr lang="en-US" smtClean="0"/>
-              <a:t>‹#›</a:t>
+              <a:t>‹nº›</a:t>
             </a:fld>
             <a:endParaRPr lang="en-US"/>
           </a:p>
@@ -2221,10 +1841,9 @@
           <a:lstStyle/>
           <a:p>
             <a:r>
-              <a:rPr lang="en-US" smtClean="0"/>
+              <a:rPr lang="en-US"/>
               <a:t>Click to edit Master title style</a:t>
             </a:r>
-            <a:endParaRPr lang="en-US"/>
           </a:p>
         </p:txBody>
       </p:sp>
@@ -2245,38 +1864,37 @@
           <a:p>
             <a:pPr lvl="0"/>
             <a:r>
-              <a:rPr lang="en-US" smtClean="0"/>
+              <a:rPr lang="en-US"/>
               <a:t>Click to edit Master text styles</a:t>
             </a:r>
           </a:p>
           <a:p>
             <a:pPr lvl="1"/>
             <a:r>
-              <a:rPr lang="en-US" smtClean="0"/>
+              <a:rPr lang="en-US"/>
               <a:t>Second level</a:t>
             </a:r>
           </a:p>
           <a:p>
             <a:pPr lvl="2"/>
             <a:r>
-              <a:rPr lang="en-US" smtClean="0"/>
+              <a:rPr lang="en-US"/>
               <a:t>Third level</a:t>
             </a:r>
           </a:p>
           <a:p>
             <a:pPr lvl="3"/>
             <a:r>
-              <a:rPr lang="en-US" smtClean="0"/>
+              <a:rPr lang="en-US"/>
               <a:t>Fourth level</a:t>
             </a:r>
           </a:p>
           <a:p>
             <a:pPr lvl="4"/>
             <a:r>
-              <a:rPr lang="en-US" smtClean="0"/>
+              <a:rPr lang="en-US"/>
               <a:t>Fifth level</a:t>
             </a:r>
-            <a:endParaRPr lang="en-US"/>
           </a:p>
         </p:txBody>
       </p:sp>
@@ -2297,7 +1915,7 @@
           <a:p>
             <a:fld id="{5BCAD085-E8A6-8845-BD4E-CB4CCA059FC4}" type="datetimeFigureOut">
               <a:rPr lang="en-US" smtClean="0"/>
-              <a:t>1/27/13</a:t>
+              <a:t>10/22/2026</a:t>
             </a:fld>
             <a:endParaRPr lang="en-US"/>
           </a:p>
@@ -2339,7 +1957,7 @@
           <a:p>
             <a:fld id="{C1FF6DA9-008F-8B48-92A6-B652298478BF}" type="slidenum">
               <a:rPr lang="en-US" smtClean="0"/>
-              <a:t>‹#›</a:t>
+              <a:t>‹nº›</a:t>
             </a:fld>
             <a:endParaRPr lang="en-US"/>
           </a:p>
@@ -2400,10 +2018,9 @@
           </a:lstStyle>
           <a:p>
             <a:r>
-              <a:rPr lang="en-US" smtClean="0"/>
+              <a:rPr lang="en-US"/>
               <a:t>Click to edit Master title style</a:t>
             </a:r>
-            <a:endParaRPr lang="en-US"/>
           </a:p>
         </p:txBody>
       </p:sp>
@@ -2520,7 +2137,7 @@
           <a:p>
             <a:pPr lvl="0"/>
             <a:r>
-              <a:rPr lang="en-US" smtClean="0"/>
+              <a:rPr lang="en-US"/>
               <a:t>Click to edit Master text styles</a:t>
             </a:r>
           </a:p>
@@ -2543,7 +2160,7 @@
           <a:p>
             <a:fld id="{5BCAD085-E8A6-8845-BD4E-CB4CCA059FC4}" type="datetimeFigureOut">
               <a:rPr lang="en-US" smtClean="0"/>
-              <a:t>1/27/13</a:t>
+              <a:t>10/22/2026</a:t>
             </a:fld>
             <a:endParaRPr lang="en-US"/>
           </a:p>
@@ -2585,7 +2202,7 @@
           <a:p>
             <a:fld id="{C1FF6DA9-008F-8B48-92A6-B652298478BF}" type="slidenum">
               <a:rPr lang="en-US" smtClean="0"/>
-              <a:t>‹#›</a:t>
+              <a:t>‹nº›</a:t>
             </a:fld>
             <a:endParaRPr lang="en-US"/>
           </a:p>
@@ -2637,10 +2254,9 @@
           <a:lstStyle/>
           <a:p>
             <a:r>
-              <a:rPr lang="en-US" smtClean="0"/>
+              <a:rPr lang="en-US"/>
               <a:t>Click to edit Master title style</a:t>
             </a:r>
-            <a:endParaRPr lang="en-US"/>
           </a:p>
         </p:txBody>
       </p:sp>
@@ -2694,38 +2310,37 @@
           <a:p>
             <a:pPr lvl="0"/>
             <a:r>
-              <a:rPr lang="en-US" smtClean="0"/>
+              <a:rPr lang="en-US"/>
               <a:t>Click to edit Master text styles</a:t>
             </a:r>
           </a:p>
           <a:p>
             <a:pPr lvl="1"/>
             <a:r>
-              <a:rPr lang="en-US" smtClean="0"/>
+              <a:rPr lang="en-US"/>
               <a:t>Second level</a:t>
             </a:r>
           </a:p>
           <a:p>
             <a:pPr lvl="2"/>
             <a:r>
-              <a:rPr lang="en-US" smtClean="0"/>
+              <a:rPr lang="en-US"/>
               <a:t>Third level</a:t>
             </a:r>
           </a:p>
           <a:p>
             <a:pPr lvl="3"/>
             <a:r>
-              <a:rPr lang="en-US" smtClean="0"/>
+              <a:rPr lang="en-US"/>
               <a:t>Fourth level</a:t>
             </a:r>
           </a:p>
           <a:p>
             <a:pPr lvl="4"/>
             <a:r>
-              <a:rPr lang="en-US" smtClean="0"/>
+              <a:rPr lang="en-US"/>
               <a:t>Fifth level</a:t>
             </a:r>
-            <a:endParaRPr lang="en-US"/>
           </a:p>
         </p:txBody>
       </p:sp>
@@ -2779,38 +2394,37 @@
           <a:p>
             <a:pPr lvl="0"/>
             <a:r>
-              <a:rPr lang="en-US" smtClean="0"/>
+              <a:rPr lang="en-US"/>
               <a:t>Click to edit Master text styles</a:t>
             </a:r>
           </a:p>
           <a:p>
             <a:pPr lvl="1"/>
             <a:r>
-              <a:rPr lang="en-US" smtClean="0"/>
+              <a:rPr lang="en-US"/>
               <a:t>Second level</a:t>
             </a:r>
           </a:p>
           <a:p>
             <a:pPr lvl="2"/>
             <a:r>
-              <a:rPr lang="en-US" smtClean="0"/>
+              <a:rPr lang="en-US"/>
               <a:t>Third level</a:t>
             </a:r>
           </a:p>
           <a:p>
             <a:pPr lvl="3"/>
             <a:r>
-              <a:rPr lang="en-US" smtClean="0"/>
+              <a:rPr lang="en-US"/>
               <a:t>Fourth level</a:t>
             </a:r>
           </a:p>
           <a:p>
             <a:pPr lvl="4"/>
             <a:r>
-              <a:rPr lang="en-US" smtClean="0"/>
+              <a:rPr lang="en-US"/>
               <a:t>Fifth level</a:t>
             </a:r>
-            <a:endParaRPr lang="en-US"/>
           </a:p>
         </p:txBody>
       </p:sp>
@@ -2831,7 +2445,7 @@
           <a:p>
             <a:fld id="{5BCAD085-E8A6-8845-BD4E-CB4CCA059FC4}" type="datetimeFigureOut">
               <a:rPr lang="en-US" smtClean="0"/>
-              <a:t>1/27/13</a:t>
+              <a:t>10/22/2026</a:t>
             </a:fld>
             <a:endParaRPr lang="en-US"/>
           </a:p>
@@ -2873,7 +2487,7 @@
           <a:p>
             <a:fld id="{C1FF6DA9-008F-8B48-92A6-B652298478BF}" type="slidenum">
               <a:rPr lang="en-US" smtClean="0"/>
-              <a:t>‹#›</a:t>
+              <a:t>‹nº›</a:t>
             </a:fld>
             <a:endParaRPr lang="en-US"/>
           </a:p>
@@ -2929,10 +2543,9 @@
           </a:lstStyle>
           <a:p>
             <a:r>
-              <a:rPr lang="en-US" smtClean="0"/>
+              <a:rPr lang="en-US"/>
               <a:t>Click to edit Master title style</a:t>
             </a:r>
-            <a:endParaRPr lang="en-US"/>
           </a:p>
         </p:txBody>
       </p:sp>
@@ -2995,7 +2608,7 @@
           <a:p>
             <a:pPr lvl="0"/>
             <a:r>
-              <a:rPr lang="en-US" smtClean="0"/>
+              <a:rPr lang="en-US"/>
               <a:t>Click to edit Master text styles</a:t>
             </a:r>
           </a:p>
@@ -3051,38 +2664,37 @@
           <a:p>
             <a:pPr lvl="0"/>
             <a:r>
-              <a:rPr lang="en-US" smtClean="0"/>
+              <a:rPr lang="en-US"/>
               <a:t>Click to edit Master text styles</a:t>
             </a:r>
           </a:p>
           <a:p>
             <a:pPr lvl="1"/>
             <a:r>
-              <a:rPr lang="en-US" smtClean="0"/>
+              <a:rPr lang="en-US"/>
               <a:t>Second level</a:t>
             </a:r>
           </a:p>
           <a:p>
             <a:pPr lvl="2"/>
             <a:r>
-              <a:rPr lang="en-US" smtClean="0"/>
+              <a:rPr lang="en-US"/>
               <a:t>Third level</a:t>
             </a:r>
           </a:p>
           <a:p>
             <a:pPr lvl="3"/>
             <a:r>
-              <a:rPr lang="en-US" smtClean="0"/>
+              <a:rPr lang="en-US"/>
               <a:t>Fourth level</a:t>
             </a:r>
           </a:p>
           <a:p>
             <a:pPr lvl="4"/>
             <a:r>
-              <a:rPr lang="en-US" smtClean="0"/>
+              <a:rPr lang="en-US"/>
               <a:t>Fifth level</a:t>
             </a:r>
-            <a:endParaRPr lang="en-US"/>
           </a:p>
         </p:txBody>
       </p:sp>
@@ -3145,7 +2757,7 @@
           <a:p>
             <a:pPr lvl="0"/>
             <a:r>
-              <a:rPr lang="en-US" smtClean="0"/>
+              <a:rPr lang="en-US"/>
               <a:t>Click to edit Master text styles</a:t>
             </a:r>
           </a:p>
@@ -3201,38 +2813,37 @@
           <a:p>
             <a:pPr lvl="0"/>
             <a:r>
-              <a:rPr lang="en-US" smtClean="0"/>
+              <a:rPr lang="en-US"/>
               <a:t>Click to edit Master text styles</a:t>
             </a:r>
           </a:p>
           <a:p>
             <a:pPr lvl="1"/>
             <a:r>
-              <a:rPr lang="en-US" smtClean="0"/>
+              <a:rPr lang="en-US"/>
               <a:t>Second level</a:t>
             </a:r>
           </a:p>
           <a:p>
             <a:pPr lvl="2"/>
             <a:r>
-              <a:rPr lang="en-US" smtClean="0"/>
+              <a:rPr lang="en-US"/>
               <a:t>Third level</a:t>
             </a:r>
           </a:p>
           <a:p>
             <a:pPr lvl="3"/>
             <a:r>
-              <a:rPr lang="en-US" smtClean="0"/>
+              <a:rPr lang="en-US"/>
               <a:t>Fourth level</a:t>
             </a:r>
           </a:p>
           <a:p>
             <a:pPr lvl="4"/>
             <a:r>
-              <a:rPr lang="en-US" smtClean="0"/>
+              <a:rPr lang="en-US"/>
               <a:t>Fifth level</a:t>
             </a:r>
-            <a:endParaRPr lang="en-US"/>
           </a:p>
         </p:txBody>
       </p:sp>
@@ -3253,7 +2864,7 @@
           <a:p>
             <a:fld id="{5BCAD085-E8A6-8845-BD4E-CB4CCA059FC4}" type="datetimeFigureOut">
               <a:rPr lang="en-US" smtClean="0"/>
-              <a:t>1/27/13</a:t>
+              <a:t>10/22/2026</a:t>
             </a:fld>
             <a:endParaRPr lang="en-US"/>
           </a:p>
@@ -3295,7 +2906,7 @@
           <a:p>
             <a:fld id="{C1FF6DA9-008F-8B48-92A6-B652298478BF}" type="slidenum">
               <a:rPr lang="en-US" smtClean="0"/>
-              <a:t>‹#›</a:t>
+              <a:t>‹nº›</a:t>
             </a:fld>
             <a:endParaRPr lang="en-US"/>
           </a:p>
@@ -3347,10 +2958,9 @@
           <a:lstStyle/>
           <a:p>
             <a:r>
-              <a:rPr lang="en-US" smtClean="0"/>
+              <a:rPr lang="en-US"/>
               <a:t>Click to edit Master title style</a:t>
             </a:r>
-            <a:endParaRPr lang="en-US"/>
           </a:p>
         </p:txBody>
       </p:sp>
@@ -3371,7 +2981,7 @@
           <a:p>
             <a:fld id="{5BCAD085-E8A6-8845-BD4E-CB4CCA059FC4}" type="datetimeFigureOut">
               <a:rPr lang="en-US" smtClean="0"/>
-              <a:t>1/27/13</a:t>
+              <a:t>10/22/2026</a:t>
             </a:fld>
             <a:endParaRPr lang="en-US"/>
           </a:p>
@@ -3413,7 +3023,7 @@
           <a:p>
             <a:fld id="{C1FF6DA9-008F-8B48-92A6-B652298478BF}" type="slidenum">
               <a:rPr lang="en-US" smtClean="0"/>
-              <a:t>‹#›</a:t>
+              <a:t>‹nº›</a:t>
             </a:fld>
             <a:endParaRPr lang="en-US"/>
           </a:p>
@@ -3466,7 +3076,7 @@
           <a:p>
             <a:fld id="{5BCAD085-E8A6-8845-BD4E-CB4CCA059FC4}" type="datetimeFigureOut">
               <a:rPr lang="en-US" smtClean="0"/>
-              <a:t>1/27/13</a:t>
+              <a:t>10/22/2026</a:t>
             </a:fld>
             <a:endParaRPr lang="en-US"/>
           </a:p>
@@ -3508,7 +3118,7 @@
           <a:p>
             <a:fld id="{C1FF6DA9-008F-8B48-92A6-B652298478BF}" type="slidenum">
               <a:rPr lang="en-US" smtClean="0"/>
-              <a:t>‹#›</a:t>
+              <a:t>‹nº›</a:t>
             </a:fld>
             <a:endParaRPr lang="en-US"/>
           </a:p>
@@ -3569,10 +3179,9 @@
           </a:lstStyle>
           <a:p>
             <a:r>
-              <a:rPr lang="en-US" smtClean="0"/>
+              <a:rPr lang="en-US"/>
               <a:t>Click to edit Master title style</a:t>
             </a:r>
-            <a:endParaRPr lang="en-US"/>
           </a:p>
         </p:txBody>
       </p:sp>
@@ -3626,38 +3235,37 @@
           <a:p>
             <a:pPr lvl="0"/>
             <a:r>
-              <a:rPr lang="en-US" smtClean="0"/>
+              <a:rPr lang="en-US"/>
               <a:t>Click to edit Master text styles</a:t>
             </a:r>
           </a:p>
           <a:p>
             <a:pPr lvl="1"/>
             <a:r>
-              <a:rPr lang="en-US" smtClean="0"/>
+              <a:rPr lang="en-US"/>
               <a:t>Second level</a:t>
             </a:r>
           </a:p>
           <a:p>
             <a:pPr lvl="2"/>
             <a:r>
-              <a:rPr lang="en-US" smtClean="0"/>
+              <a:rPr lang="en-US"/>
               <a:t>Third level</a:t>
             </a:r>
           </a:p>
           <a:p>
             <a:pPr lvl="3"/>
             <a:r>
-              <a:rPr lang="en-US" smtClean="0"/>
+              <a:rPr lang="en-US"/>
               <a:t>Fourth level</a:t>
             </a:r>
           </a:p>
           <a:p>
             <a:pPr lvl="4"/>
             <a:r>
-              <a:rPr lang="en-US" smtClean="0"/>
+              <a:rPr lang="en-US"/>
               <a:t>Fifth level</a:t>
             </a:r>
-            <a:endParaRPr lang="en-US"/>
           </a:p>
         </p:txBody>
       </p:sp>
@@ -3720,7 +3328,7 @@
           <a:p>
             <a:pPr lvl="0"/>
             <a:r>
-              <a:rPr lang="en-US" smtClean="0"/>
+              <a:rPr lang="en-US"/>
               <a:t>Click to edit Master text styles</a:t>
             </a:r>
           </a:p>
@@ -3743,7 +3351,7 @@
           <a:p>
             <a:fld id="{5BCAD085-E8A6-8845-BD4E-CB4CCA059FC4}" type="datetimeFigureOut">
               <a:rPr lang="en-US" smtClean="0"/>
-              <a:t>1/27/13</a:t>
+              <a:t>10/22/2026</a:t>
             </a:fld>
             <a:endParaRPr lang="en-US"/>
           </a:p>
@@ -3785,7 +3393,7 @@
           <a:p>
             <a:fld id="{C1FF6DA9-008F-8B48-92A6-B652298478BF}" type="slidenum">
               <a:rPr lang="en-US" smtClean="0"/>
-              <a:t>‹#›</a:t>
+              <a:t>‹nº›</a:t>
             </a:fld>
             <a:endParaRPr lang="en-US"/>
           </a:p>
@@ -3846,10 +3454,9 @@
           </a:lstStyle>
           <a:p>
             <a:r>
-              <a:rPr lang="en-US" smtClean="0"/>
+              <a:rPr lang="en-US"/>
               <a:t>Click to edit Master title style</a:t>
             </a:r>
-            <a:endParaRPr lang="en-US"/>
           </a:p>
         </p:txBody>
       </p:sp>
@@ -3973,7 +3580,7 @@
           <a:p>
             <a:pPr lvl="0"/>
             <a:r>
-              <a:rPr lang="en-US" smtClean="0"/>
+              <a:rPr lang="en-US"/>
               <a:t>Click to edit Master text styles</a:t>
             </a:r>
           </a:p>
@@ -3996,7 +3603,7 @@
           <a:p>
             <a:fld id="{5BCAD085-E8A6-8845-BD4E-CB4CCA059FC4}" type="datetimeFigureOut">
               <a:rPr lang="en-US" smtClean="0"/>
-              <a:t>1/27/13</a:t>
+              <a:t>10/22/2026</a:t>
             </a:fld>
             <a:endParaRPr lang="en-US"/>
           </a:p>
@@ -4038,7 +3645,7 @@
           <a:p>
             <a:fld id="{C1FF6DA9-008F-8B48-92A6-B652298478BF}" type="slidenum">
               <a:rPr lang="en-US" smtClean="0"/>
-              <a:t>‹#›</a:t>
+              <a:t>‹nº›</a:t>
             </a:fld>
             <a:endParaRPr lang="en-US"/>
           </a:p>
@@ -4105,10 +3712,9 @@
           <a:lstStyle/>
           <a:p>
             <a:r>
-              <a:rPr lang="en-US" smtClean="0"/>
+              <a:rPr lang="en-US"/>
               <a:t>Click to edit Master title style</a:t>
             </a:r>
-            <a:endParaRPr lang="en-US"/>
           </a:p>
         </p:txBody>
       </p:sp>
@@ -4139,38 +3745,37 @@
           <a:p>
             <a:pPr lvl="0"/>
             <a:r>
-              <a:rPr lang="en-US" smtClean="0"/>
+              <a:rPr lang="en-US"/>
               <a:t>Click to edit Master text styles</a:t>
             </a:r>
           </a:p>
           <a:p>
             <a:pPr lvl="1"/>
             <a:r>
-              <a:rPr lang="en-US" smtClean="0"/>
+              <a:rPr lang="en-US"/>
               <a:t>Second level</a:t>
             </a:r>
           </a:p>
           <a:p>
             <a:pPr lvl="2"/>
             <a:r>
-              <a:rPr lang="en-US" smtClean="0"/>
+              <a:rPr lang="en-US"/>
               <a:t>Third level</a:t>
             </a:r>
           </a:p>
           <a:p>
             <a:pPr lvl="3"/>
             <a:r>
-              <a:rPr lang="en-US" smtClean="0"/>
+              <a:rPr lang="en-US"/>
               <a:t>Fourth level</a:t>
             </a:r>
           </a:p>
           <a:p>
             <a:pPr lvl="4"/>
             <a:r>
-              <a:rPr lang="en-US" smtClean="0"/>
+              <a:rPr lang="en-US"/>
               <a:t>Fifth level</a:t>
             </a:r>
-            <a:endParaRPr lang="en-US"/>
           </a:p>
         </p:txBody>
       </p:sp>
@@ -4209,7 +3814,7 @@
           <a:p>
             <a:fld id="{5BCAD085-E8A6-8845-BD4E-CB4CCA059FC4}" type="datetimeFigureOut">
               <a:rPr lang="en-US" smtClean="0"/>
-              <a:t>1/27/13</a:t>
+              <a:t>10/22/2026</a:t>
             </a:fld>
             <a:endParaRPr lang="en-US"/>
           </a:p>
@@ -4287,7 +3892,7 @@
           <a:p>
             <a:fld id="{C1FF6DA9-008F-8B48-92A6-B652298478BF}" type="slidenum">
               <a:rPr lang="en-US" smtClean="0"/>
-              <a:t>‹#›</a:t>
+              <a:t>‹nº›</a:t>
             </a:fld>
             <a:endParaRPr lang="en-US"/>
           </a:p>
@@ -4568,7 +4173,7 @@
 </file>
 
 <file path=ppt/slides/slide1.xml><?xml version="1.0" encoding="utf-8"?>
-<p:sld xmlns:a="http://schemas.openxmlformats.org/drawingml/2006/main" xmlns:p="http://schemas.openxmlformats.org/presentationml/2006/main" xmlns:r="http://schemas.openxmlformats.org/officeDocument/2006/relationships">
+<p:sld xmlns:a="http://schemas.openxmlformats.org/drawingml/2006/main" xmlns:r="http://schemas.openxmlformats.org/officeDocument/2006/relationships" xmlns:p="http://schemas.openxmlformats.org/presentationml/2006/main">
   <p:cSld>
     <p:spTree>
       <p:nvGrpSpPr>
@@ -4576,17 +4181,30 @@
         <p:cNvGrpSpPr/>
         <p:nvPr/>
       </p:nvGrpSpPr>
-      <p:grpSpPr/>
+      <p:grpSpPr>
+        <a:xfrm>
+          <a:off x="0" y="0"/>
+          <a:ext cx="0" cy="0"/>
+          <a:chOff x="0" y="0"/>
+          <a:chExt cx="0" cy="0"/>
+        </a:xfrm>
+      </p:grpSpPr>
       <p:pic>
         <p:nvPicPr>
-          <p:cNvPr id="2" name="Picture 1" descr="mod10_slide1.png"/>
+          <p:cNvPr id="3" name="Imagem 2">
+            <a:extLst>
+              <a:ext uri="{FF2B5EF4-FFF2-40B4-BE49-F238E27FC236}">
+                <a16:creationId xmlns:a16="http://schemas.microsoft.com/office/drawing/2014/main" id="{C97E33CE-7FBA-66AC-4476-0DF14C9C6164}"/>
+              </a:ext>
+            </a:extLst>
+          </p:cNvPr>
           <p:cNvPicPr>
             <a:picLocks noChangeAspect="1"/>
           </p:cNvPicPr>
           <p:nvPr/>
         </p:nvPicPr>
         <p:blipFill>
-          <a:blip r:embed="rId2"/>
+          <a:blip r:embed="rId3"/>
           <a:stretch>
             <a:fillRect/>
           </a:stretch>
@@ -4594,14 +4212,65 @@
         <p:spPr>
           <a:xfrm>
             <a:off x="0" y="0"/>
-            <a:ext cx="12191695" cy="6858000"/>
+            <a:ext cx="12192000" cy="6858000"/>
           </a:xfrm>
           <a:prstGeom prst="rect">
             <a:avLst/>
           </a:prstGeom>
         </p:spPr>
       </p:pic>
+      <p:sp>
+        <p:nvSpPr>
+          <p:cNvPr id="4" name="Seta: para Cima 3">
+            <a:extLst>
+              <a:ext uri="{FF2B5EF4-FFF2-40B4-BE49-F238E27FC236}">
+                <a16:creationId xmlns:a16="http://schemas.microsoft.com/office/drawing/2014/main" id="{A49BF2F6-B8A5-D332-AB1A-B79FFE626202}"/>
+              </a:ext>
+            </a:extLst>
+          </p:cNvPr>
+          <p:cNvSpPr/>
+          <p:nvPr/>
+        </p:nvSpPr>
+        <p:spPr>
+          <a:xfrm rot="18270987">
+            <a:off x="3282463" y="3397195"/>
+            <a:ext cx="1617785" cy="2069123"/>
+          </a:xfrm>
+          <a:prstGeom prst="upArrow">
+            <a:avLst/>
+          </a:prstGeom>
+        </p:spPr>
+        <p:style>
+          <a:lnRef idx="2">
+            <a:schemeClr val="accent2">
+              <a:shade val="15000"/>
+            </a:schemeClr>
+          </a:lnRef>
+          <a:fillRef idx="1">
+            <a:schemeClr val="accent2"/>
+          </a:fillRef>
+          <a:effectRef idx="0">
+            <a:schemeClr val="accent2"/>
+          </a:effectRef>
+          <a:fontRef idx="minor">
+            <a:schemeClr val="lt1"/>
+          </a:fontRef>
+        </p:style>
+        <p:txBody>
+          <a:bodyPr rtlCol="0" anchor="ctr"/>
+          <a:lstStyle/>
+          <a:p>
+            <a:pPr algn="ctr"/>
+            <a:endParaRPr lang="en-US"/>
+          </a:p>
+        </p:txBody>
+      </p:sp>
     </p:spTree>
+    <p:extLst>
+      <p:ext uri="{BB962C8B-B14F-4D97-AF65-F5344CB8AC3E}">
+        <p14:creationId xmlns:p14="http://schemas.microsoft.com/office/powerpoint/2010/main" val="709262934"/>
+      </p:ext>
+    </p:extLst>
   </p:cSld>
   <p:clrMapOvr>
     <a:masterClrMapping/>
@@ -4610,7 +4279,7 @@
 </file>
 
 <file path=ppt/slides/slide10.xml><?xml version="1.0" encoding="utf-8"?>
-<p:sld xmlns:a="http://schemas.openxmlformats.org/drawingml/2006/main" xmlns:p="http://schemas.openxmlformats.org/presentationml/2006/main" xmlns:r="http://schemas.openxmlformats.org/officeDocument/2006/relationships">
+<p:sld xmlns:a="http://schemas.openxmlformats.org/drawingml/2006/main" xmlns:r="http://schemas.openxmlformats.org/officeDocument/2006/relationships" xmlns:p="http://schemas.openxmlformats.org/presentationml/2006/main">
   <p:cSld>
     <p:spTree>
       <p:nvGrpSpPr>
@@ -4618,32 +4287,20 @@
         <p:cNvGrpSpPr/>
         <p:nvPr/>
       </p:nvGrpSpPr>
-      <p:grpSpPr/>
-      <p:pic>
-        <p:nvPicPr>
-          <p:cNvPr id="2" name="Picture 1" descr="mod10_slide10.png"/>
-          <p:cNvPicPr>
-            <a:picLocks noChangeAspect="1"/>
-          </p:cNvPicPr>
-          <p:nvPr/>
-        </p:nvPicPr>
-        <p:blipFill>
-          <a:blip r:embed="rId2"/>
-          <a:stretch>
-            <a:fillRect/>
-          </a:stretch>
-        </p:blipFill>
-        <p:spPr>
-          <a:xfrm>
-            <a:off x="0" y="0"/>
-            <a:ext cx="12191695" cy="6858000"/>
-          </a:xfrm>
-          <a:prstGeom prst="rect">
-            <a:avLst/>
-          </a:prstGeom>
-        </p:spPr>
-      </p:pic>
+      <p:grpSpPr>
+        <a:xfrm>
+          <a:off x="0" y="0"/>
+          <a:ext cx="0" cy="0"/>
+          <a:chOff x="0" y="0"/>
+          <a:chExt cx="0" cy="0"/>
+        </a:xfrm>
+      </p:grpSpPr>
     </p:spTree>
+    <p:extLst>
+      <p:ext uri="{BB962C8B-B14F-4D97-AF65-F5344CB8AC3E}">
+        <p14:creationId xmlns:p14="http://schemas.microsoft.com/office/powerpoint/2010/main" val="3004191823"/>
+      </p:ext>
+    </p:extLst>
   </p:cSld>
   <p:clrMapOvr>
     <a:masterClrMapping/>
@@ -4652,7 +4309,7 @@
 </file>
 
 <file path=ppt/slides/slide11.xml><?xml version="1.0" encoding="utf-8"?>
-<p:sld xmlns:a="http://schemas.openxmlformats.org/drawingml/2006/main" xmlns:p="http://schemas.openxmlformats.org/presentationml/2006/main" xmlns:r="http://schemas.openxmlformats.org/officeDocument/2006/relationships">
+<p:sld xmlns:a="http://schemas.openxmlformats.org/drawingml/2006/main" xmlns:r="http://schemas.openxmlformats.org/officeDocument/2006/relationships" xmlns:p="http://schemas.openxmlformats.org/presentationml/2006/main">
   <p:cSld>
     <p:spTree>
       <p:nvGrpSpPr>
@@ -4660,32 +4317,20 @@
         <p:cNvGrpSpPr/>
         <p:nvPr/>
       </p:nvGrpSpPr>
-      <p:grpSpPr/>
-      <p:pic>
-        <p:nvPicPr>
-          <p:cNvPr id="2" name="Picture 1" descr="mod10_slide11.png"/>
-          <p:cNvPicPr>
-            <a:picLocks noChangeAspect="1"/>
-          </p:cNvPicPr>
-          <p:nvPr/>
-        </p:nvPicPr>
-        <p:blipFill>
-          <a:blip r:embed="rId2"/>
-          <a:stretch>
-            <a:fillRect/>
-          </a:stretch>
-        </p:blipFill>
-        <p:spPr>
-          <a:xfrm>
-            <a:off x="0" y="0"/>
-            <a:ext cx="12191695" cy="6858000"/>
-          </a:xfrm>
-          <a:prstGeom prst="rect">
-            <a:avLst/>
-          </a:prstGeom>
-        </p:spPr>
-      </p:pic>
+      <p:grpSpPr>
+        <a:xfrm>
+          <a:off x="0" y="0"/>
+          <a:ext cx="0" cy="0"/>
+          <a:chOff x="0" y="0"/>
+          <a:chExt cx="0" cy="0"/>
+        </a:xfrm>
+      </p:grpSpPr>
     </p:spTree>
+    <p:extLst>
+      <p:ext uri="{BB962C8B-B14F-4D97-AF65-F5344CB8AC3E}">
+        <p14:creationId xmlns:p14="http://schemas.microsoft.com/office/powerpoint/2010/main" val="385448863"/>
+      </p:ext>
+    </p:extLst>
   </p:cSld>
   <p:clrMapOvr>
     <a:masterClrMapping/>
@@ -4694,7 +4339,7 @@
 </file>
 
 <file path=ppt/slides/slide12.xml><?xml version="1.0" encoding="utf-8"?>
-<p:sld xmlns:a="http://schemas.openxmlformats.org/drawingml/2006/main" xmlns:p="http://schemas.openxmlformats.org/presentationml/2006/main" xmlns:r="http://schemas.openxmlformats.org/officeDocument/2006/relationships">
+<p:sld xmlns:a="http://schemas.openxmlformats.org/drawingml/2006/main" xmlns:r="http://schemas.openxmlformats.org/officeDocument/2006/relationships" xmlns:p="http://schemas.openxmlformats.org/presentationml/2006/main">
   <p:cSld>
     <p:spTree>
       <p:nvGrpSpPr>
@@ -4702,158 +4347,20 @@
         <p:cNvGrpSpPr/>
         <p:nvPr/>
       </p:nvGrpSpPr>
-      <p:grpSpPr/>
-      <p:pic>
-        <p:nvPicPr>
-          <p:cNvPr id="2" name="Picture 1" descr="mod10_slide12.png"/>
-          <p:cNvPicPr>
-            <a:picLocks noChangeAspect="1"/>
-          </p:cNvPicPr>
-          <p:nvPr/>
-        </p:nvPicPr>
-        <p:blipFill>
-          <a:blip r:embed="rId2"/>
-          <a:stretch>
-            <a:fillRect/>
-          </a:stretch>
-        </p:blipFill>
-        <p:spPr>
-          <a:xfrm>
-            <a:off x="0" y="0"/>
-            <a:ext cx="12191695" cy="6858000"/>
-          </a:xfrm>
-          <a:prstGeom prst="rect">
-            <a:avLst/>
-          </a:prstGeom>
-        </p:spPr>
-      </p:pic>
+      <p:grpSpPr>
+        <a:xfrm>
+          <a:off x="0" y="0"/>
+          <a:ext cx="0" cy="0"/>
+          <a:chOff x="0" y="0"/>
+          <a:chExt cx="0" cy="0"/>
+        </a:xfrm>
+      </p:grpSpPr>
     </p:spTree>
-  </p:cSld>
-  <p:clrMapOvr>
-    <a:masterClrMapping/>
-  </p:clrMapOvr>
-</p:sld>
-</file>
-
-<file path=ppt/slides/slide13.xml><?xml version="1.0" encoding="utf-8"?>
-<p:sld xmlns:a="http://schemas.openxmlformats.org/drawingml/2006/main" xmlns:p="http://schemas.openxmlformats.org/presentationml/2006/main" xmlns:r="http://schemas.openxmlformats.org/officeDocument/2006/relationships">
-  <p:cSld>
-    <p:spTree>
-      <p:nvGrpSpPr>
-        <p:cNvPr id="1" name=""/>
-        <p:cNvGrpSpPr/>
-        <p:nvPr/>
-      </p:nvGrpSpPr>
-      <p:grpSpPr/>
-      <p:pic>
-        <p:nvPicPr>
-          <p:cNvPr id="2" name="Picture 1" descr="mod10_slide13.png"/>
-          <p:cNvPicPr>
-            <a:picLocks noChangeAspect="1"/>
-          </p:cNvPicPr>
-          <p:nvPr/>
-        </p:nvPicPr>
-        <p:blipFill>
-          <a:blip r:embed="rId2"/>
-          <a:stretch>
-            <a:fillRect/>
-          </a:stretch>
-        </p:blipFill>
-        <p:spPr>
-          <a:xfrm>
-            <a:off x="0" y="0"/>
-            <a:ext cx="12191695" cy="6858000"/>
-          </a:xfrm>
-          <a:prstGeom prst="rect">
-            <a:avLst/>
-          </a:prstGeom>
-        </p:spPr>
-      </p:pic>
-    </p:spTree>
-  </p:cSld>
-  <p:clrMapOvr>
-    <a:masterClrMapping/>
-  </p:clrMapOvr>
-</p:sld>
-</file>
-
-<file path=ppt/slides/slide14.xml><?xml version="1.0" encoding="utf-8"?>
-<p:sld xmlns:a="http://schemas.openxmlformats.org/drawingml/2006/main" xmlns:p="http://schemas.openxmlformats.org/presentationml/2006/main" xmlns:r="http://schemas.openxmlformats.org/officeDocument/2006/relationships">
-  <p:cSld>
-    <p:spTree>
-      <p:nvGrpSpPr>
-        <p:cNvPr id="1" name=""/>
-        <p:cNvGrpSpPr/>
-        <p:nvPr/>
-      </p:nvGrpSpPr>
-      <p:grpSpPr/>
-      <p:pic>
-        <p:nvPicPr>
-          <p:cNvPr id="2" name="Picture 1" descr="mod10_slide14.png"/>
-          <p:cNvPicPr>
-            <a:picLocks noChangeAspect="1"/>
-          </p:cNvPicPr>
-          <p:nvPr/>
-        </p:nvPicPr>
-        <p:blipFill>
-          <a:blip r:embed="rId2"/>
-          <a:stretch>
-            <a:fillRect/>
-          </a:stretch>
-        </p:blipFill>
-        <p:spPr>
-          <a:xfrm>
-            <a:off x="0" y="0"/>
-            <a:ext cx="12191695" cy="6858000"/>
-          </a:xfrm>
-          <a:prstGeom prst="rect">
-            <a:avLst/>
-          </a:prstGeom>
-        </p:spPr>
-      </p:pic>
-    </p:spTree>
-  </p:cSld>
-  <p:clrMapOvr>
-    <a:masterClrMapping/>
-  </p:clrMapOvr>
-</p:sld>
-</file>
-
-<file path=ppt/slides/slide15.xml><?xml version="1.0" encoding="utf-8"?>
-<p:sld xmlns:a="http://schemas.openxmlformats.org/drawingml/2006/main" xmlns:p="http://schemas.openxmlformats.org/presentationml/2006/main" xmlns:r="http://schemas.openxmlformats.org/officeDocument/2006/relationships">
-  <p:cSld>
-    <p:spTree>
-      <p:nvGrpSpPr>
-        <p:cNvPr id="1" name=""/>
-        <p:cNvGrpSpPr/>
-        <p:nvPr/>
-      </p:nvGrpSpPr>
-      <p:grpSpPr/>
-      <p:pic>
-        <p:nvPicPr>
-          <p:cNvPr id="2" name="Picture 1" descr="mod10_slide15.png"/>
-          <p:cNvPicPr>
-            <a:picLocks noChangeAspect="1"/>
-          </p:cNvPicPr>
-          <p:nvPr/>
-        </p:nvPicPr>
-        <p:blipFill>
-          <a:blip r:embed="rId2"/>
-          <a:stretch>
-            <a:fillRect/>
-          </a:stretch>
-        </p:blipFill>
-        <p:spPr>
-          <a:xfrm>
-            <a:off x="0" y="0"/>
-            <a:ext cx="12191695" cy="6858000"/>
-          </a:xfrm>
-          <a:prstGeom prst="rect">
-            <a:avLst/>
-          </a:prstGeom>
-        </p:spPr>
-      </p:pic>
-    </p:spTree>
+    <p:extLst>
+      <p:ext uri="{BB962C8B-B14F-4D97-AF65-F5344CB8AC3E}">
+        <p14:creationId xmlns:p14="http://schemas.microsoft.com/office/powerpoint/2010/main" val="1005745847"/>
+      </p:ext>
+    </p:extLst>
   </p:cSld>
   <p:clrMapOvr>
     <a:masterClrMapping/>
@@ -4862,7 +4369,7 @@
 </file>
 
 <file path=ppt/slides/slide2.xml><?xml version="1.0" encoding="utf-8"?>
-<p:sld xmlns:a="http://schemas.openxmlformats.org/drawingml/2006/main" xmlns:p="http://schemas.openxmlformats.org/presentationml/2006/main" xmlns:r="http://schemas.openxmlformats.org/officeDocument/2006/relationships">
+<p:sld xmlns:a="http://schemas.openxmlformats.org/drawingml/2006/main" xmlns:r="http://schemas.openxmlformats.org/officeDocument/2006/relationships" xmlns:p="http://schemas.openxmlformats.org/presentationml/2006/main">
   <p:cSld>
     <p:spTree>
       <p:nvGrpSpPr>
@@ -4870,32 +4377,96 @@
         <p:cNvGrpSpPr/>
         <p:nvPr/>
       </p:nvGrpSpPr>
-      <p:grpSpPr/>
+      <p:grpSpPr>
+        <a:xfrm>
+          <a:off x="0" y="0"/>
+          <a:ext cx="0" cy="0"/>
+          <a:chOff x="0" y="0"/>
+          <a:chExt cx="0" cy="0"/>
+        </a:xfrm>
+      </p:grpSpPr>
       <p:pic>
         <p:nvPicPr>
-          <p:cNvPr id="2" name="Picture 1" descr="mod10_slide2.png"/>
+          <p:cNvPr id="3" name="Imagem 2">
+            <a:extLst>
+              <a:ext uri="{FF2B5EF4-FFF2-40B4-BE49-F238E27FC236}">
+                <a16:creationId xmlns:a16="http://schemas.microsoft.com/office/drawing/2014/main" id="{8E791DF1-111D-B928-B190-8F75A519C1A7}"/>
+              </a:ext>
+            </a:extLst>
+          </p:cNvPr>
           <p:cNvPicPr>
             <a:picLocks noChangeAspect="1"/>
           </p:cNvPicPr>
           <p:nvPr/>
         </p:nvPicPr>
         <p:blipFill>
-          <a:blip r:embed="rId2"/>
+          <a:blip r:embed="rId3"/>
           <a:stretch>
             <a:fillRect/>
           </a:stretch>
         </p:blipFill>
         <p:spPr>
           <a:xfrm>
-            <a:off x="0" y="0"/>
-            <a:ext cx="12191695" cy="6858000"/>
+            <a:off x="0" y="182880"/>
+            <a:ext cx="12192000" cy="6492240"/>
           </a:xfrm>
           <a:prstGeom prst="rect">
             <a:avLst/>
           </a:prstGeom>
         </p:spPr>
       </p:pic>
+      <p:sp>
+        <p:nvSpPr>
+          <p:cNvPr id="4" name="Seta: para Cima 3">
+            <a:extLst>
+              <a:ext uri="{FF2B5EF4-FFF2-40B4-BE49-F238E27FC236}">
+                <a16:creationId xmlns:a16="http://schemas.microsoft.com/office/drawing/2014/main" id="{862E2AB5-35A2-844E-6D6C-992918A0421E}"/>
+              </a:ext>
+            </a:extLst>
+          </p:cNvPr>
+          <p:cNvSpPr/>
+          <p:nvPr/>
+        </p:nvSpPr>
+        <p:spPr>
+          <a:xfrm rot="18270987">
+            <a:off x="984740" y="3983349"/>
+            <a:ext cx="1617785" cy="2069123"/>
+          </a:xfrm>
+          <a:prstGeom prst="upArrow">
+            <a:avLst/>
+          </a:prstGeom>
+        </p:spPr>
+        <p:style>
+          <a:lnRef idx="2">
+            <a:schemeClr val="accent2">
+              <a:shade val="15000"/>
+            </a:schemeClr>
+          </a:lnRef>
+          <a:fillRef idx="1">
+            <a:schemeClr val="accent2"/>
+          </a:fillRef>
+          <a:effectRef idx="0">
+            <a:schemeClr val="accent2"/>
+          </a:effectRef>
+          <a:fontRef idx="minor">
+            <a:schemeClr val="lt1"/>
+          </a:fontRef>
+        </p:style>
+        <p:txBody>
+          <a:bodyPr rtlCol="0" anchor="ctr"/>
+          <a:lstStyle/>
+          <a:p>
+            <a:pPr algn="ctr"/>
+            <a:endParaRPr lang="en-US"/>
+          </a:p>
+        </p:txBody>
+      </p:sp>
     </p:spTree>
+    <p:extLst>
+      <p:ext uri="{BB962C8B-B14F-4D97-AF65-F5344CB8AC3E}">
+        <p14:creationId xmlns:p14="http://schemas.microsoft.com/office/powerpoint/2010/main" val="1664507461"/>
+      </p:ext>
+    </p:extLst>
   </p:cSld>
   <p:clrMapOvr>
     <a:masterClrMapping/>
@@ -4904,7 +4475,7 @@
 </file>
 
 <file path=ppt/slides/slide3.xml><?xml version="1.0" encoding="utf-8"?>
-<p:sld xmlns:a="http://schemas.openxmlformats.org/drawingml/2006/main" xmlns:p="http://schemas.openxmlformats.org/presentationml/2006/main" xmlns:r="http://schemas.openxmlformats.org/officeDocument/2006/relationships">
+<p:sld xmlns:a="http://schemas.openxmlformats.org/drawingml/2006/main" xmlns:r="http://schemas.openxmlformats.org/officeDocument/2006/relationships" xmlns:p="http://schemas.openxmlformats.org/presentationml/2006/main">
   <p:cSld>
     <p:spTree>
       <p:nvGrpSpPr>
@@ -4912,32 +4483,96 @@
         <p:cNvGrpSpPr/>
         <p:nvPr/>
       </p:nvGrpSpPr>
-      <p:grpSpPr/>
+      <p:grpSpPr>
+        <a:xfrm>
+          <a:off x="0" y="0"/>
+          <a:ext cx="0" cy="0"/>
+          <a:chOff x="0" y="0"/>
+          <a:chExt cx="0" cy="0"/>
+        </a:xfrm>
+      </p:grpSpPr>
       <p:pic>
         <p:nvPicPr>
-          <p:cNvPr id="2" name="Picture 1" descr="mod10_slide3.png"/>
+          <p:cNvPr id="3" name="Imagem 2">
+            <a:extLst>
+              <a:ext uri="{FF2B5EF4-FFF2-40B4-BE49-F238E27FC236}">
+                <a16:creationId xmlns:a16="http://schemas.microsoft.com/office/drawing/2014/main" id="{8E791DF1-111D-B928-B190-8F75A519C1A7}"/>
+              </a:ext>
+            </a:extLst>
+          </p:cNvPr>
           <p:cNvPicPr>
             <a:picLocks noChangeAspect="1"/>
           </p:cNvPicPr>
           <p:nvPr/>
         </p:nvPicPr>
         <p:blipFill>
-          <a:blip r:embed="rId2"/>
+          <a:blip r:embed="rId3"/>
           <a:stretch>
             <a:fillRect/>
           </a:stretch>
         </p:blipFill>
         <p:spPr>
           <a:xfrm>
-            <a:off x="0" y="0"/>
-            <a:ext cx="12191695" cy="6858000"/>
+            <a:off x="0" y="182880"/>
+            <a:ext cx="12192000" cy="6492240"/>
           </a:xfrm>
           <a:prstGeom prst="rect">
             <a:avLst/>
           </a:prstGeom>
         </p:spPr>
       </p:pic>
+      <p:sp>
+        <p:nvSpPr>
+          <p:cNvPr id="2" name="Seta: para Cima 1">
+            <a:extLst>
+              <a:ext uri="{FF2B5EF4-FFF2-40B4-BE49-F238E27FC236}">
+                <a16:creationId xmlns:a16="http://schemas.microsoft.com/office/drawing/2014/main" id="{FD340B13-167C-6AC2-4BC9-BDFB144CC14B}"/>
+              </a:ext>
+            </a:extLst>
+          </p:cNvPr>
+          <p:cNvSpPr/>
+          <p:nvPr/>
+        </p:nvSpPr>
+        <p:spPr>
+          <a:xfrm>
+            <a:off x="1582616" y="1563744"/>
+            <a:ext cx="1617785" cy="2069123"/>
+          </a:xfrm>
+          <a:prstGeom prst="upArrow">
+            <a:avLst/>
+          </a:prstGeom>
+        </p:spPr>
+        <p:style>
+          <a:lnRef idx="2">
+            <a:schemeClr val="accent2">
+              <a:shade val="15000"/>
+            </a:schemeClr>
+          </a:lnRef>
+          <a:fillRef idx="1">
+            <a:schemeClr val="accent2"/>
+          </a:fillRef>
+          <a:effectRef idx="0">
+            <a:schemeClr val="accent2"/>
+          </a:effectRef>
+          <a:fontRef idx="minor">
+            <a:schemeClr val="lt1"/>
+          </a:fontRef>
+        </p:style>
+        <p:txBody>
+          <a:bodyPr rtlCol="0" anchor="ctr"/>
+          <a:lstStyle/>
+          <a:p>
+            <a:pPr algn="ctr"/>
+            <a:endParaRPr lang="en-US"/>
+          </a:p>
+        </p:txBody>
+      </p:sp>
     </p:spTree>
+    <p:extLst>
+      <p:ext uri="{BB962C8B-B14F-4D97-AF65-F5344CB8AC3E}">
+        <p14:creationId xmlns:p14="http://schemas.microsoft.com/office/powerpoint/2010/main" val="3149485366"/>
+      </p:ext>
+    </p:extLst>
   </p:cSld>
   <p:clrMapOvr>
     <a:masterClrMapping/>
@@ -4946,7 +4581,7 @@
 </file>
 
 <file path=ppt/slides/slide4.xml><?xml version="1.0" encoding="utf-8"?>
-<p:sld xmlns:a="http://schemas.openxmlformats.org/drawingml/2006/main" xmlns:p="http://schemas.openxmlformats.org/presentationml/2006/main" xmlns:r="http://schemas.openxmlformats.org/officeDocument/2006/relationships">
+<p:sld xmlns:a="http://schemas.openxmlformats.org/drawingml/2006/main" xmlns:r="http://schemas.openxmlformats.org/officeDocument/2006/relationships" xmlns:p="http://schemas.openxmlformats.org/presentationml/2006/main">
   <p:cSld>
     <p:spTree>
       <p:nvGrpSpPr>
@@ -4954,32 +4589,96 @@
         <p:cNvGrpSpPr/>
         <p:nvPr/>
       </p:nvGrpSpPr>
-      <p:grpSpPr/>
+      <p:grpSpPr>
+        <a:xfrm>
+          <a:off x="0" y="0"/>
+          <a:ext cx="0" cy="0"/>
+          <a:chOff x="0" y="0"/>
+          <a:chExt cx="0" cy="0"/>
+        </a:xfrm>
+      </p:grpSpPr>
       <p:pic>
         <p:nvPicPr>
-          <p:cNvPr id="2" name="Picture 1" descr="mod10_slide4.png"/>
+          <p:cNvPr id="3" name="Imagem 2">
+            <a:extLst>
+              <a:ext uri="{FF2B5EF4-FFF2-40B4-BE49-F238E27FC236}">
+                <a16:creationId xmlns:a16="http://schemas.microsoft.com/office/drawing/2014/main" id="{264AC705-7D1F-56A2-5E25-17EF6F1A16DC}"/>
+              </a:ext>
+            </a:extLst>
+          </p:cNvPr>
           <p:cNvPicPr>
             <a:picLocks noChangeAspect="1"/>
           </p:cNvPicPr>
           <p:nvPr/>
         </p:nvPicPr>
         <p:blipFill>
-          <a:blip r:embed="rId2"/>
+          <a:blip r:embed="rId3"/>
           <a:stretch>
             <a:fillRect/>
           </a:stretch>
         </p:blipFill>
         <p:spPr>
           <a:xfrm>
-            <a:off x="0" y="0"/>
-            <a:ext cx="12191695" cy="6858000"/>
+            <a:off x="0" y="182880"/>
+            <a:ext cx="12192000" cy="6492240"/>
           </a:xfrm>
           <a:prstGeom prst="rect">
             <a:avLst/>
           </a:prstGeom>
         </p:spPr>
       </p:pic>
+      <p:sp>
+        <p:nvSpPr>
+          <p:cNvPr id="4" name="Seta: para Cima 3">
+            <a:extLst>
+              <a:ext uri="{FF2B5EF4-FFF2-40B4-BE49-F238E27FC236}">
+                <a16:creationId xmlns:a16="http://schemas.microsoft.com/office/drawing/2014/main" id="{4F7E5B36-892D-17DD-DC49-FE2E475B6C51}"/>
+              </a:ext>
+            </a:extLst>
+          </p:cNvPr>
+          <p:cNvSpPr/>
+          <p:nvPr/>
+        </p:nvSpPr>
+        <p:spPr>
+          <a:xfrm>
+            <a:off x="8991601" y="2394438"/>
+            <a:ext cx="1617785" cy="2069123"/>
+          </a:xfrm>
+          <a:prstGeom prst="upArrow">
+            <a:avLst/>
+          </a:prstGeom>
+        </p:spPr>
+        <p:style>
+          <a:lnRef idx="2">
+            <a:schemeClr val="accent2">
+              <a:shade val="15000"/>
+            </a:schemeClr>
+          </a:lnRef>
+          <a:fillRef idx="1">
+            <a:schemeClr val="accent2"/>
+          </a:fillRef>
+          <a:effectRef idx="0">
+            <a:schemeClr val="accent2"/>
+          </a:effectRef>
+          <a:fontRef idx="minor">
+            <a:schemeClr val="lt1"/>
+          </a:fontRef>
+        </p:style>
+        <p:txBody>
+          <a:bodyPr rtlCol="0" anchor="ctr"/>
+          <a:lstStyle/>
+          <a:p>
+            <a:pPr algn="ctr"/>
+            <a:endParaRPr lang="en-US"/>
+          </a:p>
+        </p:txBody>
+      </p:sp>
     </p:spTree>
+    <p:extLst>
+      <p:ext uri="{BB962C8B-B14F-4D97-AF65-F5344CB8AC3E}">
+        <p14:creationId xmlns:p14="http://schemas.microsoft.com/office/powerpoint/2010/main" val="3892521864"/>
+      </p:ext>
+    </p:extLst>
   </p:cSld>
   <p:clrMapOvr>
     <a:masterClrMapping/>
@@ -4988,7 +4687,7 @@
 </file>
 
 <file path=ppt/slides/slide5.xml><?xml version="1.0" encoding="utf-8"?>
-<p:sld xmlns:a="http://schemas.openxmlformats.org/drawingml/2006/main" xmlns:p="http://schemas.openxmlformats.org/presentationml/2006/main" xmlns:r="http://schemas.openxmlformats.org/officeDocument/2006/relationships">
+<p:sld xmlns:a="http://schemas.openxmlformats.org/drawingml/2006/main" xmlns:r="http://schemas.openxmlformats.org/officeDocument/2006/relationships" xmlns:p="http://schemas.openxmlformats.org/presentationml/2006/main">
   <p:cSld>
     <p:spTree>
       <p:nvGrpSpPr>
@@ -4996,32 +4695,96 @@
         <p:cNvGrpSpPr/>
         <p:nvPr/>
       </p:nvGrpSpPr>
-      <p:grpSpPr/>
+      <p:grpSpPr>
+        <a:xfrm>
+          <a:off x="0" y="0"/>
+          <a:ext cx="0" cy="0"/>
+          <a:chOff x="0" y="0"/>
+          <a:chExt cx="0" cy="0"/>
+        </a:xfrm>
+      </p:grpSpPr>
       <p:pic>
         <p:nvPicPr>
-          <p:cNvPr id="2" name="Picture 1" descr="mod10_slide5.png"/>
+          <p:cNvPr id="3" name="Imagem 2">
+            <a:extLst>
+              <a:ext uri="{FF2B5EF4-FFF2-40B4-BE49-F238E27FC236}">
+                <a16:creationId xmlns:a16="http://schemas.microsoft.com/office/drawing/2014/main" id="{4703A864-AF16-82DB-7DDA-48C4732CFFFC}"/>
+              </a:ext>
+            </a:extLst>
+          </p:cNvPr>
           <p:cNvPicPr>
             <a:picLocks noChangeAspect="1"/>
           </p:cNvPicPr>
           <p:nvPr/>
         </p:nvPicPr>
         <p:blipFill>
-          <a:blip r:embed="rId2"/>
+          <a:blip r:embed="rId3"/>
           <a:stretch>
             <a:fillRect/>
           </a:stretch>
         </p:blipFill>
         <p:spPr>
           <a:xfrm>
-            <a:off x="0" y="0"/>
-            <a:ext cx="12191695" cy="6858000"/>
+            <a:off x="0" y="182880"/>
+            <a:ext cx="12192000" cy="6492240"/>
           </a:xfrm>
           <a:prstGeom prst="rect">
             <a:avLst/>
           </a:prstGeom>
         </p:spPr>
       </p:pic>
+      <p:sp>
+        <p:nvSpPr>
+          <p:cNvPr id="4" name="Seta: para Cima 3">
+            <a:extLst>
+              <a:ext uri="{FF2B5EF4-FFF2-40B4-BE49-F238E27FC236}">
+                <a16:creationId xmlns:a16="http://schemas.microsoft.com/office/drawing/2014/main" id="{E6939A9F-7705-2018-4CFC-D5FAF113B8BA}"/>
+              </a:ext>
+            </a:extLst>
+          </p:cNvPr>
+          <p:cNvSpPr/>
+          <p:nvPr/>
+        </p:nvSpPr>
+        <p:spPr>
+          <a:xfrm>
+            <a:off x="3399694" y="3320561"/>
+            <a:ext cx="1617785" cy="2069123"/>
+          </a:xfrm>
+          <a:prstGeom prst="upArrow">
+            <a:avLst/>
+          </a:prstGeom>
+        </p:spPr>
+        <p:style>
+          <a:lnRef idx="2">
+            <a:schemeClr val="accent2">
+              <a:shade val="15000"/>
+            </a:schemeClr>
+          </a:lnRef>
+          <a:fillRef idx="1">
+            <a:schemeClr val="accent2"/>
+          </a:fillRef>
+          <a:effectRef idx="0">
+            <a:schemeClr val="accent2"/>
+          </a:effectRef>
+          <a:fontRef idx="minor">
+            <a:schemeClr val="lt1"/>
+          </a:fontRef>
+        </p:style>
+        <p:txBody>
+          <a:bodyPr rtlCol="0" anchor="ctr"/>
+          <a:lstStyle/>
+          <a:p>
+            <a:pPr algn="ctr"/>
+            <a:endParaRPr lang="en-US"/>
+          </a:p>
+        </p:txBody>
+      </p:sp>
     </p:spTree>
+    <p:extLst>
+      <p:ext uri="{BB962C8B-B14F-4D97-AF65-F5344CB8AC3E}">
+        <p14:creationId xmlns:p14="http://schemas.microsoft.com/office/powerpoint/2010/main" val="1587301790"/>
+      </p:ext>
+    </p:extLst>
   </p:cSld>
   <p:clrMapOvr>
     <a:masterClrMapping/>
@@ -5030,7 +4793,7 @@
 </file>
 
 <file path=ppt/slides/slide6.xml><?xml version="1.0" encoding="utf-8"?>
-<p:sld xmlns:a="http://schemas.openxmlformats.org/drawingml/2006/main" xmlns:p="http://schemas.openxmlformats.org/presentationml/2006/main" xmlns:r="http://schemas.openxmlformats.org/officeDocument/2006/relationships">
+<p:sld xmlns:a="http://schemas.openxmlformats.org/drawingml/2006/main" xmlns:r="http://schemas.openxmlformats.org/officeDocument/2006/relationships" xmlns:p="http://schemas.openxmlformats.org/presentationml/2006/main">
   <p:cSld>
     <p:spTree>
       <p:nvGrpSpPr>
@@ -5038,32 +4801,96 @@
         <p:cNvGrpSpPr/>
         <p:nvPr/>
       </p:nvGrpSpPr>
-      <p:grpSpPr/>
+      <p:grpSpPr>
+        <a:xfrm>
+          <a:off x="0" y="0"/>
+          <a:ext cx="0" cy="0"/>
+          <a:chOff x="0" y="0"/>
+          <a:chExt cx="0" cy="0"/>
+        </a:xfrm>
+      </p:grpSpPr>
       <p:pic>
         <p:nvPicPr>
-          <p:cNvPr id="2" name="Picture 1" descr="mod10_slide6.png"/>
+          <p:cNvPr id="3" name="Imagem 2">
+            <a:extLst>
+              <a:ext uri="{FF2B5EF4-FFF2-40B4-BE49-F238E27FC236}">
+                <a16:creationId xmlns:a16="http://schemas.microsoft.com/office/drawing/2014/main" id="{60DD1A45-A05F-8643-C2E9-F736B8C7D9FE}"/>
+              </a:ext>
+            </a:extLst>
+          </p:cNvPr>
           <p:cNvPicPr>
             <a:picLocks noChangeAspect="1"/>
           </p:cNvPicPr>
           <p:nvPr/>
         </p:nvPicPr>
         <p:blipFill>
-          <a:blip r:embed="rId2"/>
+          <a:blip r:embed="rId3"/>
           <a:stretch>
             <a:fillRect/>
           </a:stretch>
         </p:blipFill>
         <p:spPr>
           <a:xfrm>
-            <a:off x="0" y="0"/>
-            <a:ext cx="12191695" cy="6858000"/>
+            <a:off x="0" y="182880"/>
+            <a:ext cx="12192000" cy="6492240"/>
           </a:xfrm>
           <a:prstGeom prst="rect">
             <a:avLst/>
           </a:prstGeom>
         </p:spPr>
       </p:pic>
+      <p:sp>
+        <p:nvSpPr>
+          <p:cNvPr id="4" name="Seta: para Cima 3">
+            <a:extLst>
+              <a:ext uri="{FF2B5EF4-FFF2-40B4-BE49-F238E27FC236}">
+                <a16:creationId xmlns:a16="http://schemas.microsoft.com/office/drawing/2014/main" id="{13CA2CC0-2D37-E5E0-06CE-EF331B94B80F}"/>
+              </a:ext>
+            </a:extLst>
+          </p:cNvPr>
+          <p:cNvSpPr/>
+          <p:nvPr/>
+        </p:nvSpPr>
+        <p:spPr>
+          <a:xfrm>
+            <a:off x="3598986" y="3320561"/>
+            <a:ext cx="1617785" cy="2069123"/>
+          </a:xfrm>
+          <a:prstGeom prst="upArrow">
+            <a:avLst/>
+          </a:prstGeom>
+        </p:spPr>
+        <p:style>
+          <a:lnRef idx="2">
+            <a:schemeClr val="accent2">
+              <a:shade val="15000"/>
+            </a:schemeClr>
+          </a:lnRef>
+          <a:fillRef idx="1">
+            <a:schemeClr val="accent2"/>
+          </a:fillRef>
+          <a:effectRef idx="0">
+            <a:schemeClr val="accent2"/>
+          </a:effectRef>
+          <a:fontRef idx="minor">
+            <a:schemeClr val="lt1"/>
+          </a:fontRef>
+        </p:style>
+        <p:txBody>
+          <a:bodyPr rtlCol="0" anchor="ctr"/>
+          <a:lstStyle/>
+          <a:p>
+            <a:pPr algn="ctr"/>
+            <a:endParaRPr lang="en-US"/>
+          </a:p>
+        </p:txBody>
+      </p:sp>
     </p:spTree>
+    <p:extLst>
+      <p:ext uri="{BB962C8B-B14F-4D97-AF65-F5344CB8AC3E}">
+        <p14:creationId xmlns:p14="http://schemas.microsoft.com/office/powerpoint/2010/main" val="4202812772"/>
+      </p:ext>
+    </p:extLst>
   </p:cSld>
   <p:clrMapOvr>
     <a:masterClrMapping/>
@@ -5072,7 +4899,7 @@
 </file>
 
 <file path=ppt/slides/slide7.xml><?xml version="1.0" encoding="utf-8"?>
-<p:sld xmlns:a="http://schemas.openxmlformats.org/drawingml/2006/main" xmlns:p="http://schemas.openxmlformats.org/presentationml/2006/main" xmlns:r="http://schemas.openxmlformats.org/officeDocument/2006/relationships">
+<p:sld xmlns:a="http://schemas.openxmlformats.org/drawingml/2006/main" xmlns:r="http://schemas.openxmlformats.org/officeDocument/2006/relationships" xmlns:p="http://schemas.openxmlformats.org/presentationml/2006/main">
   <p:cSld>
     <p:spTree>
       <p:nvGrpSpPr>
@@ -5080,32 +4907,96 @@
         <p:cNvGrpSpPr/>
         <p:nvPr/>
       </p:nvGrpSpPr>
-      <p:grpSpPr/>
+      <p:grpSpPr>
+        <a:xfrm>
+          <a:off x="0" y="0"/>
+          <a:ext cx="0" cy="0"/>
+          <a:chOff x="0" y="0"/>
+          <a:chExt cx="0" cy="0"/>
+        </a:xfrm>
+      </p:grpSpPr>
       <p:pic>
         <p:nvPicPr>
-          <p:cNvPr id="2" name="Picture 1" descr="mod10_slide7.png"/>
+          <p:cNvPr id="3" name="Imagem 2">
+            <a:extLst>
+              <a:ext uri="{FF2B5EF4-FFF2-40B4-BE49-F238E27FC236}">
+                <a16:creationId xmlns:a16="http://schemas.microsoft.com/office/drawing/2014/main" id="{09DC30BC-37D0-C807-FDDB-C25DC86DAAB4}"/>
+              </a:ext>
+            </a:extLst>
+          </p:cNvPr>
           <p:cNvPicPr>
             <a:picLocks noChangeAspect="1"/>
           </p:cNvPicPr>
           <p:nvPr/>
         </p:nvPicPr>
         <p:blipFill>
-          <a:blip r:embed="rId2"/>
+          <a:blip r:embed="rId3"/>
           <a:stretch>
             <a:fillRect/>
           </a:stretch>
         </p:blipFill>
         <p:spPr>
           <a:xfrm>
-            <a:off x="0" y="0"/>
-            <a:ext cx="12191695" cy="6858000"/>
+            <a:off x="0" y="182880"/>
+            <a:ext cx="12192000" cy="6492240"/>
           </a:xfrm>
           <a:prstGeom prst="rect">
             <a:avLst/>
           </a:prstGeom>
         </p:spPr>
       </p:pic>
+      <p:sp>
+        <p:nvSpPr>
+          <p:cNvPr id="4" name="Seta: para Cima 3">
+            <a:extLst>
+              <a:ext uri="{FF2B5EF4-FFF2-40B4-BE49-F238E27FC236}">
+                <a16:creationId xmlns:a16="http://schemas.microsoft.com/office/drawing/2014/main" id="{6DA58376-AAF3-5B8F-7BBE-451F1A2B19D8}"/>
+              </a:ext>
+            </a:extLst>
+          </p:cNvPr>
+          <p:cNvSpPr/>
+          <p:nvPr/>
+        </p:nvSpPr>
+        <p:spPr>
+          <a:xfrm rot="16200000">
+            <a:off x="2614247" y="4831666"/>
+            <a:ext cx="1617785" cy="2069123"/>
+          </a:xfrm>
+          <a:prstGeom prst="upArrow">
+            <a:avLst/>
+          </a:prstGeom>
+        </p:spPr>
+        <p:style>
+          <a:lnRef idx="2">
+            <a:schemeClr val="accent2">
+              <a:shade val="15000"/>
+            </a:schemeClr>
+          </a:lnRef>
+          <a:fillRef idx="1">
+            <a:schemeClr val="accent2"/>
+          </a:fillRef>
+          <a:effectRef idx="0">
+            <a:schemeClr val="accent2"/>
+          </a:effectRef>
+          <a:fontRef idx="minor">
+            <a:schemeClr val="lt1"/>
+          </a:fontRef>
+        </p:style>
+        <p:txBody>
+          <a:bodyPr rtlCol="0" anchor="ctr"/>
+          <a:lstStyle/>
+          <a:p>
+            <a:pPr algn="ctr"/>
+            <a:endParaRPr lang="en-US"/>
+          </a:p>
+        </p:txBody>
+      </p:sp>
     </p:spTree>
+    <p:extLst>
+      <p:ext uri="{BB962C8B-B14F-4D97-AF65-F5344CB8AC3E}">
+        <p14:creationId xmlns:p14="http://schemas.microsoft.com/office/powerpoint/2010/main" val="4266333405"/>
+      </p:ext>
+    </p:extLst>
   </p:cSld>
   <p:clrMapOvr>
     <a:masterClrMapping/>
@@ -5114,7 +5005,7 @@
 </file>
 
 <file path=ppt/slides/slide8.xml><?xml version="1.0" encoding="utf-8"?>
-<p:sld xmlns:a="http://schemas.openxmlformats.org/drawingml/2006/main" xmlns:p="http://schemas.openxmlformats.org/presentationml/2006/main" xmlns:r="http://schemas.openxmlformats.org/officeDocument/2006/relationships">
+<p:sld xmlns:a="http://schemas.openxmlformats.org/drawingml/2006/main" xmlns:r="http://schemas.openxmlformats.org/officeDocument/2006/relationships" xmlns:p="http://schemas.openxmlformats.org/presentationml/2006/main">
   <p:cSld>
     <p:spTree>
       <p:nvGrpSpPr>
@@ -5122,25 +5013,38 @@
         <p:cNvGrpSpPr/>
         <p:nvPr/>
       </p:nvGrpSpPr>
-      <p:grpSpPr/>
+      <p:grpSpPr>
+        <a:xfrm>
+          <a:off x="0" y="0"/>
+          <a:ext cx="0" cy="0"/>
+          <a:chOff x="0" y="0"/>
+          <a:chExt cx="0" cy="0"/>
+        </a:xfrm>
+      </p:grpSpPr>
       <p:pic>
         <p:nvPicPr>
-          <p:cNvPr id="2" name="Picture 1" descr="mod10_slide8.png"/>
+          <p:cNvPr id="3" name="Imagem 2">
+            <a:extLst>
+              <a:ext uri="{FF2B5EF4-FFF2-40B4-BE49-F238E27FC236}">
+                <a16:creationId xmlns:a16="http://schemas.microsoft.com/office/drawing/2014/main" id="{0504CA7D-CFA6-D0D1-86CB-D99C314E1287}"/>
+              </a:ext>
+            </a:extLst>
+          </p:cNvPr>
           <p:cNvPicPr>
             <a:picLocks noChangeAspect="1"/>
           </p:cNvPicPr>
           <p:nvPr/>
         </p:nvPicPr>
         <p:blipFill>
-          <a:blip r:embed="rId2"/>
+          <a:blip r:embed="rId3"/>
           <a:stretch>
             <a:fillRect/>
           </a:stretch>
         </p:blipFill>
         <p:spPr>
           <a:xfrm>
-            <a:off x="0" y="0"/>
-            <a:ext cx="12191695" cy="6858000"/>
+            <a:off x="0" y="182880"/>
+            <a:ext cx="12192000" cy="6492240"/>
           </a:xfrm>
           <a:prstGeom prst="rect">
             <a:avLst/>
@@ -5148,6 +5052,11 @@
         </p:spPr>
       </p:pic>
     </p:spTree>
+    <p:extLst>
+      <p:ext uri="{BB962C8B-B14F-4D97-AF65-F5344CB8AC3E}">
+        <p14:creationId xmlns:p14="http://schemas.microsoft.com/office/powerpoint/2010/main" val="1261910007"/>
+      </p:ext>
+    </p:extLst>
   </p:cSld>
   <p:clrMapOvr>
     <a:masterClrMapping/>
@@ -5156,7 +5065,7 @@
 </file>
 
 <file path=ppt/slides/slide9.xml><?xml version="1.0" encoding="utf-8"?>
-<p:sld xmlns:a="http://schemas.openxmlformats.org/drawingml/2006/main" xmlns:p="http://schemas.openxmlformats.org/presentationml/2006/main" xmlns:r="http://schemas.openxmlformats.org/officeDocument/2006/relationships">
+<p:sld xmlns:a="http://schemas.openxmlformats.org/drawingml/2006/main" xmlns:r="http://schemas.openxmlformats.org/officeDocument/2006/relationships" xmlns:p="http://schemas.openxmlformats.org/presentationml/2006/main">
   <p:cSld>
     <p:spTree>
       <p:nvGrpSpPr>
@@ -5164,32 +5073,20 @@
         <p:cNvGrpSpPr/>
         <p:nvPr/>
       </p:nvGrpSpPr>
-      <p:grpSpPr/>
-      <p:pic>
-        <p:nvPicPr>
-          <p:cNvPr id="2" name="Picture 1" descr="mod10_slide9.png"/>
-          <p:cNvPicPr>
-            <a:picLocks noChangeAspect="1"/>
-          </p:cNvPicPr>
-          <p:nvPr/>
-        </p:nvPicPr>
-        <p:blipFill>
-          <a:blip r:embed="rId2"/>
-          <a:stretch>
-            <a:fillRect/>
-          </a:stretch>
-        </p:blipFill>
-        <p:spPr>
-          <a:xfrm>
-            <a:off x="0" y="0"/>
-            <a:ext cx="12191695" cy="6858000"/>
-          </a:xfrm>
-          <a:prstGeom prst="rect">
-            <a:avLst/>
-          </a:prstGeom>
-        </p:spPr>
-      </p:pic>
+      <p:grpSpPr>
+        <a:xfrm>
+          <a:off x="0" y="0"/>
+          <a:ext cx="0" cy="0"/>
+          <a:chOff x="0" y="0"/>
+          <a:chExt cx="0" cy="0"/>
+        </a:xfrm>
+      </p:grpSpPr>
     </p:spTree>
+    <p:extLst>
+      <p:ext uri="{BB962C8B-B14F-4D97-AF65-F5344CB8AC3E}">
+        <p14:creationId xmlns:p14="http://schemas.microsoft.com/office/powerpoint/2010/main" val="3892980243"/>
+      </p:ext>
+    </p:extLst>
   </p:cSld>
   <p:clrMapOvr>
     <a:masterClrMapping/>
@@ -5518,7 +5415,7 @@
 </file>
 
 <file path=ppt/theme/theme2.xml><?xml version="1.0" encoding="utf-8"?>
-<a:theme xmlns:a="http://schemas.openxmlformats.org/drawingml/2006/main" name="Office Theme">
+<a:theme xmlns:a="http://schemas.openxmlformats.org/drawingml/2006/main" name="Tema do Office">
   <a:themeElements>
     <a:clrScheme name="Office">
       <a:dk1>
@@ -5528,44 +5425,44 @@
         <a:sysClr val="window" lastClr="FFFFFF"/>
       </a:lt1>
       <a:dk2>
-        <a:srgbClr val="1F497D"/>
+        <a:srgbClr val="0E2841"/>
       </a:dk2>
       <a:lt2>
-        <a:srgbClr val="EEECE1"/>
+        <a:srgbClr val="E8E8E8"/>
       </a:lt2>
       <a:accent1>
-        <a:srgbClr val="4F81BD"/>
+        <a:srgbClr val="156082"/>
       </a:accent1>
       <a:accent2>
-        <a:srgbClr val="C0504D"/>
+        <a:srgbClr val="E97132"/>
       </a:accent2>
       <a:accent3>
-        <a:srgbClr val="9BBB59"/>
+        <a:srgbClr val="196B24"/>
       </a:accent3>
       <a:accent4>
-        <a:srgbClr val="8064A2"/>
+        <a:srgbClr val="0F9ED5"/>
       </a:accent4>
       <a:accent5>
-        <a:srgbClr val="4BACC6"/>
+        <a:srgbClr val="A02B93"/>
       </a:accent5>
       <a:accent6>
-        <a:srgbClr val="F79646"/>
+        <a:srgbClr val="4EA72E"/>
       </a:accent6>
       <a:hlink>
-        <a:srgbClr val="0000FF"/>
+        <a:srgbClr val="467886"/>
       </a:hlink>
       <a:folHlink>
-        <a:srgbClr val="800080"/>
+        <a:srgbClr val="96607D"/>
       </a:folHlink>
     </a:clrScheme>
     <a:fontScheme name="Office">
       <a:majorFont>
-        <a:latin typeface="Calibri"/>
+        <a:latin typeface="Aptos Display" panose="02110004020202020204"/>
         <a:ea typeface=""/>
         <a:cs typeface=""/>
-        <a:font script="Jpan" typeface="ＭＳ Ｐゴシック"/>
+        <a:font script="Jpan" typeface="游ゴシック Light"/>
         <a:font script="Hang" typeface="맑은 고딕"/>
-        <a:font script="Hans" typeface="宋体"/>
+        <a:font script="Hans" typeface="等线 Light"/>
         <a:font script="Hant" typeface="新細明體"/>
         <a:font script="Arab" typeface="Times New Roman"/>
         <a:font script="Hebr" typeface="Times New Roman"/>
@@ -5593,14 +5490,31 @@
         <a:font script="Viet" typeface="Times New Roman"/>
         <a:font script="Uigh" typeface="Microsoft Uighur"/>
         <a:font script="Geor" typeface="Sylfaen"/>
+        <a:font script="Armn" typeface="Arial"/>
+        <a:font script="Bugi" typeface="Leelawadee UI"/>
+        <a:font script="Bopo" typeface="Microsoft JhengHei"/>
+        <a:font script="Java" typeface="Javanese Text"/>
+        <a:font script="Lisu" typeface="Segoe UI"/>
+        <a:font script="Mymr" typeface="Myanmar Text"/>
+        <a:font script="Nkoo" typeface="Ebrima"/>
+        <a:font script="Olck" typeface="Nirmala UI"/>
+        <a:font script="Osma" typeface="Ebrima"/>
+        <a:font script="Phag" typeface="Phagspa"/>
+        <a:font script="Syrn" typeface="Estrangelo Edessa"/>
+        <a:font script="Syrj" typeface="Estrangelo Edessa"/>
+        <a:font script="Syre" typeface="Estrangelo Edessa"/>
+        <a:font script="Sora" typeface="Nirmala UI"/>
+        <a:font script="Tale" typeface="Microsoft Tai Le"/>
+        <a:font script="Talu" typeface="Microsoft New Tai Lue"/>
+        <a:font script="Tfng" typeface="Ebrima"/>
       </a:majorFont>
       <a:minorFont>
-        <a:latin typeface="Calibri"/>
+        <a:latin typeface="Aptos" panose="02110004020202020204"/>
         <a:ea typeface=""/>
         <a:cs typeface=""/>
-        <a:font script="Jpan" typeface="ＭＳ Ｐゴシック"/>
+        <a:font script="Jpan" typeface="游ゴシック"/>
         <a:font script="Hang" typeface="맑은 고딕"/>
-        <a:font script="Hans" typeface="宋体"/>
+        <a:font script="Hans" typeface="等线"/>
         <a:font script="Hant" typeface="新細明體"/>
         <a:font script="Arab" typeface="Arial"/>
         <a:font script="Hebr" typeface="Arial"/>
@@ -5628,6 +5542,23 @@
         <a:font script="Viet" typeface="Arial"/>
         <a:font script="Uigh" typeface="Microsoft Uighur"/>
         <a:font script="Geor" typeface="Sylfaen"/>
+        <a:font script="Armn" typeface="Arial"/>
+        <a:font script="Bugi" typeface="Leelawadee UI"/>
+        <a:font script="Bopo" typeface="Microsoft JhengHei"/>
+        <a:font script="Java" typeface="Javanese Text"/>
+        <a:font script="Lisu" typeface="Segoe UI"/>
+        <a:font script="Mymr" typeface="Myanmar Text"/>
+        <a:font script="Nkoo" typeface="Ebrima"/>
+        <a:font script="Olck" typeface="Nirmala UI"/>
+        <a:font script="Osma" typeface="Ebrima"/>
+        <a:font script="Phag" typeface="Phagspa"/>
+        <a:font script="Syrn" typeface="Estrangelo Edessa"/>
+        <a:font script="Syrj" typeface="Estrangelo Edessa"/>
+        <a:font script="Syre" typeface="Estrangelo Edessa"/>
+        <a:font script="Sora" typeface="Nirmala UI"/>
+        <a:font script="Tale" typeface="Microsoft Tai Le"/>
+        <a:font script="Talu" typeface="Microsoft New Tai Lue"/>
+        <a:font script="Tfng" typeface="Ebrima"/>
       </a:minorFont>
     </a:fontScheme>
     <a:fmtScheme name="Office">
@@ -5639,180 +5570,136 @@
           <a:gsLst>
             <a:gs pos="0">
               <a:schemeClr val="phClr">
-                <a:tint val="50000"/>
-                <a:satMod val="300000"/>
+                <a:lumMod val="110000"/>
+                <a:satMod val="105000"/>
+                <a:tint val="67000"/>
               </a:schemeClr>
             </a:gs>
-            <a:gs pos="35000">
+            <a:gs pos="50000">
               <a:schemeClr val="phClr">
-                <a:tint val="37000"/>
-                <a:satMod val="300000"/>
+                <a:lumMod val="105000"/>
+                <a:satMod val="103000"/>
+                <a:tint val="73000"/>
               </a:schemeClr>
             </a:gs>
             <a:gs pos="100000">
               <a:schemeClr val="phClr">
-                <a:tint val="15000"/>
-                <a:satMod val="350000"/>
+                <a:lumMod val="105000"/>
+                <a:satMod val="109000"/>
+                <a:tint val="81000"/>
               </a:schemeClr>
             </a:gs>
           </a:gsLst>
-          <a:lin ang="16200000" scaled="1"/>
+          <a:lin ang="5400000" scaled="0"/>
         </a:gradFill>
         <a:gradFill rotWithShape="1">
           <a:gsLst>
             <a:gs pos="0">
               <a:schemeClr val="phClr">
-                <a:tint val="100000"/>
+                <a:satMod val="103000"/>
+                <a:lumMod val="102000"/>
+                <a:tint val="94000"/>
+              </a:schemeClr>
+            </a:gs>
+            <a:gs pos="50000">
+              <a:schemeClr val="phClr">
+                <a:satMod val="110000"/>
+                <a:lumMod val="100000"/>
                 <a:shade val="100000"/>
-                <a:satMod val="130000"/>
               </a:schemeClr>
             </a:gs>
             <a:gs pos="100000">
               <a:schemeClr val="phClr">
-                <a:tint val="50000"/>
-                <a:shade val="100000"/>
-                <a:satMod val="350000"/>
+                <a:lumMod val="99000"/>
+                <a:satMod val="120000"/>
+                <a:shade val="78000"/>
               </a:schemeClr>
             </a:gs>
           </a:gsLst>
-          <a:lin ang="16200000" scaled="0"/>
+          <a:lin ang="5400000" scaled="0"/>
         </a:gradFill>
       </a:fillStyleLst>
       <a:lnStyleLst>
-        <a:ln w="9525" cap="flat" cmpd="sng" algn="ctr">
+        <a:ln w="12700" cap="flat" cmpd="sng" algn="ctr">
           <a:solidFill>
-            <a:schemeClr val="phClr">
-              <a:shade val="95000"/>
-              <a:satMod val="105000"/>
-            </a:schemeClr>
+            <a:schemeClr val="phClr"/>
           </a:solidFill>
           <a:prstDash val="solid"/>
+          <a:miter lim="800000"/>
+        </a:ln>
+        <a:ln w="19050" cap="flat" cmpd="sng" algn="ctr">
+          <a:solidFill>
+            <a:schemeClr val="phClr"/>
+          </a:solidFill>
+          <a:prstDash val="solid"/>
+          <a:miter lim="800000"/>
         </a:ln>
         <a:ln w="25400" cap="flat" cmpd="sng" algn="ctr">
           <a:solidFill>
             <a:schemeClr val="phClr"/>
           </a:solidFill>
           <a:prstDash val="solid"/>
-        </a:ln>
-        <a:ln w="38100" cap="flat" cmpd="sng" algn="ctr">
-          <a:solidFill>
-            <a:schemeClr val="phClr"/>
-          </a:solidFill>
-          <a:prstDash val="solid"/>
+          <a:miter lim="800000"/>
         </a:ln>
       </a:lnStyleLst>
       <a:effectStyleLst>
         <a:effectStyle>
+          <a:effectLst/>
+        </a:effectStyle>
+        <a:effectStyle>
+          <a:effectLst/>
+        </a:effectStyle>
+        <a:effectStyle>
           <a:effectLst>
-            <a:outerShdw blurRad="40000" dist="20000" dir="5400000" rotWithShape="0">
+            <a:outerShdw blurRad="57150" dist="19050" dir="5400000" algn="ctr" rotWithShape="0">
               <a:srgbClr val="000000">
-                <a:alpha val="38000"/>
+                <a:alpha val="63000"/>
               </a:srgbClr>
             </a:outerShdw>
           </a:effectLst>
-        </a:effectStyle>
-        <a:effectStyle>
-          <a:effectLst>
-            <a:outerShdw blurRad="40000" dist="23000" dir="5400000" rotWithShape="0">
-              <a:srgbClr val="000000">
-                <a:alpha val="35000"/>
-              </a:srgbClr>
-            </a:outerShdw>
-          </a:effectLst>
-        </a:effectStyle>
-        <a:effectStyle>
-          <a:effectLst>
-            <a:outerShdw blurRad="40000" dist="23000" dir="5400000" rotWithShape="0">
-              <a:srgbClr val="000000">
-                <a:alpha val="35000"/>
-              </a:srgbClr>
-            </a:outerShdw>
-          </a:effectLst>
-          <a:scene3d>
-            <a:camera prst="orthographicFront">
-              <a:rot lat="0" lon="0" rev="0"/>
-            </a:camera>
-            <a:lightRig rig="threePt" dir="t">
-              <a:rot lat="0" lon="0" rev="1200000"/>
-            </a:lightRig>
-          </a:scene3d>
-          <a:sp3d>
-            <a:bevelT w="63500" h="25400"/>
-          </a:sp3d>
         </a:effectStyle>
       </a:effectStyleLst>
       <a:bgFillStyleLst>
         <a:solidFill>
           <a:schemeClr val="phClr"/>
         </a:solidFill>
+        <a:solidFill>
+          <a:schemeClr val="phClr">
+            <a:tint val="95000"/>
+            <a:satMod val="170000"/>
+          </a:schemeClr>
+        </a:solidFill>
         <a:gradFill rotWithShape="1">
           <a:gsLst>
             <a:gs pos="0">
               <a:schemeClr val="phClr">
-                <a:tint val="40000"/>
-                <a:satMod val="350000"/>
+                <a:tint val="93000"/>
+                <a:satMod val="150000"/>
+                <a:shade val="98000"/>
+                <a:lumMod val="102000"/>
               </a:schemeClr>
             </a:gs>
-            <a:gs pos="40000">
+            <a:gs pos="50000">
               <a:schemeClr val="phClr">
-                <a:tint val="45000"/>
-                <a:shade val="99000"/>
-                <a:satMod val="350000"/>
+                <a:tint val="98000"/>
+                <a:satMod val="130000"/>
+                <a:shade val="90000"/>
+                <a:lumMod val="103000"/>
               </a:schemeClr>
             </a:gs>
             <a:gs pos="100000">
               <a:schemeClr val="phClr">
-                <a:shade val="20000"/>
-                <a:satMod val="255000"/>
+                <a:shade val="63000"/>
+                <a:satMod val="120000"/>
               </a:schemeClr>
             </a:gs>
           </a:gsLst>
-          <a:path path="circle">
-            <a:fillToRect l="50000" t="-80000" r="50000" b="180000"/>
-          </a:path>
-        </a:gradFill>
-        <a:gradFill rotWithShape="1">
-          <a:gsLst>
-            <a:gs pos="0">
-              <a:schemeClr val="phClr">
-                <a:tint val="80000"/>
-                <a:satMod val="300000"/>
-              </a:schemeClr>
-            </a:gs>
-            <a:gs pos="100000">
-              <a:schemeClr val="phClr">
-                <a:shade val="30000"/>
-                <a:satMod val="200000"/>
-              </a:schemeClr>
-            </a:gs>
-          </a:gsLst>
-          <a:path path="circle">
-            <a:fillToRect l="50000" t="50000" r="50000" b="50000"/>
-          </a:path>
+          <a:lin ang="5400000" scaled="0"/>
         </a:gradFill>
       </a:bgFillStyleLst>
     </a:fmtScheme>
   </a:themeElements>
   <a:objectDefaults>
-    <a:spDef>
-      <a:spPr/>
-      <a:bodyPr/>
-      <a:lstStyle/>
-      <a:style>
-        <a:lnRef idx="1">
-          <a:schemeClr val="accent1"/>
-        </a:lnRef>
-        <a:fillRef idx="3">
-          <a:schemeClr val="accent1"/>
-        </a:fillRef>
-        <a:effectRef idx="2">
-          <a:schemeClr val="accent1"/>
-        </a:effectRef>
-        <a:fontRef idx="minor">
-          <a:schemeClr val="lt1"/>
-        </a:fontRef>
-      </a:style>
-    </a:spDef>
     <a:lnDef>
       <a:spPr/>
       <a:bodyPr/>
@@ -5834,5 +5721,10 @@
     </a:lnDef>
   </a:objectDefaults>
   <a:extraClrSchemeLst/>
+  <a:extLst>
+    <a:ext uri="{05A4C25C-085E-4340-85A3-A5531E510DB2}">
+      <thm15:themeFamily xmlns:thm15="http://schemas.microsoft.com/office/thememl/2012/main" name="Office Theme" id="{2E142A2C-CD16-42D6-873A-C26D2A0506FA}" vid="{1BDDFF52-6CD6-40A5-AB3C-68EB2F1E4D0A}"/>
+    </a:ext>
+  </a:extLst>
 </a:theme>
 </file>
--- a/11 integracao frete.pptx
+++ b/11 integracao frete.pptx
@@ -5,21 +5,30 @@
     <p:sldMasterId id="2147483648" r:id="rId1"/>
   </p:sldMasterIdLst>
   <p:notesMasterIdLst>
-    <p:notesMasterId r:id="rId14"/>
+    <p:notesMasterId r:id="rId23"/>
   </p:notesMasterIdLst>
   <p:sldIdLst>
     <p:sldId id="271" r:id="rId2"/>
-    <p:sldId id="272" r:id="rId3"/>
-    <p:sldId id="276" r:id="rId4"/>
-    <p:sldId id="273" r:id="rId5"/>
-    <p:sldId id="274" r:id="rId6"/>
-    <p:sldId id="275" r:id="rId7"/>
-    <p:sldId id="277" r:id="rId8"/>
-    <p:sldId id="278" r:id="rId9"/>
-    <p:sldId id="279" r:id="rId10"/>
-    <p:sldId id="280" r:id="rId11"/>
-    <p:sldId id="281" r:id="rId12"/>
-    <p:sldId id="282" r:id="rId13"/>
+    <p:sldId id="292" r:id="rId3"/>
+    <p:sldId id="293" r:id="rId4"/>
+    <p:sldId id="294" r:id="rId5"/>
+    <p:sldId id="295" r:id="rId6"/>
+    <p:sldId id="296" r:id="rId7"/>
+    <p:sldId id="272" r:id="rId8"/>
+    <p:sldId id="276" r:id="rId9"/>
+    <p:sldId id="273" r:id="rId10"/>
+    <p:sldId id="274" r:id="rId11"/>
+    <p:sldId id="275" r:id="rId12"/>
+    <p:sldId id="277" r:id="rId13"/>
+    <p:sldId id="280" r:id="rId14"/>
+    <p:sldId id="288" r:id="rId15"/>
+    <p:sldId id="297" r:id="rId16"/>
+    <p:sldId id="298" r:id="rId17"/>
+    <p:sldId id="299" r:id="rId18"/>
+    <p:sldId id="300" r:id="rId19"/>
+    <p:sldId id="301" r:id="rId20"/>
+    <p:sldId id="302" r:id="rId21"/>
+    <p:sldId id="303" r:id="rId22"/>
   </p:sldIdLst>
   <p:sldSz cx="12192000" cy="6858000"/>
   <p:notesSz cx="6858000" cy="9144000"/>
@@ -412,7 +421,7 @@
     </p:spTree>
     <p:extLst>
       <p:ext uri="{BB962C8B-B14F-4D97-AF65-F5344CB8AC3E}">
-        <p14:creationId xmlns:p14="http://schemas.microsoft.com/office/powerpoint/2010/main" val="1452581127"/>
+        <p14:creationId xmlns:p14="http://schemas.microsoft.com/office/powerpoint/2010/main" val="2829429600"/>
       </p:ext>
     </p:extLst>
   </p:cSld>
@@ -492,7 +501,7 @@
     </p:spTree>
     <p:extLst>
       <p:ext uri="{BB962C8B-B14F-4D97-AF65-F5344CB8AC3E}">
-        <p14:creationId xmlns:p14="http://schemas.microsoft.com/office/powerpoint/2010/main" val="3359384183"/>
+        <p14:creationId xmlns:p14="http://schemas.microsoft.com/office/powerpoint/2010/main" val="851172806"/>
       </p:ext>
     </p:extLst>
   </p:cSld>
@@ -572,7 +581,567 @@
     </p:spTree>
     <p:extLst>
       <p:ext uri="{BB962C8B-B14F-4D97-AF65-F5344CB8AC3E}">
-        <p14:creationId xmlns:p14="http://schemas.microsoft.com/office/powerpoint/2010/main" val="1653932573"/>
+        <p14:creationId xmlns:p14="http://schemas.microsoft.com/office/powerpoint/2010/main" val="2781291750"/>
+      </p:ext>
+    </p:extLst>
+  </p:cSld>
+  <p:clrMapOvr>
+    <a:masterClrMapping/>
+  </p:clrMapOvr>
+</p:notes>
+</file>
+
+<file path=ppt/notesSlides/notesSlide13.xml><?xml version="1.0" encoding="utf-8"?>
+<p:notes xmlns:a="http://schemas.openxmlformats.org/drawingml/2006/main" xmlns:r="http://schemas.openxmlformats.org/officeDocument/2006/relationships" xmlns:p="http://schemas.openxmlformats.org/presentationml/2006/main">
+  <p:cSld>
+    <p:spTree>
+      <p:nvGrpSpPr>
+        <p:cNvPr id="1" name=""/>
+        <p:cNvGrpSpPr/>
+        <p:nvPr/>
+      </p:nvGrpSpPr>
+      <p:grpSpPr>
+        <a:xfrm>
+          <a:off x="0" y="0"/>
+          <a:ext cx="0" cy="0"/>
+          <a:chOff x="0" y="0"/>
+          <a:chExt cx="0" cy="0"/>
+        </a:xfrm>
+      </p:grpSpPr>
+      <p:sp>
+        <p:nvSpPr>
+          <p:cNvPr id="2" name="Slide Image Placeholder 1"/>
+          <p:cNvSpPr>
+            <a:spLocks noGrp="1" noRot="1" noChangeAspect="1"/>
+          </p:cNvSpPr>
+          <p:nvPr>
+            <p:ph type="sldImg" idx="2"/>
+          </p:nvPr>
+        </p:nvSpPr>
+        <p:spPr/>
+      </p:sp>
+      <p:sp>
+        <p:nvSpPr>
+          <p:cNvPr id="3" name="Notes Placeholder 2"/>
+          <p:cNvSpPr>
+            <a:spLocks noGrp="1"/>
+          </p:cNvSpPr>
+          <p:nvPr>
+            <p:ph type="body" sz="quarter" idx="3"/>
+          </p:nvPr>
+        </p:nvSpPr>
+        <p:spPr/>
+        <p:txBody>
+          <a:bodyPr/>
+          <a:lstStyle/>
+          <a:p>
+            <a:r>
+              <a:t>[AULA E-COMMERCE - MODULO 10 - SLIDE 1]</a:t>
+            </a:r>
+          </a:p>
+          <a:p>
+            <a:r>
+              <a:t>Abertura do Modulo 10: Integracao de Frete e Logistica no WooCommerce. Apresentar o papel critico do frete no e-commerce brasileiro e os topicos que serao abordados na aula.</a:t>
+            </a:r>
+          </a:p>
+        </p:txBody>
+      </p:sp>
+      <p:sp>
+        <p:nvSpPr>
+          <p:cNvPr id="4" name="Slide Number Placeholder 3"/>
+          <p:cNvSpPr>
+            <a:spLocks noGrp="1"/>
+          </p:cNvSpPr>
+          <p:nvPr>
+            <p:ph type="sldNum" sz="quarter" idx="5"/>
+          </p:nvPr>
+        </p:nvSpPr>
+        <p:spPr/>
+      </p:sp>
+    </p:spTree>
+    <p:extLst>
+      <p:ext uri="{BB962C8B-B14F-4D97-AF65-F5344CB8AC3E}">
+        <p14:creationId xmlns:p14="http://schemas.microsoft.com/office/powerpoint/2010/main" val="1452581127"/>
+      </p:ext>
+    </p:extLst>
+  </p:cSld>
+  <p:clrMapOvr>
+    <a:masterClrMapping/>
+  </p:clrMapOvr>
+</p:notes>
+</file>
+
+<file path=ppt/notesSlides/notesSlide14.xml><?xml version="1.0" encoding="utf-8"?>
+<p:notes xmlns:a="http://schemas.openxmlformats.org/drawingml/2006/main" xmlns:r="http://schemas.openxmlformats.org/officeDocument/2006/relationships" xmlns:p="http://schemas.openxmlformats.org/presentationml/2006/main">
+  <p:cSld>
+    <p:spTree>
+      <p:nvGrpSpPr>
+        <p:cNvPr id="1" name=""/>
+        <p:cNvGrpSpPr/>
+        <p:nvPr/>
+      </p:nvGrpSpPr>
+      <p:grpSpPr>
+        <a:xfrm>
+          <a:off x="0" y="0"/>
+          <a:ext cx="0" cy="0"/>
+          <a:chOff x="0" y="0"/>
+          <a:chExt cx="0" cy="0"/>
+        </a:xfrm>
+      </p:grpSpPr>
+      <p:sp>
+        <p:nvSpPr>
+          <p:cNvPr id="2" name="Slide Image Placeholder 1"/>
+          <p:cNvSpPr>
+            <a:spLocks noGrp="1" noRot="1" noChangeAspect="1"/>
+          </p:cNvSpPr>
+          <p:nvPr>
+            <p:ph type="sldImg" idx="2"/>
+          </p:nvPr>
+        </p:nvSpPr>
+        <p:spPr/>
+      </p:sp>
+      <p:sp>
+        <p:nvSpPr>
+          <p:cNvPr id="3" name="Notes Placeholder 2"/>
+          <p:cNvSpPr>
+            <a:spLocks noGrp="1"/>
+          </p:cNvSpPr>
+          <p:nvPr>
+            <p:ph type="body" sz="quarter" idx="3"/>
+          </p:nvPr>
+        </p:nvSpPr>
+        <p:spPr/>
+        <p:txBody>
+          <a:bodyPr/>
+          <a:lstStyle/>
+          <a:p>
+            <a:r>
+              <a:t>[AULA E-COMMERCE - MODULO 10 - SLIDE 1]</a:t>
+            </a:r>
+          </a:p>
+          <a:p>
+            <a:r>
+              <a:t>Abertura do Modulo 10: Integracao de Frete e Logistica no WooCommerce. Apresentar o papel critico do frete no e-commerce brasileiro e os topicos que serao abordados na aula.</a:t>
+            </a:r>
+          </a:p>
+        </p:txBody>
+      </p:sp>
+      <p:sp>
+        <p:nvSpPr>
+          <p:cNvPr id="4" name="Slide Number Placeholder 3"/>
+          <p:cNvSpPr>
+            <a:spLocks noGrp="1"/>
+          </p:cNvSpPr>
+          <p:nvPr>
+            <p:ph type="sldNum" sz="quarter" idx="5"/>
+          </p:nvPr>
+        </p:nvSpPr>
+        <p:spPr/>
+      </p:sp>
+    </p:spTree>
+    <p:extLst>
+      <p:ext uri="{BB962C8B-B14F-4D97-AF65-F5344CB8AC3E}">
+        <p14:creationId xmlns:p14="http://schemas.microsoft.com/office/powerpoint/2010/main" val="3500294523"/>
+      </p:ext>
+    </p:extLst>
+  </p:cSld>
+  <p:clrMapOvr>
+    <a:masterClrMapping/>
+  </p:clrMapOvr>
+</p:notes>
+</file>
+
+<file path=ppt/notesSlides/notesSlide15.xml><?xml version="1.0" encoding="utf-8"?>
+<p:notes xmlns:a="http://schemas.openxmlformats.org/drawingml/2006/main" xmlns:r="http://schemas.openxmlformats.org/officeDocument/2006/relationships" xmlns:p="http://schemas.openxmlformats.org/presentationml/2006/main">
+  <p:cSld>
+    <p:spTree>
+      <p:nvGrpSpPr>
+        <p:cNvPr id="1" name=""/>
+        <p:cNvGrpSpPr/>
+        <p:nvPr/>
+      </p:nvGrpSpPr>
+      <p:grpSpPr>
+        <a:xfrm>
+          <a:off x="0" y="0"/>
+          <a:ext cx="0" cy="0"/>
+          <a:chOff x="0" y="0"/>
+          <a:chExt cx="0" cy="0"/>
+        </a:xfrm>
+      </p:grpSpPr>
+      <p:sp>
+        <p:nvSpPr>
+          <p:cNvPr id="2" name="Slide Image Placeholder 1"/>
+          <p:cNvSpPr>
+            <a:spLocks noGrp="1" noRot="1" noChangeAspect="1"/>
+          </p:cNvSpPr>
+          <p:nvPr>
+            <p:ph type="sldImg" idx="2"/>
+          </p:nvPr>
+        </p:nvSpPr>
+        <p:spPr/>
+      </p:sp>
+      <p:sp>
+        <p:nvSpPr>
+          <p:cNvPr id="3" name="Notes Placeholder 2"/>
+          <p:cNvSpPr>
+            <a:spLocks noGrp="1"/>
+          </p:cNvSpPr>
+          <p:nvPr>
+            <p:ph type="body" sz="quarter" idx="3"/>
+          </p:nvPr>
+        </p:nvSpPr>
+        <p:spPr/>
+        <p:txBody>
+          <a:bodyPr/>
+          <a:lstStyle/>
+          <a:p>
+            <a:r>
+              <a:t>[AULA E-COMMERCE - MODULO 10 - SLIDE 1]</a:t>
+            </a:r>
+          </a:p>
+          <a:p>
+            <a:r>
+              <a:t>Abertura do Modulo 10: Integracao de Frete e Logistica no WooCommerce. Apresentar o papel critico do frete no e-commerce brasileiro e os topicos que serao abordados na aula.</a:t>
+            </a:r>
+          </a:p>
+        </p:txBody>
+      </p:sp>
+      <p:sp>
+        <p:nvSpPr>
+          <p:cNvPr id="4" name="Slide Number Placeholder 3"/>
+          <p:cNvSpPr>
+            <a:spLocks noGrp="1"/>
+          </p:cNvSpPr>
+          <p:nvPr>
+            <p:ph type="sldNum" sz="quarter" idx="5"/>
+          </p:nvPr>
+        </p:nvSpPr>
+        <p:spPr/>
+      </p:sp>
+    </p:spTree>
+    <p:extLst>
+      <p:ext uri="{BB962C8B-B14F-4D97-AF65-F5344CB8AC3E}">
+        <p14:creationId xmlns:p14="http://schemas.microsoft.com/office/powerpoint/2010/main" val="715314925"/>
+      </p:ext>
+    </p:extLst>
+  </p:cSld>
+  <p:clrMapOvr>
+    <a:masterClrMapping/>
+  </p:clrMapOvr>
+</p:notes>
+</file>
+
+<file path=ppt/notesSlides/notesSlide16.xml><?xml version="1.0" encoding="utf-8"?>
+<p:notes xmlns:a="http://schemas.openxmlformats.org/drawingml/2006/main" xmlns:r="http://schemas.openxmlformats.org/officeDocument/2006/relationships" xmlns:p="http://schemas.openxmlformats.org/presentationml/2006/main">
+  <p:cSld>
+    <p:spTree>
+      <p:nvGrpSpPr>
+        <p:cNvPr id="1" name=""/>
+        <p:cNvGrpSpPr/>
+        <p:nvPr/>
+      </p:nvGrpSpPr>
+      <p:grpSpPr>
+        <a:xfrm>
+          <a:off x="0" y="0"/>
+          <a:ext cx="0" cy="0"/>
+          <a:chOff x="0" y="0"/>
+          <a:chExt cx="0" cy="0"/>
+        </a:xfrm>
+      </p:grpSpPr>
+      <p:sp>
+        <p:nvSpPr>
+          <p:cNvPr id="2" name="Slide Image Placeholder 1"/>
+          <p:cNvSpPr>
+            <a:spLocks noGrp="1" noRot="1" noChangeAspect="1"/>
+          </p:cNvSpPr>
+          <p:nvPr>
+            <p:ph type="sldImg" idx="2"/>
+          </p:nvPr>
+        </p:nvSpPr>
+        <p:spPr/>
+      </p:sp>
+      <p:sp>
+        <p:nvSpPr>
+          <p:cNvPr id="3" name="Notes Placeholder 2"/>
+          <p:cNvSpPr>
+            <a:spLocks noGrp="1"/>
+          </p:cNvSpPr>
+          <p:nvPr>
+            <p:ph type="body" sz="quarter" idx="3"/>
+          </p:nvPr>
+        </p:nvSpPr>
+        <p:spPr/>
+        <p:txBody>
+          <a:bodyPr/>
+          <a:lstStyle/>
+          <a:p>
+            <a:r>
+              <a:t>[AULA E-COMMERCE - MODULO 10 - SLIDE 1]</a:t>
+            </a:r>
+          </a:p>
+          <a:p>
+            <a:r>
+              <a:t>Abertura do Modulo 10: Integracao de Frete e Logistica no WooCommerce. Apresentar o papel critico do frete no e-commerce brasileiro e os topicos que serao abordados na aula.</a:t>
+            </a:r>
+          </a:p>
+        </p:txBody>
+      </p:sp>
+      <p:sp>
+        <p:nvSpPr>
+          <p:cNvPr id="4" name="Slide Number Placeholder 3"/>
+          <p:cNvSpPr>
+            <a:spLocks noGrp="1"/>
+          </p:cNvSpPr>
+          <p:nvPr>
+            <p:ph type="sldNum" sz="quarter" idx="5"/>
+          </p:nvPr>
+        </p:nvSpPr>
+        <p:spPr/>
+      </p:sp>
+    </p:spTree>
+    <p:extLst>
+      <p:ext uri="{BB962C8B-B14F-4D97-AF65-F5344CB8AC3E}">
+        <p14:creationId xmlns:p14="http://schemas.microsoft.com/office/powerpoint/2010/main" val="557437790"/>
+      </p:ext>
+    </p:extLst>
+  </p:cSld>
+  <p:clrMapOvr>
+    <a:masterClrMapping/>
+  </p:clrMapOvr>
+</p:notes>
+</file>
+
+<file path=ppt/notesSlides/notesSlide17.xml><?xml version="1.0" encoding="utf-8"?>
+<p:notes xmlns:a="http://schemas.openxmlformats.org/drawingml/2006/main" xmlns:r="http://schemas.openxmlformats.org/officeDocument/2006/relationships" xmlns:p="http://schemas.openxmlformats.org/presentationml/2006/main">
+  <p:cSld>
+    <p:spTree>
+      <p:nvGrpSpPr>
+        <p:cNvPr id="1" name=""/>
+        <p:cNvGrpSpPr/>
+        <p:nvPr/>
+      </p:nvGrpSpPr>
+      <p:grpSpPr>
+        <a:xfrm>
+          <a:off x="0" y="0"/>
+          <a:ext cx="0" cy="0"/>
+          <a:chOff x="0" y="0"/>
+          <a:chExt cx="0" cy="0"/>
+        </a:xfrm>
+      </p:grpSpPr>
+      <p:sp>
+        <p:nvSpPr>
+          <p:cNvPr id="2" name="Slide Image Placeholder 1"/>
+          <p:cNvSpPr>
+            <a:spLocks noGrp="1" noRot="1" noChangeAspect="1"/>
+          </p:cNvSpPr>
+          <p:nvPr>
+            <p:ph type="sldImg" idx="2"/>
+          </p:nvPr>
+        </p:nvSpPr>
+        <p:spPr/>
+      </p:sp>
+      <p:sp>
+        <p:nvSpPr>
+          <p:cNvPr id="3" name="Notes Placeholder 2"/>
+          <p:cNvSpPr>
+            <a:spLocks noGrp="1"/>
+          </p:cNvSpPr>
+          <p:nvPr>
+            <p:ph type="body" sz="quarter" idx="3"/>
+          </p:nvPr>
+        </p:nvSpPr>
+        <p:spPr/>
+        <p:txBody>
+          <a:bodyPr/>
+          <a:lstStyle/>
+          <a:p>
+            <a:r>
+              <a:t>[AULA E-COMMERCE - MODULO 10 - SLIDE 1]</a:t>
+            </a:r>
+          </a:p>
+          <a:p>
+            <a:r>
+              <a:t>Abertura do Modulo 10: Integracao de Frete e Logistica no WooCommerce. Apresentar o papel critico do frete no e-commerce brasileiro e os topicos que serao abordados na aula.</a:t>
+            </a:r>
+          </a:p>
+        </p:txBody>
+      </p:sp>
+      <p:sp>
+        <p:nvSpPr>
+          <p:cNvPr id="4" name="Slide Number Placeholder 3"/>
+          <p:cNvSpPr>
+            <a:spLocks noGrp="1"/>
+          </p:cNvSpPr>
+          <p:nvPr>
+            <p:ph type="sldNum" sz="quarter" idx="5"/>
+          </p:nvPr>
+        </p:nvSpPr>
+        <p:spPr/>
+      </p:sp>
+    </p:spTree>
+    <p:extLst>
+      <p:ext uri="{BB962C8B-B14F-4D97-AF65-F5344CB8AC3E}">
+        <p14:creationId xmlns:p14="http://schemas.microsoft.com/office/powerpoint/2010/main" val="547783089"/>
+      </p:ext>
+    </p:extLst>
+  </p:cSld>
+  <p:clrMapOvr>
+    <a:masterClrMapping/>
+  </p:clrMapOvr>
+</p:notes>
+</file>
+
+<file path=ppt/notesSlides/notesSlide18.xml><?xml version="1.0" encoding="utf-8"?>
+<p:notes xmlns:a="http://schemas.openxmlformats.org/drawingml/2006/main" xmlns:r="http://schemas.openxmlformats.org/officeDocument/2006/relationships" xmlns:p="http://schemas.openxmlformats.org/presentationml/2006/main">
+  <p:cSld>
+    <p:spTree>
+      <p:nvGrpSpPr>
+        <p:cNvPr id="1" name=""/>
+        <p:cNvGrpSpPr/>
+        <p:nvPr/>
+      </p:nvGrpSpPr>
+      <p:grpSpPr>
+        <a:xfrm>
+          <a:off x="0" y="0"/>
+          <a:ext cx="0" cy="0"/>
+          <a:chOff x="0" y="0"/>
+          <a:chExt cx="0" cy="0"/>
+        </a:xfrm>
+      </p:grpSpPr>
+      <p:sp>
+        <p:nvSpPr>
+          <p:cNvPr id="2" name="Slide Image Placeholder 1"/>
+          <p:cNvSpPr>
+            <a:spLocks noGrp="1" noRot="1" noChangeAspect="1"/>
+          </p:cNvSpPr>
+          <p:nvPr>
+            <p:ph type="sldImg" idx="2"/>
+          </p:nvPr>
+        </p:nvSpPr>
+        <p:spPr/>
+      </p:sp>
+      <p:sp>
+        <p:nvSpPr>
+          <p:cNvPr id="3" name="Notes Placeholder 2"/>
+          <p:cNvSpPr>
+            <a:spLocks noGrp="1"/>
+          </p:cNvSpPr>
+          <p:nvPr>
+            <p:ph type="body" sz="quarter" idx="3"/>
+          </p:nvPr>
+        </p:nvSpPr>
+        <p:spPr/>
+        <p:txBody>
+          <a:bodyPr/>
+          <a:lstStyle/>
+          <a:p>
+            <a:r>
+              <a:t>[AULA E-COMMERCE - MODULO 10 - SLIDE 1]</a:t>
+            </a:r>
+          </a:p>
+          <a:p>
+            <a:r>
+              <a:t>Abertura do Modulo 10: Integracao de Frete e Logistica no WooCommerce. Apresentar o papel critico do frete no e-commerce brasileiro e os topicos que serao abordados na aula.</a:t>
+            </a:r>
+          </a:p>
+        </p:txBody>
+      </p:sp>
+      <p:sp>
+        <p:nvSpPr>
+          <p:cNvPr id="4" name="Slide Number Placeholder 3"/>
+          <p:cNvSpPr>
+            <a:spLocks noGrp="1"/>
+          </p:cNvSpPr>
+          <p:nvPr>
+            <p:ph type="sldNum" sz="quarter" idx="5"/>
+          </p:nvPr>
+        </p:nvSpPr>
+        <p:spPr/>
+      </p:sp>
+    </p:spTree>
+    <p:extLst>
+      <p:ext uri="{BB962C8B-B14F-4D97-AF65-F5344CB8AC3E}">
+        <p14:creationId xmlns:p14="http://schemas.microsoft.com/office/powerpoint/2010/main" val="3634058580"/>
+      </p:ext>
+    </p:extLst>
+  </p:cSld>
+  <p:clrMapOvr>
+    <a:masterClrMapping/>
+  </p:clrMapOvr>
+</p:notes>
+</file>
+
+<file path=ppt/notesSlides/notesSlide19.xml><?xml version="1.0" encoding="utf-8"?>
+<p:notes xmlns:a="http://schemas.openxmlformats.org/drawingml/2006/main" xmlns:r="http://schemas.openxmlformats.org/officeDocument/2006/relationships" xmlns:p="http://schemas.openxmlformats.org/presentationml/2006/main">
+  <p:cSld>
+    <p:spTree>
+      <p:nvGrpSpPr>
+        <p:cNvPr id="1" name=""/>
+        <p:cNvGrpSpPr/>
+        <p:nvPr/>
+      </p:nvGrpSpPr>
+      <p:grpSpPr>
+        <a:xfrm>
+          <a:off x="0" y="0"/>
+          <a:ext cx="0" cy="0"/>
+          <a:chOff x="0" y="0"/>
+          <a:chExt cx="0" cy="0"/>
+        </a:xfrm>
+      </p:grpSpPr>
+      <p:sp>
+        <p:nvSpPr>
+          <p:cNvPr id="2" name="Slide Image Placeholder 1"/>
+          <p:cNvSpPr>
+            <a:spLocks noGrp="1" noRot="1" noChangeAspect="1"/>
+          </p:cNvSpPr>
+          <p:nvPr>
+            <p:ph type="sldImg" idx="2"/>
+          </p:nvPr>
+        </p:nvSpPr>
+        <p:spPr/>
+      </p:sp>
+      <p:sp>
+        <p:nvSpPr>
+          <p:cNvPr id="3" name="Notes Placeholder 2"/>
+          <p:cNvSpPr>
+            <a:spLocks noGrp="1"/>
+          </p:cNvSpPr>
+          <p:nvPr>
+            <p:ph type="body" sz="quarter" idx="3"/>
+          </p:nvPr>
+        </p:nvSpPr>
+        <p:spPr/>
+        <p:txBody>
+          <a:bodyPr/>
+          <a:lstStyle/>
+          <a:p>
+            <a:r>
+              <a:t>[AULA E-COMMERCE - MODULO 10 - SLIDE 1]</a:t>
+            </a:r>
+          </a:p>
+          <a:p>
+            <a:r>
+              <a:t>Abertura do Modulo 10: Integracao de Frete e Logistica no WooCommerce. Apresentar o papel critico do frete no e-commerce brasileiro e os topicos que serao abordados na aula.</a:t>
+            </a:r>
+          </a:p>
+        </p:txBody>
+      </p:sp>
+      <p:sp>
+        <p:nvSpPr>
+          <p:cNvPr id="4" name="Slide Number Placeholder 3"/>
+          <p:cNvSpPr>
+            <a:spLocks noGrp="1"/>
+          </p:cNvSpPr>
+          <p:nvPr>
+            <p:ph type="sldNum" sz="quarter" idx="5"/>
+          </p:nvPr>
+        </p:nvSpPr>
+        <p:spPr/>
+      </p:sp>
+    </p:spTree>
+    <p:extLst>
+      <p:ext uri="{BB962C8B-B14F-4D97-AF65-F5344CB8AC3E}">
+        <p14:creationId xmlns:p14="http://schemas.microsoft.com/office/powerpoint/2010/main" val="825772164"/>
       </p:ext>
     </p:extLst>
   </p:cSld>
@@ -652,7 +1221,167 @@
     </p:spTree>
     <p:extLst>
       <p:ext uri="{BB962C8B-B14F-4D97-AF65-F5344CB8AC3E}">
-        <p14:creationId xmlns:p14="http://schemas.microsoft.com/office/powerpoint/2010/main" val="2815448152"/>
+        <p14:creationId xmlns:p14="http://schemas.microsoft.com/office/powerpoint/2010/main" val="1105570936"/>
+      </p:ext>
+    </p:extLst>
+  </p:cSld>
+  <p:clrMapOvr>
+    <a:masterClrMapping/>
+  </p:clrMapOvr>
+</p:notes>
+</file>
+
+<file path=ppt/notesSlides/notesSlide20.xml><?xml version="1.0" encoding="utf-8"?>
+<p:notes xmlns:a="http://schemas.openxmlformats.org/drawingml/2006/main" xmlns:r="http://schemas.openxmlformats.org/officeDocument/2006/relationships" xmlns:p="http://schemas.openxmlformats.org/presentationml/2006/main">
+  <p:cSld>
+    <p:spTree>
+      <p:nvGrpSpPr>
+        <p:cNvPr id="1" name=""/>
+        <p:cNvGrpSpPr/>
+        <p:nvPr/>
+      </p:nvGrpSpPr>
+      <p:grpSpPr>
+        <a:xfrm>
+          <a:off x="0" y="0"/>
+          <a:ext cx="0" cy="0"/>
+          <a:chOff x="0" y="0"/>
+          <a:chExt cx="0" cy="0"/>
+        </a:xfrm>
+      </p:grpSpPr>
+      <p:sp>
+        <p:nvSpPr>
+          <p:cNvPr id="2" name="Slide Image Placeholder 1"/>
+          <p:cNvSpPr>
+            <a:spLocks noGrp="1" noRot="1" noChangeAspect="1"/>
+          </p:cNvSpPr>
+          <p:nvPr>
+            <p:ph type="sldImg" idx="2"/>
+          </p:nvPr>
+        </p:nvSpPr>
+        <p:spPr/>
+      </p:sp>
+      <p:sp>
+        <p:nvSpPr>
+          <p:cNvPr id="3" name="Notes Placeholder 2"/>
+          <p:cNvSpPr>
+            <a:spLocks noGrp="1"/>
+          </p:cNvSpPr>
+          <p:nvPr>
+            <p:ph type="body" sz="quarter" idx="3"/>
+          </p:nvPr>
+        </p:nvSpPr>
+        <p:spPr/>
+        <p:txBody>
+          <a:bodyPr/>
+          <a:lstStyle/>
+          <a:p>
+            <a:r>
+              <a:t>[AULA E-COMMERCE - MODULO 10 - SLIDE 1]</a:t>
+            </a:r>
+          </a:p>
+          <a:p>
+            <a:r>
+              <a:t>Abertura do Modulo 10: Integracao de Frete e Logistica no WooCommerce. Apresentar o papel critico do frete no e-commerce brasileiro e os topicos que serao abordados na aula.</a:t>
+            </a:r>
+          </a:p>
+        </p:txBody>
+      </p:sp>
+      <p:sp>
+        <p:nvSpPr>
+          <p:cNvPr id="4" name="Slide Number Placeholder 3"/>
+          <p:cNvSpPr>
+            <a:spLocks noGrp="1"/>
+          </p:cNvSpPr>
+          <p:nvPr>
+            <p:ph type="sldNum" sz="quarter" idx="5"/>
+          </p:nvPr>
+        </p:nvSpPr>
+        <p:spPr/>
+      </p:sp>
+    </p:spTree>
+    <p:extLst>
+      <p:ext uri="{BB962C8B-B14F-4D97-AF65-F5344CB8AC3E}">
+        <p14:creationId xmlns:p14="http://schemas.microsoft.com/office/powerpoint/2010/main" val="1961074002"/>
+      </p:ext>
+    </p:extLst>
+  </p:cSld>
+  <p:clrMapOvr>
+    <a:masterClrMapping/>
+  </p:clrMapOvr>
+</p:notes>
+</file>
+
+<file path=ppt/notesSlides/notesSlide21.xml><?xml version="1.0" encoding="utf-8"?>
+<p:notes xmlns:a="http://schemas.openxmlformats.org/drawingml/2006/main" xmlns:r="http://schemas.openxmlformats.org/officeDocument/2006/relationships" xmlns:p="http://schemas.openxmlformats.org/presentationml/2006/main">
+  <p:cSld>
+    <p:spTree>
+      <p:nvGrpSpPr>
+        <p:cNvPr id="1" name=""/>
+        <p:cNvGrpSpPr/>
+        <p:nvPr/>
+      </p:nvGrpSpPr>
+      <p:grpSpPr>
+        <a:xfrm>
+          <a:off x="0" y="0"/>
+          <a:ext cx="0" cy="0"/>
+          <a:chOff x="0" y="0"/>
+          <a:chExt cx="0" cy="0"/>
+        </a:xfrm>
+      </p:grpSpPr>
+      <p:sp>
+        <p:nvSpPr>
+          <p:cNvPr id="2" name="Slide Image Placeholder 1"/>
+          <p:cNvSpPr>
+            <a:spLocks noGrp="1" noRot="1" noChangeAspect="1"/>
+          </p:cNvSpPr>
+          <p:nvPr>
+            <p:ph type="sldImg" idx="2"/>
+          </p:nvPr>
+        </p:nvSpPr>
+        <p:spPr/>
+      </p:sp>
+      <p:sp>
+        <p:nvSpPr>
+          <p:cNvPr id="3" name="Notes Placeholder 2"/>
+          <p:cNvSpPr>
+            <a:spLocks noGrp="1"/>
+          </p:cNvSpPr>
+          <p:nvPr>
+            <p:ph type="body" sz="quarter" idx="3"/>
+          </p:nvPr>
+        </p:nvSpPr>
+        <p:spPr/>
+        <p:txBody>
+          <a:bodyPr/>
+          <a:lstStyle/>
+          <a:p>
+            <a:r>
+              <a:t>[AULA E-COMMERCE - MODULO 10 - SLIDE 1]</a:t>
+            </a:r>
+          </a:p>
+          <a:p>
+            <a:r>
+              <a:t>Abertura do Modulo 10: Integracao de Frete e Logistica no WooCommerce. Apresentar o papel critico do frete no e-commerce brasileiro e os topicos que serao abordados na aula.</a:t>
+            </a:r>
+          </a:p>
+        </p:txBody>
+      </p:sp>
+      <p:sp>
+        <p:nvSpPr>
+          <p:cNvPr id="4" name="Slide Number Placeholder 3"/>
+          <p:cNvSpPr>
+            <a:spLocks noGrp="1"/>
+          </p:cNvSpPr>
+          <p:nvPr>
+            <p:ph type="sldNum" sz="quarter" idx="5"/>
+          </p:nvPr>
+        </p:nvSpPr>
+        <p:spPr/>
+      </p:sp>
+    </p:spTree>
+    <p:extLst>
+      <p:ext uri="{BB962C8B-B14F-4D97-AF65-F5344CB8AC3E}">
+        <p14:creationId xmlns:p14="http://schemas.microsoft.com/office/powerpoint/2010/main" val="117048716"/>
       </p:ext>
     </p:extLst>
   </p:cSld>
@@ -732,7 +1461,7 @@
     </p:spTree>
     <p:extLst>
       <p:ext uri="{BB962C8B-B14F-4D97-AF65-F5344CB8AC3E}">
-        <p14:creationId xmlns:p14="http://schemas.microsoft.com/office/powerpoint/2010/main" val="2200067669"/>
+        <p14:creationId xmlns:p14="http://schemas.microsoft.com/office/powerpoint/2010/main" val="479088345"/>
       </p:ext>
     </p:extLst>
   </p:cSld>
@@ -812,7 +1541,7 @@
     </p:spTree>
     <p:extLst>
       <p:ext uri="{BB962C8B-B14F-4D97-AF65-F5344CB8AC3E}">
-        <p14:creationId xmlns:p14="http://schemas.microsoft.com/office/powerpoint/2010/main" val="3425633398"/>
+        <p14:creationId xmlns:p14="http://schemas.microsoft.com/office/powerpoint/2010/main" val="4049700551"/>
       </p:ext>
     </p:extLst>
   </p:cSld>
@@ -892,7 +1621,7 @@
     </p:spTree>
     <p:extLst>
       <p:ext uri="{BB962C8B-B14F-4D97-AF65-F5344CB8AC3E}">
-        <p14:creationId xmlns:p14="http://schemas.microsoft.com/office/powerpoint/2010/main" val="2829429600"/>
+        <p14:creationId xmlns:p14="http://schemas.microsoft.com/office/powerpoint/2010/main" val="2868366729"/>
       </p:ext>
     </p:extLst>
   </p:cSld>
@@ -972,7 +1701,7 @@
     </p:spTree>
     <p:extLst>
       <p:ext uri="{BB962C8B-B14F-4D97-AF65-F5344CB8AC3E}">
-        <p14:creationId xmlns:p14="http://schemas.microsoft.com/office/powerpoint/2010/main" val="851172806"/>
+        <p14:creationId xmlns:p14="http://schemas.microsoft.com/office/powerpoint/2010/main" val="2721283315"/>
       </p:ext>
     </p:extLst>
   </p:cSld>
@@ -1052,7 +1781,7 @@
     </p:spTree>
     <p:extLst>
       <p:ext uri="{BB962C8B-B14F-4D97-AF65-F5344CB8AC3E}">
-        <p14:creationId xmlns:p14="http://schemas.microsoft.com/office/powerpoint/2010/main" val="2781291750"/>
+        <p14:creationId xmlns:p14="http://schemas.microsoft.com/office/powerpoint/2010/main" val="2815448152"/>
       </p:ext>
     </p:extLst>
   </p:cSld>
@@ -1132,7 +1861,7 @@
     </p:spTree>
     <p:extLst>
       <p:ext uri="{BB962C8B-B14F-4D97-AF65-F5344CB8AC3E}">
-        <p14:creationId xmlns:p14="http://schemas.microsoft.com/office/powerpoint/2010/main" val="4154124878"/>
+        <p14:creationId xmlns:p14="http://schemas.microsoft.com/office/powerpoint/2010/main" val="2200067669"/>
       </p:ext>
     </p:extLst>
   </p:cSld>
@@ -1212,7 +1941,7 @@
     </p:spTree>
     <p:extLst>
       <p:ext uri="{BB962C8B-B14F-4D97-AF65-F5344CB8AC3E}">
-        <p14:creationId xmlns:p14="http://schemas.microsoft.com/office/powerpoint/2010/main" val="30681650"/>
+        <p14:creationId xmlns:p14="http://schemas.microsoft.com/office/powerpoint/2010/main" val="3425633398"/>
       </p:ext>
     </p:extLst>
   </p:cSld>
@@ -1401,7 +2130,7 @@
           <a:p>
             <a:fld id="{5BCAD085-E8A6-8845-BD4E-CB4CCA059FC4}" type="datetimeFigureOut">
               <a:rPr lang="en-US" smtClean="0"/>
-              <a:t>10/22/2026</a:t>
+              <a:t>10/23/2026</a:t>
             </a:fld>
             <a:endParaRPr lang="en-US"/>
           </a:p>
@@ -1569,7 +2298,7 @@
           <a:p>
             <a:fld id="{5BCAD085-E8A6-8845-BD4E-CB4CCA059FC4}" type="datetimeFigureOut">
               <a:rPr lang="en-US" smtClean="0"/>
-              <a:t>10/22/2026</a:t>
+              <a:t>10/23/2026</a:t>
             </a:fld>
             <a:endParaRPr lang="en-US"/>
           </a:p>
@@ -1747,7 +2476,7 @@
           <a:p>
             <a:fld id="{5BCAD085-E8A6-8845-BD4E-CB4CCA059FC4}" type="datetimeFigureOut">
               <a:rPr lang="en-US" smtClean="0"/>
-              <a:t>10/22/2026</a:t>
+              <a:t>10/23/2026</a:t>
             </a:fld>
             <a:endParaRPr lang="en-US"/>
           </a:p>
@@ -1915,7 +2644,7 @@
           <a:p>
             <a:fld id="{5BCAD085-E8A6-8845-BD4E-CB4CCA059FC4}" type="datetimeFigureOut">
               <a:rPr lang="en-US" smtClean="0"/>
-              <a:t>10/22/2026</a:t>
+              <a:t>10/23/2026</a:t>
             </a:fld>
             <a:endParaRPr lang="en-US"/>
           </a:p>
@@ -2160,7 +2889,7 @@
           <a:p>
             <a:fld id="{5BCAD085-E8A6-8845-BD4E-CB4CCA059FC4}" type="datetimeFigureOut">
               <a:rPr lang="en-US" smtClean="0"/>
-              <a:t>10/22/2026</a:t>
+              <a:t>10/23/2026</a:t>
             </a:fld>
             <a:endParaRPr lang="en-US"/>
           </a:p>
@@ -2445,7 +3174,7 @@
           <a:p>
             <a:fld id="{5BCAD085-E8A6-8845-BD4E-CB4CCA059FC4}" type="datetimeFigureOut">
               <a:rPr lang="en-US" smtClean="0"/>
-              <a:t>10/22/2026</a:t>
+              <a:t>10/23/2026</a:t>
             </a:fld>
             <a:endParaRPr lang="en-US"/>
           </a:p>
@@ -2864,7 +3593,7 @@
           <a:p>
             <a:fld id="{5BCAD085-E8A6-8845-BD4E-CB4CCA059FC4}" type="datetimeFigureOut">
               <a:rPr lang="en-US" smtClean="0"/>
-              <a:t>10/22/2026</a:t>
+              <a:t>10/23/2026</a:t>
             </a:fld>
             <a:endParaRPr lang="en-US"/>
           </a:p>
@@ -2981,7 +3710,7 @@
           <a:p>
             <a:fld id="{5BCAD085-E8A6-8845-BD4E-CB4CCA059FC4}" type="datetimeFigureOut">
               <a:rPr lang="en-US" smtClean="0"/>
-              <a:t>10/22/2026</a:t>
+              <a:t>10/23/2026</a:t>
             </a:fld>
             <a:endParaRPr lang="en-US"/>
           </a:p>
@@ -3076,7 +3805,7 @@
           <a:p>
             <a:fld id="{5BCAD085-E8A6-8845-BD4E-CB4CCA059FC4}" type="datetimeFigureOut">
               <a:rPr lang="en-US" smtClean="0"/>
-              <a:t>10/22/2026</a:t>
+              <a:t>10/23/2026</a:t>
             </a:fld>
             <a:endParaRPr lang="en-US"/>
           </a:p>
@@ -3351,7 +4080,7 @@
           <a:p>
             <a:fld id="{5BCAD085-E8A6-8845-BD4E-CB4CCA059FC4}" type="datetimeFigureOut">
               <a:rPr lang="en-US" smtClean="0"/>
-              <a:t>10/22/2026</a:t>
+              <a:t>10/23/2026</a:t>
             </a:fld>
             <a:endParaRPr lang="en-US"/>
           </a:p>
@@ -3603,7 +4332,7 @@
           <a:p>
             <a:fld id="{5BCAD085-E8A6-8845-BD4E-CB4CCA059FC4}" type="datetimeFigureOut">
               <a:rPr lang="en-US" smtClean="0"/>
-              <a:t>10/22/2026</a:t>
+              <a:t>10/23/2026</a:t>
             </a:fld>
             <a:endParaRPr lang="en-US"/>
           </a:p>
@@ -3814,7 +4543,7 @@
           <a:p>
             <a:fld id="{5BCAD085-E8A6-8845-BD4E-CB4CCA059FC4}" type="datetimeFigureOut">
               <a:rPr lang="en-US" smtClean="0"/>
-              <a:t>10/22/2026</a:t>
+              <a:t>10/23/2026</a:t>
             </a:fld>
             <a:endParaRPr lang="en-US"/>
           </a:p>
@@ -4295,10 +5024,86 @@
           <a:chExt cx="0" cy="0"/>
         </a:xfrm>
       </p:grpSpPr>
+      <p:pic>
+        <p:nvPicPr>
+          <p:cNvPr id="3" name="Imagem 2">
+            <a:extLst>
+              <a:ext uri="{FF2B5EF4-FFF2-40B4-BE49-F238E27FC236}">
+                <a16:creationId xmlns:a16="http://schemas.microsoft.com/office/drawing/2014/main" id="{4703A864-AF16-82DB-7DDA-48C4732CFFFC}"/>
+              </a:ext>
+            </a:extLst>
+          </p:cNvPr>
+          <p:cNvPicPr>
+            <a:picLocks noChangeAspect="1"/>
+          </p:cNvPicPr>
+          <p:nvPr/>
+        </p:nvPicPr>
+        <p:blipFill>
+          <a:blip r:embed="rId3"/>
+          <a:stretch>
+            <a:fillRect/>
+          </a:stretch>
+        </p:blipFill>
+        <p:spPr>
+          <a:xfrm>
+            <a:off x="0" y="182880"/>
+            <a:ext cx="12192000" cy="6492240"/>
+          </a:xfrm>
+          <a:prstGeom prst="rect">
+            <a:avLst/>
+          </a:prstGeom>
+        </p:spPr>
+      </p:pic>
+      <p:sp>
+        <p:nvSpPr>
+          <p:cNvPr id="4" name="Seta: para Cima 3">
+            <a:extLst>
+              <a:ext uri="{FF2B5EF4-FFF2-40B4-BE49-F238E27FC236}">
+                <a16:creationId xmlns:a16="http://schemas.microsoft.com/office/drawing/2014/main" id="{E6939A9F-7705-2018-4CFC-D5FAF113B8BA}"/>
+              </a:ext>
+            </a:extLst>
+          </p:cNvPr>
+          <p:cNvSpPr/>
+          <p:nvPr/>
+        </p:nvSpPr>
+        <p:spPr>
+          <a:xfrm>
+            <a:off x="3399694" y="3320561"/>
+            <a:ext cx="1617785" cy="2069123"/>
+          </a:xfrm>
+          <a:prstGeom prst="upArrow">
+            <a:avLst/>
+          </a:prstGeom>
+        </p:spPr>
+        <p:style>
+          <a:lnRef idx="2">
+            <a:schemeClr val="accent2">
+              <a:shade val="15000"/>
+            </a:schemeClr>
+          </a:lnRef>
+          <a:fillRef idx="1">
+            <a:schemeClr val="accent2"/>
+          </a:fillRef>
+          <a:effectRef idx="0">
+            <a:schemeClr val="accent2"/>
+          </a:effectRef>
+          <a:fontRef idx="minor">
+            <a:schemeClr val="lt1"/>
+          </a:fontRef>
+        </p:style>
+        <p:txBody>
+          <a:bodyPr rtlCol="0" anchor="ctr"/>
+          <a:lstStyle/>
+          <a:p>
+            <a:pPr algn="ctr"/>
+            <a:endParaRPr lang="en-US"/>
+          </a:p>
+        </p:txBody>
+      </p:sp>
     </p:spTree>
     <p:extLst>
       <p:ext uri="{BB962C8B-B14F-4D97-AF65-F5344CB8AC3E}">
-        <p14:creationId xmlns:p14="http://schemas.microsoft.com/office/powerpoint/2010/main" val="3004191823"/>
+        <p14:creationId xmlns:p14="http://schemas.microsoft.com/office/powerpoint/2010/main" val="1587301790"/>
       </p:ext>
     </p:extLst>
   </p:cSld>
@@ -4325,10 +5130,86 @@
           <a:chExt cx="0" cy="0"/>
         </a:xfrm>
       </p:grpSpPr>
+      <p:pic>
+        <p:nvPicPr>
+          <p:cNvPr id="3" name="Imagem 2">
+            <a:extLst>
+              <a:ext uri="{FF2B5EF4-FFF2-40B4-BE49-F238E27FC236}">
+                <a16:creationId xmlns:a16="http://schemas.microsoft.com/office/drawing/2014/main" id="{60DD1A45-A05F-8643-C2E9-F736B8C7D9FE}"/>
+              </a:ext>
+            </a:extLst>
+          </p:cNvPr>
+          <p:cNvPicPr>
+            <a:picLocks noChangeAspect="1"/>
+          </p:cNvPicPr>
+          <p:nvPr/>
+        </p:nvPicPr>
+        <p:blipFill>
+          <a:blip r:embed="rId3"/>
+          <a:stretch>
+            <a:fillRect/>
+          </a:stretch>
+        </p:blipFill>
+        <p:spPr>
+          <a:xfrm>
+            <a:off x="0" y="182880"/>
+            <a:ext cx="12192000" cy="6492240"/>
+          </a:xfrm>
+          <a:prstGeom prst="rect">
+            <a:avLst/>
+          </a:prstGeom>
+        </p:spPr>
+      </p:pic>
+      <p:sp>
+        <p:nvSpPr>
+          <p:cNvPr id="4" name="Seta: para Cima 3">
+            <a:extLst>
+              <a:ext uri="{FF2B5EF4-FFF2-40B4-BE49-F238E27FC236}">
+                <a16:creationId xmlns:a16="http://schemas.microsoft.com/office/drawing/2014/main" id="{13CA2CC0-2D37-E5E0-06CE-EF331B94B80F}"/>
+              </a:ext>
+            </a:extLst>
+          </p:cNvPr>
+          <p:cNvSpPr/>
+          <p:nvPr/>
+        </p:nvSpPr>
+        <p:spPr>
+          <a:xfrm>
+            <a:off x="3598986" y="3320561"/>
+            <a:ext cx="1617785" cy="2069123"/>
+          </a:xfrm>
+          <a:prstGeom prst="upArrow">
+            <a:avLst/>
+          </a:prstGeom>
+        </p:spPr>
+        <p:style>
+          <a:lnRef idx="2">
+            <a:schemeClr val="accent2">
+              <a:shade val="15000"/>
+            </a:schemeClr>
+          </a:lnRef>
+          <a:fillRef idx="1">
+            <a:schemeClr val="accent2"/>
+          </a:fillRef>
+          <a:effectRef idx="0">
+            <a:schemeClr val="accent2"/>
+          </a:effectRef>
+          <a:fontRef idx="minor">
+            <a:schemeClr val="lt1"/>
+          </a:fontRef>
+        </p:style>
+        <p:txBody>
+          <a:bodyPr rtlCol="0" anchor="ctr"/>
+          <a:lstStyle/>
+          <a:p>
+            <a:pPr algn="ctr"/>
+            <a:endParaRPr lang="en-US"/>
+          </a:p>
+        </p:txBody>
+      </p:sp>
     </p:spTree>
     <p:extLst>
       <p:ext uri="{BB962C8B-B14F-4D97-AF65-F5344CB8AC3E}">
-        <p14:creationId xmlns:p14="http://schemas.microsoft.com/office/powerpoint/2010/main" val="385448863"/>
+        <p14:creationId xmlns:p14="http://schemas.microsoft.com/office/powerpoint/2010/main" val="4202812772"/>
       </p:ext>
     </p:extLst>
   </p:cSld>
@@ -4355,10 +5236,920 @@
           <a:chExt cx="0" cy="0"/>
         </a:xfrm>
       </p:grpSpPr>
+      <p:pic>
+        <p:nvPicPr>
+          <p:cNvPr id="3" name="Imagem 2">
+            <a:extLst>
+              <a:ext uri="{FF2B5EF4-FFF2-40B4-BE49-F238E27FC236}">
+                <a16:creationId xmlns:a16="http://schemas.microsoft.com/office/drawing/2014/main" id="{09DC30BC-37D0-C807-FDDB-C25DC86DAAB4}"/>
+              </a:ext>
+            </a:extLst>
+          </p:cNvPr>
+          <p:cNvPicPr>
+            <a:picLocks noChangeAspect="1"/>
+          </p:cNvPicPr>
+          <p:nvPr/>
+        </p:nvPicPr>
+        <p:blipFill>
+          <a:blip r:embed="rId3"/>
+          <a:stretch>
+            <a:fillRect/>
+          </a:stretch>
+        </p:blipFill>
+        <p:spPr>
+          <a:xfrm>
+            <a:off x="0" y="182880"/>
+            <a:ext cx="12192000" cy="6492240"/>
+          </a:xfrm>
+          <a:prstGeom prst="rect">
+            <a:avLst/>
+          </a:prstGeom>
+        </p:spPr>
+      </p:pic>
+      <p:sp>
+        <p:nvSpPr>
+          <p:cNvPr id="2" name="Seta: para Cima 1">
+            <a:extLst>
+              <a:ext uri="{FF2B5EF4-FFF2-40B4-BE49-F238E27FC236}">
+                <a16:creationId xmlns:a16="http://schemas.microsoft.com/office/drawing/2014/main" id="{6DA58376-AAF3-5B8F-7BBE-451F1A2B19D8}"/>
+              </a:ext>
+            </a:extLst>
+          </p:cNvPr>
+          <p:cNvSpPr/>
+          <p:nvPr/>
+        </p:nvSpPr>
+        <p:spPr>
+          <a:xfrm rot="10800000">
+            <a:off x="2465356" y="3741420"/>
+            <a:ext cx="1617785" cy="2069123"/>
+          </a:xfrm>
+          <a:prstGeom prst="upArrow">
+            <a:avLst/>
+          </a:prstGeom>
+        </p:spPr>
+        <p:style>
+          <a:lnRef idx="2">
+            <a:schemeClr val="accent2">
+              <a:shade val="15000"/>
+            </a:schemeClr>
+          </a:lnRef>
+          <a:fillRef idx="1">
+            <a:schemeClr val="accent2"/>
+          </a:fillRef>
+          <a:effectRef idx="0">
+            <a:schemeClr val="accent2"/>
+          </a:effectRef>
+          <a:fontRef idx="minor">
+            <a:schemeClr val="lt1"/>
+          </a:fontRef>
+        </p:style>
+        <p:txBody>
+          <a:bodyPr rtlCol="0" anchor="ctr"/>
+          <a:lstStyle/>
+          <a:p>
+            <a:pPr algn="ctr"/>
+            <a:endParaRPr lang="en-US"/>
+          </a:p>
+        </p:txBody>
+      </p:sp>
     </p:spTree>
     <p:extLst>
       <p:ext uri="{BB962C8B-B14F-4D97-AF65-F5344CB8AC3E}">
-        <p14:creationId xmlns:p14="http://schemas.microsoft.com/office/powerpoint/2010/main" val="1005745847"/>
+        <p14:creationId xmlns:p14="http://schemas.microsoft.com/office/powerpoint/2010/main" val="4266333405"/>
+      </p:ext>
+    </p:extLst>
+  </p:cSld>
+  <p:clrMapOvr>
+    <a:masterClrMapping/>
+  </p:clrMapOvr>
+</p:sld>
+</file>
+
+<file path=ppt/slides/slide13.xml><?xml version="1.0" encoding="utf-8"?>
+<p:sld xmlns:a="http://schemas.openxmlformats.org/drawingml/2006/main" xmlns:r="http://schemas.openxmlformats.org/officeDocument/2006/relationships" xmlns:p="http://schemas.openxmlformats.org/presentationml/2006/main">
+  <p:cSld>
+    <p:spTree>
+      <p:nvGrpSpPr>
+        <p:cNvPr id="1" name=""/>
+        <p:cNvGrpSpPr/>
+        <p:nvPr/>
+      </p:nvGrpSpPr>
+      <p:grpSpPr>
+        <a:xfrm>
+          <a:off x="0" y="0"/>
+          <a:ext cx="0" cy="0"/>
+          <a:chOff x="0" y="0"/>
+          <a:chExt cx="0" cy="0"/>
+        </a:xfrm>
+      </p:grpSpPr>
+      <p:pic>
+        <p:nvPicPr>
+          <p:cNvPr id="5" name="Imagem 4">
+            <a:extLst>
+              <a:ext uri="{FF2B5EF4-FFF2-40B4-BE49-F238E27FC236}">
+                <a16:creationId xmlns:a16="http://schemas.microsoft.com/office/drawing/2014/main" id="{BE619452-C9A7-C719-DD89-048FE8C640C9}"/>
+              </a:ext>
+            </a:extLst>
+          </p:cNvPr>
+          <p:cNvPicPr>
+            <a:picLocks noChangeAspect="1"/>
+          </p:cNvPicPr>
+          <p:nvPr/>
+        </p:nvPicPr>
+        <p:blipFill>
+          <a:blip r:embed="rId3"/>
+          <a:stretch>
+            <a:fillRect/>
+          </a:stretch>
+        </p:blipFill>
+        <p:spPr>
+          <a:xfrm>
+            <a:off x="0" y="182880"/>
+            <a:ext cx="12192000" cy="6492240"/>
+          </a:xfrm>
+          <a:prstGeom prst="rect">
+            <a:avLst/>
+          </a:prstGeom>
+        </p:spPr>
+      </p:pic>
+      <p:sp>
+        <p:nvSpPr>
+          <p:cNvPr id="6" name="Seta: para Cima 5">
+            <a:extLst>
+              <a:ext uri="{FF2B5EF4-FFF2-40B4-BE49-F238E27FC236}">
+                <a16:creationId xmlns:a16="http://schemas.microsoft.com/office/drawing/2014/main" id="{DE5E9D69-AB78-1432-4FA1-935CA0A64486}"/>
+              </a:ext>
+            </a:extLst>
+          </p:cNvPr>
+          <p:cNvSpPr/>
+          <p:nvPr/>
+        </p:nvSpPr>
+        <p:spPr>
+          <a:xfrm rot="1040751">
+            <a:off x="2310999" y="2575967"/>
+            <a:ext cx="1617785" cy="2069123"/>
+          </a:xfrm>
+          <a:prstGeom prst="upArrow">
+            <a:avLst/>
+          </a:prstGeom>
+        </p:spPr>
+        <p:style>
+          <a:lnRef idx="2">
+            <a:schemeClr val="accent2">
+              <a:shade val="15000"/>
+            </a:schemeClr>
+          </a:lnRef>
+          <a:fillRef idx="1">
+            <a:schemeClr val="accent2"/>
+          </a:fillRef>
+          <a:effectRef idx="0">
+            <a:schemeClr val="accent2"/>
+          </a:effectRef>
+          <a:fontRef idx="minor">
+            <a:schemeClr val="lt1"/>
+          </a:fontRef>
+        </p:style>
+        <p:txBody>
+          <a:bodyPr rtlCol="0" anchor="ctr"/>
+          <a:lstStyle/>
+          <a:p>
+            <a:pPr algn="ctr"/>
+            <a:endParaRPr lang="en-US"/>
+          </a:p>
+        </p:txBody>
+      </p:sp>
+    </p:spTree>
+    <p:extLst>
+      <p:ext uri="{BB962C8B-B14F-4D97-AF65-F5344CB8AC3E}">
+        <p14:creationId xmlns:p14="http://schemas.microsoft.com/office/powerpoint/2010/main" val="3004191823"/>
+      </p:ext>
+    </p:extLst>
+  </p:cSld>
+  <p:clrMapOvr>
+    <a:masterClrMapping/>
+  </p:clrMapOvr>
+</p:sld>
+</file>
+
+<file path=ppt/slides/slide14.xml><?xml version="1.0" encoding="utf-8"?>
+<p:sld xmlns:a="http://schemas.openxmlformats.org/drawingml/2006/main" xmlns:r="http://schemas.openxmlformats.org/officeDocument/2006/relationships" xmlns:p="http://schemas.openxmlformats.org/presentationml/2006/main">
+  <p:cSld>
+    <p:spTree>
+      <p:nvGrpSpPr>
+        <p:cNvPr id="1" name=""/>
+        <p:cNvGrpSpPr/>
+        <p:nvPr/>
+      </p:nvGrpSpPr>
+      <p:grpSpPr>
+        <a:xfrm>
+          <a:off x="0" y="0"/>
+          <a:ext cx="0" cy="0"/>
+          <a:chOff x="0" y="0"/>
+          <a:chExt cx="0" cy="0"/>
+        </a:xfrm>
+      </p:grpSpPr>
+      <p:pic>
+        <p:nvPicPr>
+          <p:cNvPr id="3" name="Imagem 2">
+            <a:extLst>
+              <a:ext uri="{FF2B5EF4-FFF2-40B4-BE49-F238E27FC236}">
+                <a16:creationId xmlns:a16="http://schemas.microsoft.com/office/drawing/2014/main" id="{81FE2A2E-086F-F051-B4E0-8353A3716410}"/>
+              </a:ext>
+            </a:extLst>
+          </p:cNvPr>
+          <p:cNvPicPr>
+            <a:picLocks noChangeAspect="1"/>
+          </p:cNvPicPr>
+          <p:nvPr/>
+        </p:nvPicPr>
+        <p:blipFill>
+          <a:blip r:embed="rId3"/>
+          <a:stretch>
+            <a:fillRect/>
+          </a:stretch>
+        </p:blipFill>
+        <p:spPr>
+          <a:xfrm>
+            <a:off x="0" y="182880"/>
+            <a:ext cx="12192000" cy="6492240"/>
+          </a:xfrm>
+          <a:prstGeom prst="rect">
+            <a:avLst/>
+          </a:prstGeom>
+        </p:spPr>
+      </p:pic>
+      <p:sp>
+        <p:nvSpPr>
+          <p:cNvPr id="4" name="Seta: para Cima 3">
+            <a:extLst>
+              <a:ext uri="{FF2B5EF4-FFF2-40B4-BE49-F238E27FC236}">
+                <a16:creationId xmlns:a16="http://schemas.microsoft.com/office/drawing/2014/main" id="{F90838C6-79E8-AF1F-A8F2-B5D4DCFB09E3}"/>
+              </a:ext>
+            </a:extLst>
+          </p:cNvPr>
+          <p:cNvSpPr/>
+          <p:nvPr/>
+        </p:nvSpPr>
+        <p:spPr>
+          <a:xfrm rot="1040751">
+            <a:off x="4983861" y="3314520"/>
+            <a:ext cx="1617785" cy="2069123"/>
+          </a:xfrm>
+          <a:prstGeom prst="upArrow">
+            <a:avLst/>
+          </a:prstGeom>
+        </p:spPr>
+        <p:style>
+          <a:lnRef idx="2">
+            <a:schemeClr val="accent2">
+              <a:shade val="15000"/>
+            </a:schemeClr>
+          </a:lnRef>
+          <a:fillRef idx="1">
+            <a:schemeClr val="accent2"/>
+          </a:fillRef>
+          <a:effectRef idx="0">
+            <a:schemeClr val="accent2"/>
+          </a:effectRef>
+          <a:fontRef idx="minor">
+            <a:schemeClr val="lt1"/>
+          </a:fontRef>
+        </p:style>
+        <p:txBody>
+          <a:bodyPr rtlCol="0" anchor="ctr"/>
+          <a:lstStyle/>
+          <a:p>
+            <a:pPr algn="ctr"/>
+            <a:endParaRPr lang="en-US"/>
+          </a:p>
+        </p:txBody>
+      </p:sp>
+      <p:sp>
+        <p:nvSpPr>
+          <p:cNvPr id="5" name="Seta: para Cima 4">
+            <a:extLst>
+              <a:ext uri="{FF2B5EF4-FFF2-40B4-BE49-F238E27FC236}">
+                <a16:creationId xmlns:a16="http://schemas.microsoft.com/office/drawing/2014/main" id="{BBB97A96-5CC4-FF64-6C09-A4F9467043A6}"/>
+              </a:ext>
+            </a:extLst>
+          </p:cNvPr>
+          <p:cNvSpPr/>
+          <p:nvPr/>
+        </p:nvSpPr>
+        <p:spPr>
+          <a:xfrm rot="6811017">
+            <a:off x="8852477" y="4621440"/>
+            <a:ext cx="1617785" cy="2069123"/>
+          </a:xfrm>
+          <a:prstGeom prst="upArrow">
+            <a:avLst/>
+          </a:prstGeom>
+        </p:spPr>
+        <p:style>
+          <a:lnRef idx="2">
+            <a:schemeClr val="accent2">
+              <a:shade val="15000"/>
+            </a:schemeClr>
+          </a:lnRef>
+          <a:fillRef idx="1">
+            <a:schemeClr val="accent2"/>
+          </a:fillRef>
+          <a:effectRef idx="0">
+            <a:schemeClr val="accent2"/>
+          </a:effectRef>
+          <a:fontRef idx="minor">
+            <a:schemeClr val="lt1"/>
+          </a:fontRef>
+        </p:style>
+        <p:txBody>
+          <a:bodyPr rtlCol="0" anchor="ctr"/>
+          <a:lstStyle/>
+          <a:p>
+            <a:pPr algn="ctr"/>
+            <a:endParaRPr lang="en-US"/>
+          </a:p>
+        </p:txBody>
+      </p:sp>
+    </p:spTree>
+    <p:extLst>
+      <p:ext uri="{BB962C8B-B14F-4D97-AF65-F5344CB8AC3E}">
+        <p14:creationId xmlns:p14="http://schemas.microsoft.com/office/powerpoint/2010/main" val="4238677624"/>
+      </p:ext>
+    </p:extLst>
+  </p:cSld>
+  <p:clrMapOvr>
+    <a:masterClrMapping/>
+  </p:clrMapOvr>
+</p:sld>
+</file>
+
+<file path=ppt/slides/slide15.xml><?xml version="1.0" encoding="utf-8"?>
+<p:sld xmlns:a="http://schemas.openxmlformats.org/drawingml/2006/main" xmlns:r="http://schemas.openxmlformats.org/officeDocument/2006/relationships" xmlns:p="http://schemas.openxmlformats.org/presentationml/2006/main">
+  <p:cSld>
+    <p:spTree>
+      <p:nvGrpSpPr>
+        <p:cNvPr id="1" name=""/>
+        <p:cNvGrpSpPr/>
+        <p:nvPr/>
+      </p:nvGrpSpPr>
+      <p:grpSpPr>
+        <a:xfrm>
+          <a:off x="0" y="0"/>
+          <a:ext cx="0" cy="0"/>
+          <a:chOff x="0" y="0"/>
+          <a:chExt cx="0" cy="0"/>
+        </a:xfrm>
+      </p:grpSpPr>
+      <p:pic>
+        <p:nvPicPr>
+          <p:cNvPr id="6" name="Imagem 5">
+            <a:extLst>
+              <a:ext uri="{FF2B5EF4-FFF2-40B4-BE49-F238E27FC236}">
+                <a16:creationId xmlns:a16="http://schemas.microsoft.com/office/drawing/2014/main" id="{E95D5FAF-0C0E-DE05-51F2-D40E64CF5AE0}"/>
+              </a:ext>
+            </a:extLst>
+          </p:cNvPr>
+          <p:cNvPicPr>
+            <a:picLocks noChangeAspect="1"/>
+          </p:cNvPicPr>
+          <p:nvPr/>
+        </p:nvPicPr>
+        <p:blipFill>
+          <a:blip r:embed="rId3"/>
+          <a:stretch>
+            <a:fillRect/>
+          </a:stretch>
+        </p:blipFill>
+        <p:spPr>
+          <a:xfrm>
+            <a:off x="0" y="182880"/>
+            <a:ext cx="12192000" cy="6492240"/>
+          </a:xfrm>
+          <a:prstGeom prst="rect">
+            <a:avLst/>
+          </a:prstGeom>
+        </p:spPr>
+      </p:pic>
+      <p:sp>
+        <p:nvSpPr>
+          <p:cNvPr id="7" name="Seta: para Cima 6">
+            <a:extLst>
+              <a:ext uri="{FF2B5EF4-FFF2-40B4-BE49-F238E27FC236}">
+                <a16:creationId xmlns:a16="http://schemas.microsoft.com/office/drawing/2014/main" id="{62968CDC-90C4-61DC-29C7-1F6D48A0D7CB}"/>
+              </a:ext>
+            </a:extLst>
+          </p:cNvPr>
+          <p:cNvSpPr/>
+          <p:nvPr/>
+        </p:nvSpPr>
+        <p:spPr>
+          <a:xfrm rot="16764626">
+            <a:off x="1548999" y="1556059"/>
+            <a:ext cx="1617785" cy="2069123"/>
+          </a:xfrm>
+          <a:prstGeom prst="upArrow">
+            <a:avLst/>
+          </a:prstGeom>
+        </p:spPr>
+        <p:style>
+          <a:lnRef idx="2">
+            <a:schemeClr val="accent2">
+              <a:shade val="15000"/>
+            </a:schemeClr>
+          </a:lnRef>
+          <a:fillRef idx="1">
+            <a:schemeClr val="accent2"/>
+          </a:fillRef>
+          <a:effectRef idx="0">
+            <a:schemeClr val="accent2"/>
+          </a:effectRef>
+          <a:fontRef idx="minor">
+            <a:schemeClr val="lt1"/>
+          </a:fontRef>
+        </p:style>
+        <p:txBody>
+          <a:bodyPr rtlCol="0" anchor="ctr"/>
+          <a:lstStyle/>
+          <a:p>
+            <a:pPr algn="ctr"/>
+            <a:endParaRPr lang="en-US"/>
+          </a:p>
+        </p:txBody>
+      </p:sp>
+      <p:sp>
+        <p:nvSpPr>
+          <p:cNvPr id="9" name="Seta: para Cima 8">
+            <a:extLst>
+              <a:ext uri="{FF2B5EF4-FFF2-40B4-BE49-F238E27FC236}">
+                <a16:creationId xmlns:a16="http://schemas.microsoft.com/office/drawing/2014/main" id="{F3CA646E-4225-7DE3-E109-B6995A27F570}"/>
+              </a:ext>
+            </a:extLst>
+          </p:cNvPr>
+          <p:cNvSpPr/>
+          <p:nvPr/>
+        </p:nvSpPr>
+        <p:spPr>
+          <a:xfrm rot="16200000">
+            <a:off x="1056630" y="2915935"/>
+            <a:ext cx="1617785" cy="2069123"/>
+          </a:xfrm>
+          <a:prstGeom prst="upArrow">
+            <a:avLst/>
+          </a:prstGeom>
+        </p:spPr>
+        <p:style>
+          <a:lnRef idx="2">
+            <a:schemeClr val="accent2">
+              <a:shade val="15000"/>
+            </a:schemeClr>
+          </a:lnRef>
+          <a:fillRef idx="1">
+            <a:schemeClr val="accent2"/>
+          </a:fillRef>
+          <a:effectRef idx="0">
+            <a:schemeClr val="accent2"/>
+          </a:effectRef>
+          <a:fontRef idx="minor">
+            <a:schemeClr val="lt1"/>
+          </a:fontRef>
+        </p:style>
+        <p:txBody>
+          <a:bodyPr rtlCol="0" anchor="ctr"/>
+          <a:lstStyle/>
+          <a:p>
+            <a:pPr algn="ctr"/>
+            <a:endParaRPr lang="en-US"/>
+          </a:p>
+        </p:txBody>
+      </p:sp>
+      <p:sp>
+        <p:nvSpPr>
+          <p:cNvPr id="10" name="Seta: para Cima 9">
+            <a:extLst>
+              <a:ext uri="{FF2B5EF4-FFF2-40B4-BE49-F238E27FC236}">
+                <a16:creationId xmlns:a16="http://schemas.microsoft.com/office/drawing/2014/main" id="{356E2338-5A05-B23F-3E4B-93D3EF1D1A4D}"/>
+              </a:ext>
+            </a:extLst>
+          </p:cNvPr>
+          <p:cNvSpPr/>
+          <p:nvPr/>
+        </p:nvSpPr>
+        <p:spPr>
+          <a:xfrm rot="17639806">
+            <a:off x="2823106" y="713224"/>
+            <a:ext cx="1617785" cy="2069123"/>
+          </a:xfrm>
+          <a:prstGeom prst="upArrow">
+            <a:avLst/>
+          </a:prstGeom>
+        </p:spPr>
+        <p:style>
+          <a:lnRef idx="2">
+            <a:schemeClr val="accent2">
+              <a:shade val="15000"/>
+            </a:schemeClr>
+          </a:lnRef>
+          <a:fillRef idx="1">
+            <a:schemeClr val="accent2"/>
+          </a:fillRef>
+          <a:effectRef idx="0">
+            <a:schemeClr val="accent2"/>
+          </a:effectRef>
+          <a:fontRef idx="minor">
+            <a:schemeClr val="lt1"/>
+          </a:fontRef>
+        </p:style>
+        <p:txBody>
+          <a:bodyPr rtlCol="0" anchor="ctr"/>
+          <a:lstStyle/>
+          <a:p>
+            <a:pPr algn="ctr"/>
+            <a:endParaRPr lang="en-US"/>
+          </a:p>
+        </p:txBody>
+      </p:sp>
+      <p:sp>
+        <p:nvSpPr>
+          <p:cNvPr id="11" name="Seta: para Cima 10">
+            <a:extLst>
+              <a:ext uri="{FF2B5EF4-FFF2-40B4-BE49-F238E27FC236}">
+                <a16:creationId xmlns:a16="http://schemas.microsoft.com/office/drawing/2014/main" id="{0496B0E7-47EE-3461-9377-F5D4D0B09157}"/>
+              </a:ext>
+            </a:extLst>
+          </p:cNvPr>
+          <p:cNvSpPr/>
+          <p:nvPr/>
+        </p:nvSpPr>
+        <p:spPr>
+          <a:xfrm rot="11437999">
+            <a:off x="3908056" y="4081990"/>
+            <a:ext cx="1617785" cy="2069123"/>
+          </a:xfrm>
+          <a:prstGeom prst="upArrow">
+            <a:avLst/>
+          </a:prstGeom>
+        </p:spPr>
+        <p:style>
+          <a:lnRef idx="2">
+            <a:schemeClr val="accent2">
+              <a:shade val="15000"/>
+            </a:schemeClr>
+          </a:lnRef>
+          <a:fillRef idx="1">
+            <a:schemeClr val="accent2"/>
+          </a:fillRef>
+          <a:effectRef idx="0">
+            <a:schemeClr val="accent2"/>
+          </a:effectRef>
+          <a:fontRef idx="minor">
+            <a:schemeClr val="lt1"/>
+          </a:fontRef>
+        </p:style>
+        <p:txBody>
+          <a:bodyPr rtlCol="0" anchor="ctr"/>
+          <a:lstStyle/>
+          <a:p>
+            <a:pPr algn="ctr"/>
+            <a:endParaRPr lang="en-US"/>
+          </a:p>
+        </p:txBody>
+      </p:sp>
+    </p:spTree>
+    <p:extLst>
+      <p:ext uri="{BB962C8B-B14F-4D97-AF65-F5344CB8AC3E}">
+        <p14:creationId xmlns:p14="http://schemas.microsoft.com/office/powerpoint/2010/main" val="3213586357"/>
+      </p:ext>
+    </p:extLst>
+  </p:cSld>
+  <p:clrMapOvr>
+    <a:masterClrMapping/>
+  </p:clrMapOvr>
+</p:sld>
+</file>
+
+<file path=ppt/slides/slide16.xml><?xml version="1.0" encoding="utf-8"?>
+<p:sld xmlns:a="http://schemas.openxmlformats.org/drawingml/2006/main" xmlns:r="http://schemas.openxmlformats.org/officeDocument/2006/relationships" xmlns:p="http://schemas.openxmlformats.org/presentationml/2006/main">
+  <p:cSld>
+    <p:spTree>
+      <p:nvGrpSpPr>
+        <p:cNvPr id="1" name=""/>
+        <p:cNvGrpSpPr/>
+        <p:nvPr/>
+      </p:nvGrpSpPr>
+      <p:grpSpPr>
+        <a:xfrm>
+          <a:off x="0" y="0"/>
+          <a:ext cx="0" cy="0"/>
+          <a:chOff x="0" y="0"/>
+          <a:chExt cx="0" cy="0"/>
+        </a:xfrm>
+      </p:grpSpPr>
+      <p:pic>
+        <p:nvPicPr>
+          <p:cNvPr id="3" name="Imagem 2">
+            <a:extLst>
+              <a:ext uri="{FF2B5EF4-FFF2-40B4-BE49-F238E27FC236}">
+                <a16:creationId xmlns:a16="http://schemas.microsoft.com/office/drawing/2014/main" id="{9CEB7126-BCB6-AA62-651F-97E7A63C8520}"/>
+              </a:ext>
+            </a:extLst>
+          </p:cNvPr>
+          <p:cNvPicPr>
+            <a:picLocks noChangeAspect="1"/>
+          </p:cNvPicPr>
+          <p:nvPr/>
+        </p:nvPicPr>
+        <p:blipFill>
+          <a:blip r:embed="rId3"/>
+          <a:stretch>
+            <a:fillRect/>
+          </a:stretch>
+        </p:blipFill>
+        <p:spPr>
+          <a:xfrm>
+            <a:off x="0" y="182880"/>
+            <a:ext cx="12192000" cy="6492240"/>
+          </a:xfrm>
+          <a:prstGeom prst="rect">
+            <a:avLst/>
+          </a:prstGeom>
+        </p:spPr>
+      </p:pic>
+      <p:sp>
+        <p:nvSpPr>
+          <p:cNvPr id="4" name="Seta: para Cima 3">
+            <a:extLst>
+              <a:ext uri="{FF2B5EF4-FFF2-40B4-BE49-F238E27FC236}">
+                <a16:creationId xmlns:a16="http://schemas.microsoft.com/office/drawing/2014/main" id="{DC60D8B0-7705-13BD-BA64-F4D510EE1D1F}"/>
+              </a:ext>
+            </a:extLst>
+          </p:cNvPr>
+          <p:cNvSpPr/>
+          <p:nvPr/>
+        </p:nvSpPr>
+        <p:spPr>
+          <a:xfrm rot="16200000">
+            <a:off x="7809122" y="1896027"/>
+            <a:ext cx="1617785" cy="2069123"/>
+          </a:xfrm>
+          <a:prstGeom prst="upArrow">
+            <a:avLst/>
+          </a:prstGeom>
+        </p:spPr>
+        <p:style>
+          <a:lnRef idx="2">
+            <a:schemeClr val="accent2">
+              <a:shade val="15000"/>
+            </a:schemeClr>
+          </a:lnRef>
+          <a:fillRef idx="1">
+            <a:schemeClr val="accent2"/>
+          </a:fillRef>
+          <a:effectRef idx="0">
+            <a:schemeClr val="accent2"/>
+          </a:effectRef>
+          <a:fontRef idx="minor">
+            <a:schemeClr val="lt1"/>
+          </a:fontRef>
+        </p:style>
+        <p:txBody>
+          <a:bodyPr rtlCol="0" anchor="ctr"/>
+          <a:lstStyle/>
+          <a:p>
+            <a:pPr algn="ctr"/>
+            <a:endParaRPr lang="en-US"/>
+          </a:p>
+        </p:txBody>
+      </p:sp>
+      <p:sp>
+        <p:nvSpPr>
+          <p:cNvPr id="5" name="Seta: para Cima 4">
+            <a:extLst>
+              <a:ext uri="{FF2B5EF4-FFF2-40B4-BE49-F238E27FC236}">
+                <a16:creationId xmlns:a16="http://schemas.microsoft.com/office/drawing/2014/main" id="{6A3E8537-76EE-4EE3-6D8B-8454AA65ED3E}"/>
+              </a:ext>
+            </a:extLst>
+          </p:cNvPr>
+          <p:cNvSpPr/>
+          <p:nvPr/>
+        </p:nvSpPr>
+        <p:spPr>
+          <a:xfrm rot="16200000">
+            <a:off x="8395276" y="5014546"/>
+            <a:ext cx="1617785" cy="2069123"/>
+          </a:xfrm>
+          <a:prstGeom prst="upArrow">
+            <a:avLst/>
+          </a:prstGeom>
+        </p:spPr>
+        <p:style>
+          <a:lnRef idx="2">
+            <a:schemeClr val="accent2">
+              <a:shade val="15000"/>
+            </a:schemeClr>
+          </a:lnRef>
+          <a:fillRef idx="1">
+            <a:schemeClr val="accent2"/>
+          </a:fillRef>
+          <a:effectRef idx="0">
+            <a:schemeClr val="accent2"/>
+          </a:effectRef>
+          <a:fontRef idx="minor">
+            <a:schemeClr val="lt1"/>
+          </a:fontRef>
+        </p:style>
+        <p:txBody>
+          <a:bodyPr rtlCol="0" anchor="ctr"/>
+          <a:lstStyle/>
+          <a:p>
+            <a:pPr algn="ctr"/>
+            <a:endParaRPr lang="en-US"/>
+          </a:p>
+        </p:txBody>
+      </p:sp>
+    </p:spTree>
+    <p:extLst>
+      <p:ext uri="{BB962C8B-B14F-4D97-AF65-F5344CB8AC3E}">
+        <p14:creationId xmlns:p14="http://schemas.microsoft.com/office/powerpoint/2010/main" val="384171958"/>
+      </p:ext>
+    </p:extLst>
+  </p:cSld>
+  <p:clrMapOvr>
+    <a:masterClrMapping/>
+  </p:clrMapOvr>
+</p:sld>
+</file>
+
+<file path=ppt/slides/slide17.xml><?xml version="1.0" encoding="utf-8"?>
+<p:sld xmlns:a="http://schemas.openxmlformats.org/drawingml/2006/main" xmlns:r="http://schemas.openxmlformats.org/officeDocument/2006/relationships" xmlns:p="http://schemas.openxmlformats.org/presentationml/2006/main">
+  <p:cSld>
+    <p:spTree>
+      <p:nvGrpSpPr>
+        <p:cNvPr id="1" name=""/>
+        <p:cNvGrpSpPr/>
+        <p:nvPr/>
+      </p:nvGrpSpPr>
+      <p:grpSpPr>
+        <a:xfrm>
+          <a:off x="0" y="0"/>
+          <a:ext cx="0" cy="0"/>
+          <a:chOff x="0" y="0"/>
+          <a:chExt cx="0" cy="0"/>
+        </a:xfrm>
+      </p:grpSpPr>
+      <p:pic>
+        <p:nvPicPr>
+          <p:cNvPr id="3" name="Imagem 2">
+            <a:extLst>
+              <a:ext uri="{FF2B5EF4-FFF2-40B4-BE49-F238E27FC236}">
+                <a16:creationId xmlns:a16="http://schemas.microsoft.com/office/drawing/2014/main" id="{D23D5621-9123-E4EE-2DE9-AF9ED78D6C07}"/>
+              </a:ext>
+            </a:extLst>
+          </p:cNvPr>
+          <p:cNvPicPr>
+            <a:picLocks noChangeAspect="1"/>
+          </p:cNvPicPr>
+          <p:nvPr/>
+        </p:nvPicPr>
+        <p:blipFill>
+          <a:blip r:embed="rId3"/>
+          <a:stretch>
+            <a:fillRect/>
+          </a:stretch>
+        </p:blipFill>
+        <p:spPr>
+          <a:xfrm>
+            <a:off x="0" y="182880"/>
+            <a:ext cx="12192000" cy="6492240"/>
+          </a:xfrm>
+          <a:prstGeom prst="rect">
+            <a:avLst/>
+          </a:prstGeom>
+        </p:spPr>
+      </p:pic>
+    </p:spTree>
+    <p:extLst>
+      <p:ext uri="{BB962C8B-B14F-4D97-AF65-F5344CB8AC3E}">
+        <p14:creationId xmlns:p14="http://schemas.microsoft.com/office/powerpoint/2010/main" val="2975164579"/>
+      </p:ext>
+    </p:extLst>
+  </p:cSld>
+  <p:clrMapOvr>
+    <a:masterClrMapping/>
+  </p:clrMapOvr>
+</p:sld>
+</file>
+
+<file path=ppt/slides/slide18.xml><?xml version="1.0" encoding="utf-8"?>
+<p:sld xmlns:a="http://schemas.openxmlformats.org/drawingml/2006/main" xmlns:r="http://schemas.openxmlformats.org/officeDocument/2006/relationships" xmlns:p="http://schemas.openxmlformats.org/presentationml/2006/main">
+  <p:cSld>
+    <p:spTree>
+      <p:nvGrpSpPr>
+        <p:cNvPr id="1" name=""/>
+        <p:cNvGrpSpPr/>
+        <p:nvPr/>
+      </p:nvGrpSpPr>
+      <p:grpSpPr>
+        <a:xfrm>
+          <a:off x="0" y="0"/>
+          <a:ext cx="0" cy="0"/>
+          <a:chOff x="0" y="0"/>
+          <a:chExt cx="0" cy="0"/>
+        </a:xfrm>
+      </p:grpSpPr>
+      <p:pic>
+        <p:nvPicPr>
+          <p:cNvPr id="4" name="Imagem 3">
+            <a:extLst>
+              <a:ext uri="{FF2B5EF4-FFF2-40B4-BE49-F238E27FC236}">
+                <a16:creationId xmlns:a16="http://schemas.microsoft.com/office/drawing/2014/main" id="{2BA5ED52-9F4A-4DA4-A0B7-A13A9232884E}"/>
+              </a:ext>
+            </a:extLst>
+          </p:cNvPr>
+          <p:cNvPicPr>
+            <a:picLocks noChangeAspect="1"/>
+          </p:cNvPicPr>
+          <p:nvPr/>
+        </p:nvPicPr>
+        <p:blipFill>
+          <a:blip r:embed="rId3"/>
+          <a:stretch>
+            <a:fillRect/>
+          </a:stretch>
+        </p:blipFill>
+        <p:spPr>
+          <a:xfrm>
+            <a:off x="0" y="182880"/>
+            <a:ext cx="12192000" cy="6492240"/>
+          </a:xfrm>
+          <a:prstGeom prst="rect">
+            <a:avLst/>
+          </a:prstGeom>
+        </p:spPr>
+      </p:pic>
+    </p:spTree>
+    <p:extLst>
+      <p:ext uri="{BB962C8B-B14F-4D97-AF65-F5344CB8AC3E}">
+        <p14:creationId xmlns:p14="http://schemas.microsoft.com/office/powerpoint/2010/main" val="1511469685"/>
+      </p:ext>
+    </p:extLst>
+  </p:cSld>
+  <p:clrMapOvr>
+    <a:masterClrMapping/>
+  </p:clrMapOvr>
+</p:sld>
+</file>
+
+<file path=ppt/slides/slide19.xml><?xml version="1.0" encoding="utf-8"?>
+<p:sld xmlns:a="http://schemas.openxmlformats.org/drawingml/2006/main" xmlns:r="http://schemas.openxmlformats.org/officeDocument/2006/relationships" xmlns:p="http://schemas.openxmlformats.org/presentationml/2006/main">
+  <p:cSld>
+    <p:spTree>
+      <p:nvGrpSpPr>
+        <p:cNvPr id="1" name=""/>
+        <p:cNvGrpSpPr/>
+        <p:nvPr/>
+      </p:nvGrpSpPr>
+      <p:grpSpPr>
+        <a:xfrm>
+          <a:off x="0" y="0"/>
+          <a:ext cx="0" cy="0"/>
+          <a:chOff x="0" y="0"/>
+          <a:chExt cx="0" cy="0"/>
+        </a:xfrm>
+      </p:grpSpPr>
+      <p:pic>
+        <p:nvPicPr>
+          <p:cNvPr id="3" name="Imagem 2">
+            <a:extLst>
+              <a:ext uri="{FF2B5EF4-FFF2-40B4-BE49-F238E27FC236}">
+                <a16:creationId xmlns:a16="http://schemas.microsoft.com/office/drawing/2014/main" id="{1B2C7A04-4DE9-0836-E758-D186EE1892A1}"/>
+              </a:ext>
+            </a:extLst>
+          </p:cNvPr>
+          <p:cNvPicPr>
+            <a:picLocks noChangeAspect="1"/>
+          </p:cNvPicPr>
+          <p:nvPr/>
+        </p:nvPicPr>
+        <p:blipFill>
+          <a:blip r:embed="rId3"/>
+          <a:stretch>
+            <a:fillRect/>
+          </a:stretch>
+        </p:blipFill>
+        <p:spPr>
+          <a:xfrm>
+            <a:off x="0" y="182880"/>
+            <a:ext cx="12192000" cy="6492240"/>
+          </a:xfrm>
+          <a:prstGeom prst="rect">
+            <a:avLst/>
+          </a:prstGeom>
+        </p:spPr>
+      </p:pic>
+    </p:spTree>
+    <p:extLst>
+      <p:ext uri="{BB962C8B-B14F-4D97-AF65-F5344CB8AC3E}">
+        <p14:creationId xmlns:p14="http://schemas.microsoft.com/office/powerpoint/2010/main" val="2020051770"/>
       </p:ext>
     </p:extLst>
   </p:cSld>
@@ -4369,6 +6160,840 @@
 </file>
 
 <file path=ppt/slides/slide2.xml><?xml version="1.0" encoding="utf-8"?>
+<p:sld xmlns:a="http://schemas.openxmlformats.org/drawingml/2006/main" xmlns:r="http://schemas.openxmlformats.org/officeDocument/2006/relationships" xmlns:p="http://schemas.openxmlformats.org/presentationml/2006/main">
+  <p:cSld>
+    <p:spTree>
+      <p:nvGrpSpPr>
+        <p:cNvPr id="1" name=""/>
+        <p:cNvGrpSpPr/>
+        <p:nvPr/>
+      </p:nvGrpSpPr>
+      <p:grpSpPr>
+        <a:xfrm>
+          <a:off x="0" y="0"/>
+          <a:ext cx="0" cy="0"/>
+          <a:chOff x="0" y="0"/>
+          <a:chExt cx="0" cy="0"/>
+        </a:xfrm>
+      </p:grpSpPr>
+      <p:sp>
+        <p:nvSpPr>
+          <p:cNvPr id="4" name="Seta: para Cima 3">
+            <a:extLst>
+              <a:ext uri="{FF2B5EF4-FFF2-40B4-BE49-F238E27FC236}">
+                <a16:creationId xmlns:a16="http://schemas.microsoft.com/office/drawing/2014/main" id="{A49BF2F6-B8A5-D332-AB1A-B79FFE626202}"/>
+              </a:ext>
+            </a:extLst>
+          </p:cNvPr>
+          <p:cNvSpPr/>
+          <p:nvPr/>
+        </p:nvSpPr>
+        <p:spPr>
+          <a:xfrm rot="18270987">
+            <a:off x="3282463" y="3397195"/>
+            <a:ext cx="1617785" cy="2069123"/>
+          </a:xfrm>
+          <a:prstGeom prst="upArrow">
+            <a:avLst/>
+          </a:prstGeom>
+        </p:spPr>
+        <p:style>
+          <a:lnRef idx="2">
+            <a:schemeClr val="accent2">
+              <a:shade val="15000"/>
+            </a:schemeClr>
+          </a:lnRef>
+          <a:fillRef idx="1">
+            <a:schemeClr val="accent2"/>
+          </a:fillRef>
+          <a:effectRef idx="0">
+            <a:schemeClr val="accent2"/>
+          </a:effectRef>
+          <a:fontRef idx="minor">
+            <a:schemeClr val="lt1"/>
+          </a:fontRef>
+        </p:style>
+        <p:txBody>
+          <a:bodyPr rtlCol="0" anchor="ctr"/>
+          <a:lstStyle/>
+          <a:p>
+            <a:pPr algn="ctr"/>
+            <a:endParaRPr lang="en-US"/>
+          </a:p>
+        </p:txBody>
+      </p:sp>
+      <p:pic>
+        <p:nvPicPr>
+          <p:cNvPr id="5" name="Imagem 4">
+            <a:extLst>
+              <a:ext uri="{FF2B5EF4-FFF2-40B4-BE49-F238E27FC236}">
+                <a16:creationId xmlns:a16="http://schemas.microsoft.com/office/drawing/2014/main" id="{69B1C47F-9501-0AB6-2E7A-A3D3C3ABDC9D}"/>
+              </a:ext>
+            </a:extLst>
+          </p:cNvPr>
+          <p:cNvPicPr>
+            <a:picLocks noChangeAspect="1"/>
+          </p:cNvPicPr>
+          <p:nvPr/>
+        </p:nvPicPr>
+        <p:blipFill>
+          <a:blip r:embed="rId3"/>
+          <a:stretch>
+            <a:fillRect/>
+          </a:stretch>
+        </p:blipFill>
+        <p:spPr>
+          <a:xfrm>
+            <a:off x="0" y="182880"/>
+            <a:ext cx="12192000" cy="6492240"/>
+          </a:xfrm>
+          <a:prstGeom prst="rect">
+            <a:avLst/>
+          </a:prstGeom>
+        </p:spPr>
+      </p:pic>
+      <p:sp>
+        <p:nvSpPr>
+          <p:cNvPr id="6" name="Seta: para Cima 5">
+            <a:extLst>
+              <a:ext uri="{FF2B5EF4-FFF2-40B4-BE49-F238E27FC236}">
+                <a16:creationId xmlns:a16="http://schemas.microsoft.com/office/drawing/2014/main" id="{107721EB-0449-C0BB-35A4-6C7A3E4455A0}"/>
+              </a:ext>
+            </a:extLst>
+          </p:cNvPr>
+          <p:cNvSpPr/>
+          <p:nvPr/>
+        </p:nvSpPr>
+        <p:spPr>
+          <a:xfrm rot="18270987">
+            <a:off x="1219202" y="3647163"/>
+            <a:ext cx="1617785" cy="2069123"/>
+          </a:xfrm>
+          <a:prstGeom prst="upArrow">
+            <a:avLst/>
+          </a:prstGeom>
+        </p:spPr>
+        <p:style>
+          <a:lnRef idx="2">
+            <a:schemeClr val="accent2">
+              <a:shade val="15000"/>
+            </a:schemeClr>
+          </a:lnRef>
+          <a:fillRef idx="1">
+            <a:schemeClr val="accent2"/>
+          </a:fillRef>
+          <a:effectRef idx="0">
+            <a:schemeClr val="accent2"/>
+          </a:effectRef>
+          <a:fontRef idx="minor">
+            <a:schemeClr val="lt1"/>
+          </a:fontRef>
+        </p:style>
+        <p:txBody>
+          <a:bodyPr rtlCol="0" anchor="ctr"/>
+          <a:lstStyle/>
+          <a:p>
+            <a:pPr algn="ctr"/>
+            <a:endParaRPr lang="en-US"/>
+          </a:p>
+        </p:txBody>
+      </p:sp>
+      <p:sp>
+        <p:nvSpPr>
+          <p:cNvPr id="7" name="Seta: para Cima 6">
+            <a:extLst>
+              <a:ext uri="{FF2B5EF4-FFF2-40B4-BE49-F238E27FC236}">
+                <a16:creationId xmlns:a16="http://schemas.microsoft.com/office/drawing/2014/main" id="{B245843D-C116-A32C-FCD7-C1146591C4D7}"/>
+              </a:ext>
+            </a:extLst>
+          </p:cNvPr>
+          <p:cNvSpPr/>
+          <p:nvPr/>
+        </p:nvSpPr>
+        <p:spPr>
+          <a:xfrm rot="1365287">
+            <a:off x="8757140" y="3583502"/>
+            <a:ext cx="1617785" cy="2069123"/>
+          </a:xfrm>
+          <a:prstGeom prst="upArrow">
+            <a:avLst/>
+          </a:prstGeom>
+        </p:spPr>
+        <p:style>
+          <a:lnRef idx="2">
+            <a:schemeClr val="accent2">
+              <a:shade val="15000"/>
+            </a:schemeClr>
+          </a:lnRef>
+          <a:fillRef idx="1">
+            <a:schemeClr val="accent2"/>
+          </a:fillRef>
+          <a:effectRef idx="0">
+            <a:schemeClr val="accent2"/>
+          </a:effectRef>
+          <a:fontRef idx="minor">
+            <a:schemeClr val="lt1"/>
+          </a:fontRef>
+        </p:style>
+        <p:txBody>
+          <a:bodyPr rtlCol="0" anchor="ctr"/>
+          <a:lstStyle/>
+          <a:p>
+            <a:pPr algn="ctr"/>
+            <a:endParaRPr lang="en-US"/>
+          </a:p>
+        </p:txBody>
+      </p:sp>
+    </p:spTree>
+    <p:extLst>
+      <p:ext uri="{BB962C8B-B14F-4D97-AF65-F5344CB8AC3E}">
+        <p14:creationId xmlns:p14="http://schemas.microsoft.com/office/powerpoint/2010/main" val="2472560085"/>
+      </p:ext>
+    </p:extLst>
+  </p:cSld>
+  <p:clrMapOvr>
+    <a:masterClrMapping/>
+  </p:clrMapOvr>
+</p:sld>
+</file>
+
+<file path=ppt/slides/slide20.xml><?xml version="1.0" encoding="utf-8"?>
+<p:sld xmlns:a="http://schemas.openxmlformats.org/drawingml/2006/main" xmlns:r="http://schemas.openxmlformats.org/officeDocument/2006/relationships" xmlns:p="http://schemas.openxmlformats.org/presentationml/2006/main">
+  <p:cSld>
+    <p:spTree>
+      <p:nvGrpSpPr>
+        <p:cNvPr id="1" name=""/>
+        <p:cNvGrpSpPr/>
+        <p:nvPr/>
+      </p:nvGrpSpPr>
+      <p:grpSpPr>
+        <a:xfrm>
+          <a:off x="0" y="0"/>
+          <a:ext cx="0" cy="0"/>
+          <a:chOff x="0" y="0"/>
+          <a:chExt cx="0" cy="0"/>
+        </a:xfrm>
+      </p:grpSpPr>
+      <p:pic>
+        <p:nvPicPr>
+          <p:cNvPr id="3" name="Imagem 2">
+            <a:extLst>
+              <a:ext uri="{FF2B5EF4-FFF2-40B4-BE49-F238E27FC236}">
+                <a16:creationId xmlns:a16="http://schemas.microsoft.com/office/drawing/2014/main" id="{B4B291C3-B808-C68D-1204-564CF64A9A23}"/>
+              </a:ext>
+            </a:extLst>
+          </p:cNvPr>
+          <p:cNvPicPr>
+            <a:picLocks noChangeAspect="1"/>
+          </p:cNvPicPr>
+          <p:nvPr/>
+        </p:nvPicPr>
+        <p:blipFill>
+          <a:blip r:embed="rId3"/>
+          <a:stretch>
+            <a:fillRect/>
+          </a:stretch>
+        </p:blipFill>
+        <p:spPr>
+          <a:xfrm>
+            <a:off x="0" y="182880"/>
+            <a:ext cx="12192000" cy="6492240"/>
+          </a:xfrm>
+          <a:prstGeom prst="rect">
+            <a:avLst/>
+          </a:prstGeom>
+        </p:spPr>
+      </p:pic>
+    </p:spTree>
+    <p:extLst>
+      <p:ext uri="{BB962C8B-B14F-4D97-AF65-F5344CB8AC3E}">
+        <p14:creationId xmlns:p14="http://schemas.microsoft.com/office/powerpoint/2010/main" val="3894532342"/>
+      </p:ext>
+    </p:extLst>
+  </p:cSld>
+  <p:clrMapOvr>
+    <a:masterClrMapping/>
+  </p:clrMapOvr>
+</p:sld>
+</file>
+
+<file path=ppt/slides/slide21.xml><?xml version="1.0" encoding="utf-8"?>
+<p:sld xmlns:a="http://schemas.openxmlformats.org/drawingml/2006/main" xmlns:r="http://schemas.openxmlformats.org/officeDocument/2006/relationships" xmlns:p="http://schemas.openxmlformats.org/presentationml/2006/main">
+  <p:cSld>
+    <p:spTree>
+      <p:nvGrpSpPr>
+        <p:cNvPr id="1" name=""/>
+        <p:cNvGrpSpPr/>
+        <p:nvPr/>
+      </p:nvGrpSpPr>
+      <p:grpSpPr>
+        <a:xfrm>
+          <a:off x="0" y="0"/>
+          <a:ext cx="0" cy="0"/>
+          <a:chOff x="0" y="0"/>
+          <a:chExt cx="0" cy="0"/>
+        </a:xfrm>
+      </p:grpSpPr>
+      <p:pic>
+        <p:nvPicPr>
+          <p:cNvPr id="3" name="Imagem 2">
+            <a:extLst>
+              <a:ext uri="{FF2B5EF4-FFF2-40B4-BE49-F238E27FC236}">
+                <a16:creationId xmlns:a16="http://schemas.microsoft.com/office/drawing/2014/main" id="{F496AD7B-5F7A-4D52-3DA5-A2A55574869F}"/>
+              </a:ext>
+            </a:extLst>
+          </p:cNvPr>
+          <p:cNvPicPr>
+            <a:picLocks noChangeAspect="1"/>
+          </p:cNvPicPr>
+          <p:nvPr/>
+        </p:nvPicPr>
+        <p:blipFill>
+          <a:blip r:embed="rId3"/>
+          <a:stretch>
+            <a:fillRect/>
+          </a:stretch>
+        </p:blipFill>
+        <p:spPr>
+          <a:xfrm>
+            <a:off x="0" y="182880"/>
+            <a:ext cx="12192000" cy="6492240"/>
+          </a:xfrm>
+          <a:prstGeom prst="rect">
+            <a:avLst/>
+          </a:prstGeom>
+        </p:spPr>
+      </p:pic>
+    </p:spTree>
+    <p:extLst>
+      <p:ext uri="{BB962C8B-B14F-4D97-AF65-F5344CB8AC3E}">
+        <p14:creationId xmlns:p14="http://schemas.microsoft.com/office/powerpoint/2010/main" val="3634397654"/>
+      </p:ext>
+    </p:extLst>
+  </p:cSld>
+  <p:clrMapOvr>
+    <a:masterClrMapping/>
+  </p:clrMapOvr>
+</p:sld>
+</file>
+
+<file path=ppt/slides/slide3.xml><?xml version="1.0" encoding="utf-8"?>
+<p:sld xmlns:a="http://schemas.openxmlformats.org/drawingml/2006/main" xmlns:r="http://schemas.openxmlformats.org/officeDocument/2006/relationships" xmlns:p="http://schemas.openxmlformats.org/presentationml/2006/main">
+  <p:cSld>
+    <p:spTree>
+      <p:nvGrpSpPr>
+        <p:cNvPr id="1" name=""/>
+        <p:cNvGrpSpPr/>
+        <p:nvPr/>
+      </p:nvGrpSpPr>
+      <p:grpSpPr>
+        <a:xfrm>
+          <a:off x="0" y="0"/>
+          <a:ext cx="0" cy="0"/>
+          <a:chOff x="0" y="0"/>
+          <a:chExt cx="0" cy="0"/>
+        </a:xfrm>
+      </p:grpSpPr>
+      <p:pic>
+        <p:nvPicPr>
+          <p:cNvPr id="3" name="Imagem 2">
+            <a:extLst>
+              <a:ext uri="{FF2B5EF4-FFF2-40B4-BE49-F238E27FC236}">
+                <a16:creationId xmlns:a16="http://schemas.microsoft.com/office/drawing/2014/main" id="{9279C2CA-EF25-DC28-5941-BC639FDBC8B3}"/>
+              </a:ext>
+            </a:extLst>
+          </p:cNvPr>
+          <p:cNvPicPr>
+            <a:picLocks noChangeAspect="1"/>
+          </p:cNvPicPr>
+          <p:nvPr/>
+        </p:nvPicPr>
+        <p:blipFill>
+          <a:blip r:embed="rId3"/>
+          <a:stretch>
+            <a:fillRect/>
+          </a:stretch>
+        </p:blipFill>
+        <p:spPr>
+          <a:xfrm>
+            <a:off x="0" y="182880"/>
+            <a:ext cx="12192000" cy="6492240"/>
+          </a:xfrm>
+          <a:prstGeom prst="rect">
+            <a:avLst/>
+          </a:prstGeom>
+        </p:spPr>
+      </p:pic>
+      <p:sp>
+        <p:nvSpPr>
+          <p:cNvPr id="8" name="Seta: para Cima 7">
+            <a:extLst>
+              <a:ext uri="{FF2B5EF4-FFF2-40B4-BE49-F238E27FC236}">
+                <a16:creationId xmlns:a16="http://schemas.microsoft.com/office/drawing/2014/main" id="{B22C7FE8-A60D-EBFC-2D55-D687E23EEF44}"/>
+              </a:ext>
+            </a:extLst>
+          </p:cNvPr>
+          <p:cNvSpPr/>
+          <p:nvPr/>
+        </p:nvSpPr>
+        <p:spPr>
+          <a:xfrm rot="1365287">
+            <a:off x="2532186" y="5001994"/>
+            <a:ext cx="1617785" cy="2069123"/>
+          </a:xfrm>
+          <a:prstGeom prst="upArrow">
+            <a:avLst/>
+          </a:prstGeom>
+        </p:spPr>
+        <p:style>
+          <a:lnRef idx="2">
+            <a:schemeClr val="accent2">
+              <a:shade val="15000"/>
+            </a:schemeClr>
+          </a:lnRef>
+          <a:fillRef idx="1">
+            <a:schemeClr val="accent2"/>
+          </a:fillRef>
+          <a:effectRef idx="0">
+            <a:schemeClr val="accent2"/>
+          </a:effectRef>
+          <a:fontRef idx="minor">
+            <a:schemeClr val="lt1"/>
+          </a:fontRef>
+        </p:style>
+        <p:txBody>
+          <a:bodyPr rtlCol="0" anchor="ctr"/>
+          <a:lstStyle/>
+          <a:p>
+            <a:pPr algn="ctr"/>
+            <a:endParaRPr lang="en-US"/>
+          </a:p>
+        </p:txBody>
+      </p:sp>
+      <p:sp>
+        <p:nvSpPr>
+          <p:cNvPr id="9" name="Seta: para Cima 8">
+            <a:extLst>
+              <a:ext uri="{FF2B5EF4-FFF2-40B4-BE49-F238E27FC236}">
+                <a16:creationId xmlns:a16="http://schemas.microsoft.com/office/drawing/2014/main" id="{84C24109-F59C-1942-3589-72C501462A42}"/>
+              </a:ext>
+            </a:extLst>
+          </p:cNvPr>
+          <p:cNvSpPr/>
+          <p:nvPr/>
+        </p:nvSpPr>
+        <p:spPr>
+          <a:xfrm rot="1365287">
+            <a:off x="6717325" y="5001993"/>
+            <a:ext cx="1617785" cy="2069123"/>
+          </a:xfrm>
+          <a:prstGeom prst="upArrow">
+            <a:avLst/>
+          </a:prstGeom>
+        </p:spPr>
+        <p:style>
+          <a:lnRef idx="2">
+            <a:schemeClr val="accent2">
+              <a:shade val="15000"/>
+            </a:schemeClr>
+          </a:lnRef>
+          <a:fillRef idx="1">
+            <a:schemeClr val="accent2"/>
+          </a:fillRef>
+          <a:effectRef idx="0">
+            <a:schemeClr val="accent2"/>
+          </a:effectRef>
+          <a:fontRef idx="minor">
+            <a:schemeClr val="lt1"/>
+          </a:fontRef>
+        </p:style>
+        <p:txBody>
+          <a:bodyPr rtlCol="0" anchor="ctr"/>
+          <a:lstStyle/>
+          <a:p>
+            <a:pPr algn="ctr"/>
+            <a:endParaRPr lang="en-US"/>
+          </a:p>
+        </p:txBody>
+      </p:sp>
+    </p:spTree>
+    <p:extLst>
+      <p:ext uri="{BB962C8B-B14F-4D97-AF65-F5344CB8AC3E}">
+        <p14:creationId xmlns:p14="http://schemas.microsoft.com/office/powerpoint/2010/main" val="2686917524"/>
+      </p:ext>
+    </p:extLst>
+  </p:cSld>
+  <p:clrMapOvr>
+    <a:masterClrMapping/>
+  </p:clrMapOvr>
+</p:sld>
+</file>
+
+<file path=ppt/slides/slide4.xml><?xml version="1.0" encoding="utf-8"?>
+<p:sld xmlns:a="http://schemas.openxmlformats.org/drawingml/2006/main" xmlns:r="http://schemas.openxmlformats.org/officeDocument/2006/relationships" xmlns:p="http://schemas.openxmlformats.org/presentationml/2006/main">
+  <p:cSld>
+    <p:spTree>
+      <p:nvGrpSpPr>
+        <p:cNvPr id="1" name=""/>
+        <p:cNvGrpSpPr/>
+        <p:nvPr/>
+      </p:nvGrpSpPr>
+      <p:grpSpPr>
+        <a:xfrm>
+          <a:off x="0" y="0"/>
+          <a:ext cx="0" cy="0"/>
+          <a:chOff x="0" y="0"/>
+          <a:chExt cx="0" cy="0"/>
+        </a:xfrm>
+      </p:grpSpPr>
+      <p:pic>
+        <p:nvPicPr>
+          <p:cNvPr id="4" name="Imagem 3">
+            <a:extLst>
+              <a:ext uri="{FF2B5EF4-FFF2-40B4-BE49-F238E27FC236}">
+                <a16:creationId xmlns:a16="http://schemas.microsoft.com/office/drawing/2014/main" id="{33A95F5F-573F-6DA2-A98B-386A0C655EA6}"/>
+              </a:ext>
+            </a:extLst>
+          </p:cNvPr>
+          <p:cNvPicPr>
+            <a:picLocks noChangeAspect="1"/>
+          </p:cNvPicPr>
+          <p:nvPr/>
+        </p:nvPicPr>
+        <p:blipFill>
+          <a:blip r:embed="rId3"/>
+          <a:stretch>
+            <a:fillRect/>
+          </a:stretch>
+        </p:blipFill>
+        <p:spPr>
+          <a:xfrm>
+            <a:off x="0" y="182880"/>
+            <a:ext cx="12192000" cy="6492240"/>
+          </a:xfrm>
+          <a:prstGeom prst="rect">
+            <a:avLst/>
+          </a:prstGeom>
+        </p:spPr>
+      </p:pic>
+      <p:sp>
+        <p:nvSpPr>
+          <p:cNvPr id="5" name="Seta: para Cima 4">
+            <a:extLst>
+              <a:ext uri="{FF2B5EF4-FFF2-40B4-BE49-F238E27FC236}">
+                <a16:creationId xmlns:a16="http://schemas.microsoft.com/office/drawing/2014/main" id="{D600A9E0-F981-606D-F381-59582760611B}"/>
+              </a:ext>
+            </a:extLst>
+          </p:cNvPr>
+          <p:cNvSpPr/>
+          <p:nvPr/>
+        </p:nvSpPr>
+        <p:spPr>
+          <a:xfrm rot="1365287">
+            <a:off x="2708033" y="3313870"/>
+            <a:ext cx="1617785" cy="2069123"/>
+          </a:xfrm>
+          <a:prstGeom prst="upArrow">
+            <a:avLst/>
+          </a:prstGeom>
+        </p:spPr>
+        <p:style>
+          <a:lnRef idx="2">
+            <a:schemeClr val="accent2">
+              <a:shade val="15000"/>
+            </a:schemeClr>
+          </a:lnRef>
+          <a:fillRef idx="1">
+            <a:schemeClr val="accent2"/>
+          </a:fillRef>
+          <a:effectRef idx="0">
+            <a:schemeClr val="accent2"/>
+          </a:effectRef>
+          <a:fontRef idx="minor">
+            <a:schemeClr val="lt1"/>
+          </a:fontRef>
+        </p:style>
+        <p:txBody>
+          <a:bodyPr rtlCol="0" anchor="ctr"/>
+          <a:lstStyle/>
+          <a:p>
+            <a:pPr algn="ctr"/>
+            <a:endParaRPr lang="en-US"/>
+          </a:p>
+        </p:txBody>
+      </p:sp>
+      <p:sp>
+        <p:nvSpPr>
+          <p:cNvPr id="7" name="Seta: para Cima 6">
+            <a:extLst>
+              <a:ext uri="{FF2B5EF4-FFF2-40B4-BE49-F238E27FC236}">
+                <a16:creationId xmlns:a16="http://schemas.microsoft.com/office/drawing/2014/main" id="{35EE6889-CC87-E30E-66CE-27E734DE541A}"/>
+              </a:ext>
+            </a:extLst>
+          </p:cNvPr>
+          <p:cNvSpPr/>
+          <p:nvPr/>
+        </p:nvSpPr>
+        <p:spPr>
+          <a:xfrm rot="5963655">
+            <a:off x="2157048" y="1427526"/>
+            <a:ext cx="1617785" cy="2069123"/>
+          </a:xfrm>
+          <a:prstGeom prst="upArrow">
+            <a:avLst/>
+          </a:prstGeom>
+        </p:spPr>
+        <p:style>
+          <a:lnRef idx="2">
+            <a:schemeClr val="accent2">
+              <a:shade val="15000"/>
+            </a:schemeClr>
+          </a:lnRef>
+          <a:fillRef idx="1">
+            <a:schemeClr val="accent2"/>
+          </a:fillRef>
+          <a:effectRef idx="0">
+            <a:schemeClr val="accent2"/>
+          </a:effectRef>
+          <a:fontRef idx="minor">
+            <a:schemeClr val="lt1"/>
+          </a:fontRef>
+        </p:style>
+        <p:txBody>
+          <a:bodyPr rtlCol="0" anchor="ctr"/>
+          <a:lstStyle/>
+          <a:p>
+            <a:pPr algn="ctr"/>
+            <a:endParaRPr lang="en-US"/>
+          </a:p>
+        </p:txBody>
+      </p:sp>
+    </p:spTree>
+    <p:extLst>
+      <p:ext uri="{BB962C8B-B14F-4D97-AF65-F5344CB8AC3E}">
+        <p14:creationId xmlns:p14="http://schemas.microsoft.com/office/powerpoint/2010/main" val="2684668309"/>
+      </p:ext>
+    </p:extLst>
+  </p:cSld>
+  <p:clrMapOvr>
+    <a:masterClrMapping/>
+  </p:clrMapOvr>
+</p:sld>
+</file>
+
+<file path=ppt/slides/slide5.xml><?xml version="1.0" encoding="utf-8"?>
+<p:sld xmlns:a="http://schemas.openxmlformats.org/drawingml/2006/main" xmlns:r="http://schemas.openxmlformats.org/officeDocument/2006/relationships" xmlns:p="http://schemas.openxmlformats.org/presentationml/2006/main">
+  <p:cSld>
+    <p:spTree>
+      <p:nvGrpSpPr>
+        <p:cNvPr id="1" name=""/>
+        <p:cNvGrpSpPr/>
+        <p:nvPr/>
+      </p:nvGrpSpPr>
+      <p:grpSpPr>
+        <a:xfrm>
+          <a:off x="0" y="0"/>
+          <a:ext cx="0" cy="0"/>
+          <a:chOff x="0" y="0"/>
+          <a:chExt cx="0" cy="0"/>
+        </a:xfrm>
+      </p:grpSpPr>
+      <p:pic>
+        <p:nvPicPr>
+          <p:cNvPr id="3" name="Imagem 2">
+            <a:extLst>
+              <a:ext uri="{FF2B5EF4-FFF2-40B4-BE49-F238E27FC236}">
+                <a16:creationId xmlns:a16="http://schemas.microsoft.com/office/drawing/2014/main" id="{F651B8C1-44BA-E547-8506-42CA727132FB}"/>
+              </a:ext>
+            </a:extLst>
+          </p:cNvPr>
+          <p:cNvPicPr>
+            <a:picLocks noChangeAspect="1"/>
+          </p:cNvPicPr>
+          <p:nvPr/>
+        </p:nvPicPr>
+        <p:blipFill>
+          <a:blip r:embed="rId3"/>
+          <a:stretch>
+            <a:fillRect/>
+          </a:stretch>
+        </p:blipFill>
+        <p:spPr>
+          <a:xfrm>
+            <a:off x="0" y="182880"/>
+            <a:ext cx="12192000" cy="6492240"/>
+          </a:xfrm>
+          <a:prstGeom prst="rect">
+            <a:avLst/>
+          </a:prstGeom>
+        </p:spPr>
+      </p:pic>
+      <p:sp>
+        <p:nvSpPr>
+          <p:cNvPr id="8" name="Seta: para Cima 7">
+            <a:extLst>
+              <a:ext uri="{FF2B5EF4-FFF2-40B4-BE49-F238E27FC236}">
+                <a16:creationId xmlns:a16="http://schemas.microsoft.com/office/drawing/2014/main" id="{F0048C11-6E1F-C483-21B5-AF3DD46B3CD4}"/>
+              </a:ext>
+            </a:extLst>
+          </p:cNvPr>
+          <p:cNvSpPr/>
+          <p:nvPr/>
+        </p:nvSpPr>
+        <p:spPr>
+          <a:xfrm rot="1365287">
+            <a:off x="5000217" y="5330240"/>
+            <a:ext cx="1617785" cy="2069123"/>
+          </a:xfrm>
+          <a:prstGeom prst="upArrow">
+            <a:avLst/>
+          </a:prstGeom>
+        </p:spPr>
+        <p:style>
+          <a:lnRef idx="2">
+            <a:schemeClr val="accent2">
+              <a:shade val="15000"/>
+            </a:schemeClr>
+          </a:lnRef>
+          <a:fillRef idx="1">
+            <a:schemeClr val="accent2"/>
+          </a:fillRef>
+          <a:effectRef idx="0">
+            <a:schemeClr val="accent2"/>
+          </a:effectRef>
+          <a:fontRef idx="minor">
+            <a:schemeClr val="lt1"/>
+          </a:fontRef>
+        </p:style>
+        <p:txBody>
+          <a:bodyPr rtlCol="0" anchor="ctr"/>
+          <a:lstStyle/>
+          <a:p>
+            <a:pPr algn="ctr"/>
+            <a:endParaRPr lang="en-US"/>
+          </a:p>
+        </p:txBody>
+      </p:sp>
+    </p:spTree>
+    <p:extLst>
+      <p:ext uri="{BB962C8B-B14F-4D97-AF65-F5344CB8AC3E}">
+        <p14:creationId xmlns:p14="http://schemas.microsoft.com/office/powerpoint/2010/main" val="215192696"/>
+      </p:ext>
+    </p:extLst>
+  </p:cSld>
+  <p:clrMapOvr>
+    <a:masterClrMapping/>
+  </p:clrMapOvr>
+</p:sld>
+</file>
+
+<file path=ppt/slides/slide6.xml><?xml version="1.0" encoding="utf-8"?>
+<p:sld xmlns:a="http://schemas.openxmlformats.org/drawingml/2006/main" xmlns:r="http://schemas.openxmlformats.org/officeDocument/2006/relationships" xmlns:p="http://schemas.openxmlformats.org/presentationml/2006/main">
+  <p:cSld>
+    <p:spTree>
+      <p:nvGrpSpPr>
+        <p:cNvPr id="1" name=""/>
+        <p:cNvGrpSpPr/>
+        <p:nvPr/>
+      </p:nvGrpSpPr>
+      <p:grpSpPr>
+        <a:xfrm>
+          <a:off x="0" y="0"/>
+          <a:ext cx="0" cy="0"/>
+          <a:chOff x="0" y="0"/>
+          <a:chExt cx="0" cy="0"/>
+        </a:xfrm>
+      </p:grpSpPr>
+      <p:pic>
+        <p:nvPicPr>
+          <p:cNvPr id="5" name="Imagem 4">
+            <a:extLst>
+              <a:ext uri="{FF2B5EF4-FFF2-40B4-BE49-F238E27FC236}">
+                <a16:creationId xmlns:a16="http://schemas.microsoft.com/office/drawing/2014/main" id="{B4FFB9DE-7313-CEE0-95EE-9D4B5F5F8D97}"/>
+              </a:ext>
+            </a:extLst>
+          </p:cNvPr>
+          <p:cNvPicPr>
+            <a:picLocks noChangeAspect="1"/>
+          </p:cNvPicPr>
+          <p:nvPr/>
+        </p:nvPicPr>
+        <p:blipFill>
+          <a:blip r:embed="rId3"/>
+          <a:stretch>
+            <a:fillRect/>
+          </a:stretch>
+        </p:blipFill>
+        <p:spPr>
+          <a:xfrm>
+            <a:off x="0" y="182880"/>
+            <a:ext cx="12192000" cy="6492240"/>
+          </a:xfrm>
+          <a:prstGeom prst="rect">
+            <a:avLst/>
+          </a:prstGeom>
+        </p:spPr>
+      </p:pic>
+      <p:sp>
+        <p:nvSpPr>
+          <p:cNvPr id="6" name="Seta: para Cima 5">
+            <a:extLst>
+              <a:ext uri="{FF2B5EF4-FFF2-40B4-BE49-F238E27FC236}">
+                <a16:creationId xmlns:a16="http://schemas.microsoft.com/office/drawing/2014/main" id="{F1569ED6-526B-01A5-2930-55D1427EF35C}"/>
+              </a:ext>
+            </a:extLst>
+          </p:cNvPr>
+          <p:cNvSpPr/>
+          <p:nvPr/>
+        </p:nvSpPr>
+        <p:spPr>
+          <a:xfrm rot="1365287">
+            <a:off x="5187786" y="4943379"/>
+            <a:ext cx="1617785" cy="2069123"/>
+          </a:xfrm>
+          <a:prstGeom prst="upArrow">
+            <a:avLst/>
+          </a:prstGeom>
+        </p:spPr>
+        <p:style>
+          <a:lnRef idx="2">
+            <a:schemeClr val="accent2">
+              <a:shade val="15000"/>
+            </a:schemeClr>
+          </a:lnRef>
+          <a:fillRef idx="1">
+            <a:schemeClr val="accent2"/>
+          </a:fillRef>
+          <a:effectRef idx="0">
+            <a:schemeClr val="accent2"/>
+          </a:effectRef>
+          <a:fontRef idx="minor">
+            <a:schemeClr val="lt1"/>
+          </a:fontRef>
+        </p:style>
+        <p:txBody>
+          <a:bodyPr rtlCol="0" anchor="ctr"/>
+          <a:lstStyle/>
+          <a:p>
+            <a:pPr algn="ctr"/>
+            <a:endParaRPr lang="en-US"/>
+          </a:p>
+        </p:txBody>
+      </p:sp>
+    </p:spTree>
+    <p:extLst>
+      <p:ext uri="{BB962C8B-B14F-4D97-AF65-F5344CB8AC3E}">
+        <p14:creationId xmlns:p14="http://schemas.microsoft.com/office/powerpoint/2010/main" val="1202984538"/>
+      </p:ext>
+    </p:extLst>
+  </p:cSld>
+  <p:clrMapOvr>
+    <a:masterClrMapping/>
+  </p:clrMapOvr>
+</p:sld>
+</file>
+
+<file path=ppt/slides/slide7.xml><?xml version="1.0" encoding="utf-8"?>
 <p:sld xmlns:a="http://schemas.openxmlformats.org/drawingml/2006/main" xmlns:r="http://schemas.openxmlformats.org/officeDocument/2006/relationships" xmlns:p="http://schemas.openxmlformats.org/presentationml/2006/main">
   <p:cSld>
     <p:spTree>
@@ -4474,7 +7099,7 @@
 </p:sld>
 </file>
 
-<file path=ppt/slides/slide3.xml><?xml version="1.0" encoding="utf-8"?>
+<file path=ppt/slides/slide8.xml><?xml version="1.0" encoding="utf-8"?>
 <p:sld xmlns:a="http://schemas.openxmlformats.org/drawingml/2006/main" xmlns:r="http://schemas.openxmlformats.org/officeDocument/2006/relationships" xmlns:p="http://schemas.openxmlformats.org/presentationml/2006/main">
   <p:cSld>
     <p:spTree>
@@ -4580,7 +7205,7 @@
 </p:sld>
 </file>
 
-<file path=ppt/slides/slide4.xml><?xml version="1.0" encoding="utf-8"?>
+<file path=ppt/slides/slide9.xml><?xml version="1.0" encoding="utf-8"?>
 <p:sld xmlns:a="http://schemas.openxmlformats.org/drawingml/2006/main" xmlns:r="http://schemas.openxmlformats.org/officeDocument/2006/relationships" xmlns:p="http://schemas.openxmlformats.org/presentationml/2006/main">
   <p:cSld>
     <p:spTree>
@@ -4677,414 +7302,6 @@
     <p:extLst>
       <p:ext uri="{BB962C8B-B14F-4D97-AF65-F5344CB8AC3E}">
         <p14:creationId xmlns:p14="http://schemas.microsoft.com/office/powerpoint/2010/main" val="3892521864"/>
-      </p:ext>
-    </p:extLst>
-  </p:cSld>
-  <p:clrMapOvr>
-    <a:masterClrMapping/>
-  </p:clrMapOvr>
-</p:sld>
-</file>
-
-<file path=ppt/slides/slide5.xml><?xml version="1.0" encoding="utf-8"?>
-<p:sld xmlns:a="http://schemas.openxmlformats.org/drawingml/2006/main" xmlns:r="http://schemas.openxmlformats.org/officeDocument/2006/relationships" xmlns:p="http://schemas.openxmlformats.org/presentationml/2006/main">
-  <p:cSld>
-    <p:spTree>
-      <p:nvGrpSpPr>
-        <p:cNvPr id="1" name=""/>
-        <p:cNvGrpSpPr/>
-        <p:nvPr/>
-      </p:nvGrpSpPr>
-      <p:grpSpPr>
-        <a:xfrm>
-          <a:off x="0" y="0"/>
-          <a:ext cx="0" cy="0"/>
-          <a:chOff x="0" y="0"/>
-          <a:chExt cx="0" cy="0"/>
-        </a:xfrm>
-      </p:grpSpPr>
-      <p:pic>
-        <p:nvPicPr>
-          <p:cNvPr id="3" name="Imagem 2">
-            <a:extLst>
-              <a:ext uri="{FF2B5EF4-FFF2-40B4-BE49-F238E27FC236}">
-                <a16:creationId xmlns:a16="http://schemas.microsoft.com/office/drawing/2014/main" id="{4703A864-AF16-82DB-7DDA-48C4732CFFFC}"/>
-              </a:ext>
-            </a:extLst>
-          </p:cNvPr>
-          <p:cNvPicPr>
-            <a:picLocks noChangeAspect="1"/>
-          </p:cNvPicPr>
-          <p:nvPr/>
-        </p:nvPicPr>
-        <p:blipFill>
-          <a:blip r:embed="rId3"/>
-          <a:stretch>
-            <a:fillRect/>
-          </a:stretch>
-        </p:blipFill>
-        <p:spPr>
-          <a:xfrm>
-            <a:off x="0" y="182880"/>
-            <a:ext cx="12192000" cy="6492240"/>
-          </a:xfrm>
-          <a:prstGeom prst="rect">
-            <a:avLst/>
-          </a:prstGeom>
-        </p:spPr>
-      </p:pic>
-      <p:sp>
-        <p:nvSpPr>
-          <p:cNvPr id="4" name="Seta: para Cima 3">
-            <a:extLst>
-              <a:ext uri="{FF2B5EF4-FFF2-40B4-BE49-F238E27FC236}">
-                <a16:creationId xmlns:a16="http://schemas.microsoft.com/office/drawing/2014/main" id="{E6939A9F-7705-2018-4CFC-D5FAF113B8BA}"/>
-              </a:ext>
-            </a:extLst>
-          </p:cNvPr>
-          <p:cNvSpPr/>
-          <p:nvPr/>
-        </p:nvSpPr>
-        <p:spPr>
-          <a:xfrm>
-            <a:off x="3399694" y="3320561"/>
-            <a:ext cx="1617785" cy="2069123"/>
-          </a:xfrm>
-          <a:prstGeom prst="upArrow">
-            <a:avLst/>
-          </a:prstGeom>
-        </p:spPr>
-        <p:style>
-          <a:lnRef idx="2">
-            <a:schemeClr val="accent2">
-              <a:shade val="15000"/>
-            </a:schemeClr>
-          </a:lnRef>
-          <a:fillRef idx="1">
-            <a:schemeClr val="accent2"/>
-          </a:fillRef>
-          <a:effectRef idx="0">
-            <a:schemeClr val="accent2"/>
-          </a:effectRef>
-          <a:fontRef idx="minor">
-            <a:schemeClr val="lt1"/>
-          </a:fontRef>
-        </p:style>
-        <p:txBody>
-          <a:bodyPr rtlCol="0" anchor="ctr"/>
-          <a:lstStyle/>
-          <a:p>
-            <a:pPr algn="ctr"/>
-            <a:endParaRPr lang="en-US"/>
-          </a:p>
-        </p:txBody>
-      </p:sp>
-    </p:spTree>
-    <p:extLst>
-      <p:ext uri="{BB962C8B-B14F-4D97-AF65-F5344CB8AC3E}">
-        <p14:creationId xmlns:p14="http://schemas.microsoft.com/office/powerpoint/2010/main" val="1587301790"/>
-      </p:ext>
-    </p:extLst>
-  </p:cSld>
-  <p:clrMapOvr>
-    <a:masterClrMapping/>
-  </p:clrMapOvr>
-</p:sld>
-</file>
-
-<file path=ppt/slides/slide6.xml><?xml version="1.0" encoding="utf-8"?>
-<p:sld xmlns:a="http://schemas.openxmlformats.org/drawingml/2006/main" xmlns:r="http://schemas.openxmlformats.org/officeDocument/2006/relationships" xmlns:p="http://schemas.openxmlformats.org/presentationml/2006/main">
-  <p:cSld>
-    <p:spTree>
-      <p:nvGrpSpPr>
-        <p:cNvPr id="1" name=""/>
-        <p:cNvGrpSpPr/>
-        <p:nvPr/>
-      </p:nvGrpSpPr>
-      <p:grpSpPr>
-        <a:xfrm>
-          <a:off x="0" y="0"/>
-          <a:ext cx="0" cy="0"/>
-          <a:chOff x="0" y="0"/>
-          <a:chExt cx="0" cy="0"/>
-        </a:xfrm>
-      </p:grpSpPr>
-      <p:pic>
-        <p:nvPicPr>
-          <p:cNvPr id="3" name="Imagem 2">
-            <a:extLst>
-              <a:ext uri="{FF2B5EF4-FFF2-40B4-BE49-F238E27FC236}">
-                <a16:creationId xmlns:a16="http://schemas.microsoft.com/office/drawing/2014/main" id="{60DD1A45-A05F-8643-C2E9-F736B8C7D9FE}"/>
-              </a:ext>
-            </a:extLst>
-          </p:cNvPr>
-          <p:cNvPicPr>
-            <a:picLocks noChangeAspect="1"/>
-          </p:cNvPicPr>
-          <p:nvPr/>
-        </p:nvPicPr>
-        <p:blipFill>
-          <a:blip r:embed="rId3"/>
-          <a:stretch>
-            <a:fillRect/>
-          </a:stretch>
-        </p:blipFill>
-        <p:spPr>
-          <a:xfrm>
-            <a:off x="0" y="182880"/>
-            <a:ext cx="12192000" cy="6492240"/>
-          </a:xfrm>
-          <a:prstGeom prst="rect">
-            <a:avLst/>
-          </a:prstGeom>
-        </p:spPr>
-      </p:pic>
-      <p:sp>
-        <p:nvSpPr>
-          <p:cNvPr id="4" name="Seta: para Cima 3">
-            <a:extLst>
-              <a:ext uri="{FF2B5EF4-FFF2-40B4-BE49-F238E27FC236}">
-                <a16:creationId xmlns:a16="http://schemas.microsoft.com/office/drawing/2014/main" id="{13CA2CC0-2D37-E5E0-06CE-EF331B94B80F}"/>
-              </a:ext>
-            </a:extLst>
-          </p:cNvPr>
-          <p:cNvSpPr/>
-          <p:nvPr/>
-        </p:nvSpPr>
-        <p:spPr>
-          <a:xfrm>
-            <a:off x="3598986" y="3320561"/>
-            <a:ext cx="1617785" cy="2069123"/>
-          </a:xfrm>
-          <a:prstGeom prst="upArrow">
-            <a:avLst/>
-          </a:prstGeom>
-        </p:spPr>
-        <p:style>
-          <a:lnRef idx="2">
-            <a:schemeClr val="accent2">
-              <a:shade val="15000"/>
-            </a:schemeClr>
-          </a:lnRef>
-          <a:fillRef idx="1">
-            <a:schemeClr val="accent2"/>
-          </a:fillRef>
-          <a:effectRef idx="0">
-            <a:schemeClr val="accent2"/>
-          </a:effectRef>
-          <a:fontRef idx="minor">
-            <a:schemeClr val="lt1"/>
-          </a:fontRef>
-        </p:style>
-        <p:txBody>
-          <a:bodyPr rtlCol="0" anchor="ctr"/>
-          <a:lstStyle/>
-          <a:p>
-            <a:pPr algn="ctr"/>
-            <a:endParaRPr lang="en-US"/>
-          </a:p>
-        </p:txBody>
-      </p:sp>
-    </p:spTree>
-    <p:extLst>
-      <p:ext uri="{BB962C8B-B14F-4D97-AF65-F5344CB8AC3E}">
-        <p14:creationId xmlns:p14="http://schemas.microsoft.com/office/powerpoint/2010/main" val="4202812772"/>
-      </p:ext>
-    </p:extLst>
-  </p:cSld>
-  <p:clrMapOvr>
-    <a:masterClrMapping/>
-  </p:clrMapOvr>
-</p:sld>
-</file>
-
-<file path=ppt/slides/slide7.xml><?xml version="1.0" encoding="utf-8"?>
-<p:sld xmlns:a="http://schemas.openxmlformats.org/drawingml/2006/main" xmlns:r="http://schemas.openxmlformats.org/officeDocument/2006/relationships" xmlns:p="http://schemas.openxmlformats.org/presentationml/2006/main">
-  <p:cSld>
-    <p:spTree>
-      <p:nvGrpSpPr>
-        <p:cNvPr id="1" name=""/>
-        <p:cNvGrpSpPr/>
-        <p:nvPr/>
-      </p:nvGrpSpPr>
-      <p:grpSpPr>
-        <a:xfrm>
-          <a:off x="0" y="0"/>
-          <a:ext cx="0" cy="0"/>
-          <a:chOff x="0" y="0"/>
-          <a:chExt cx="0" cy="0"/>
-        </a:xfrm>
-      </p:grpSpPr>
-      <p:pic>
-        <p:nvPicPr>
-          <p:cNvPr id="3" name="Imagem 2">
-            <a:extLst>
-              <a:ext uri="{FF2B5EF4-FFF2-40B4-BE49-F238E27FC236}">
-                <a16:creationId xmlns:a16="http://schemas.microsoft.com/office/drawing/2014/main" id="{09DC30BC-37D0-C807-FDDB-C25DC86DAAB4}"/>
-              </a:ext>
-            </a:extLst>
-          </p:cNvPr>
-          <p:cNvPicPr>
-            <a:picLocks noChangeAspect="1"/>
-          </p:cNvPicPr>
-          <p:nvPr/>
-        </p:nvPicPr>
-        <p:blipFill>
-          <a:blip r:embed="rId3"/>
-          <a:stretch>
-            <a:fillRect/>
-          </a:stretch>
-        </p:blipFill>
-        <p:spPr>
-          <a:xfrm>
-            <a:off x="0" y="182880"/>
-            <a:ext cx="12192000" cy="6492240"/>
-          </a:xfrm>
-          <a:prstGeom prst="rect">
-            <a:avLst/>
-          </a:prstGeom>
-        </p:spPr>
-      </p:pic>
-      <p:sp>
-        <p:nvSpPr>
-          <p:cNvPr id="4" name="Seta: para Cima 3">
-            <a:extLst>
-              <a:ext uri="{FF2B5EF4-FFF2-40B4-BE49-F238E27FC236}">
-                <a16:creationId xmlns:a16="http://schemas.microsoft.com/office/drawing/2014/main" id="{6DA58376-AAF3-5B8F-7BBE-451F1A2B19D8}"/>
-              </a:ext>
-            </a:extLst>
-          </p:cNvPr>
-          <p:cNvSpPr/>
-          <p:nvPr/>
-        </p:nvSpPr>
-        <p:spPr>
-          <a:xfrm rot="16200000">
-            <a:off x="2614247" y="4831666"/>
-            <a:ext cx="1617785" cy="2069123"/>
-          </a:xfrm>
-          <a:prstGeom prst="upArrow">
-            <a:avLst/>
-          </a:prstGeom>
-        </p:spPr>
-        <p:style>
-          <a:lnRef idx="2">
-            <a:schemeClr val="accent2">
-              <a:shade val="15000"/>
-            </a:schemeClr>
-          </a:lnRef>
-          <a:fillRef idx="1">
-            <a:schemeClr val="accent2"/>
-          </a:fillRef>
-          <a:effectRef idx="0">
-            <a:schemeClr val="accent2"/>
-          </a:effectRef>
-          <a:fontRef idx="minor">
-            <a:schemeClr val="lt1"/>
-          </a:fontRef>
-        </p:style>
-        <p:txBody>
-          <a:bodyPr rtlCol="0" anchor="ctr"/>
-          <a:lstStyle/>
-          <a:p>
-            <a:pPr algn="ctr"/>
-            <a:endParaRPr lang="en-US"/>
-          </a:p>
-        </p:txBody>
-      </p:sp>
-    </p:spTree>
-    <p:extLst>
-      <p:ext uri="{BB962C8B-B14F-4D97-AF65-F5344CB8AC3E}">
-        <p14:creationId xmlns:p14="http://schemas.microsoft.com/office/powerpoint/2010/main" val="4266333405"/>
-      </p:ext>
-    </p:extLst>
-  </p:cSld>
-  <p:clrMapOvr>
-    <a:masterClrMapping/>
-  </p:clrMapOvr>
-</p:sld>
-</file>
-
-<file path=ppt/slides/slide8.xml><?xml version="1.0" encoding="utf-8"?>
-<p:sld xmlns:a="http://schemas.openxmlformats.org/drawingml/2006/main" xmlns:r="http://schemas.openxmlformats.org/officeDocument/2006/relationships" xmlns:p="http://schemas.openxmlformats.org/presentationml/2006/main">
-  <p:cSld>
-    <p:spTree>
-      <p:nvGrpSpPr>
-        <p:cNvPr id="1" name=""/>
-        <p:cNvGrpSpPr/>
-        <p:nvPr/>
-      </p:nvGrpSpPr>
-      <p:grpSpPr>
-        <a:xfrm>
-          <a:off x="0" y="0"/>
-          <a:ext cx="0" cy="0"/>
-          <a:chOff x="0" y="0"/>
-          <a:chExt cx="0" cy="0"/>
-        </a:xfrm>
-      </p:grpSpPr>
-      <p:pic>
-        <p:nvPicPr>
-          <p:cNvPr id="3" name="Imagem 2">
-            <a:extLst>
-              <a:ext uri="{FF2B5EF4-FFF2-40B4-BE49-F238E27FC236}">
-                <a16:creationId xmlns:a16="http://schemas.microsoft.com/office/drawing/2014/main" id="{0504CA7D-CFA6-D0D1-86CB-D99C314E1287}"/>
-              </a:ext>
-            </a:extLst>
-          </p:cNvPr>
-          <p:cNvPicPr>
-            <a:picLocks noChangeAspect="1"/>
-          </p:cNvPicPr>
-          <p:nvPr/>
-        </p:nvPicPr>
-        <p:blipFill>
-          <a:blip r:embed="rId3"/>
-          <a:stretch>
-            <a:fillRect/>
-          </a:stretch>
-        </p:blipFill>
-        <p:spPr>
-          <a:xfrm>
-            <a:off x="0" y="182880"/>
-            <a:ext cx="12192000" cy="6492240"/>
-          </a:xfrm>
-          <a:prstGeom prst="rect">
-            <a:avLst/>
-          </a:prstGeom>
-        </p:spPr>
-      </p:pic>
-    </p:spTree>
-    <p:extLst>
-      <p:ext uri="{BB962C8B-B14F-4D97-AF65-F5344CB8AC3E}">
-        <p14:creationId xmlns:p14="http://schemas.microsoft.com/office/powerpoint/2010/main" val="1261910007"/>
-      </p:ext>
-    </p:extLst>
-  </p:cSld>
-  <p:clrMapOvr>
-    <a:masterClrMapping/>
-  </p:clrMapOvr>
-</p:sld>
-</file>
-
-<file path=ppt/slides/slide9.xml><?xml version="1.0" encoding="utf-8"?>
-<p:sld xmlns:a="http://schemas.openxmlformats.org/drawingml/2006/main" xmlns:r="http://schemas.openxmlformats.org/officeDocument/2006/relationships" xmlns:p="http://schemas.openxmlformats.org/presentationml/2006/main">
-  <p:cSld>
-    <p:spTree>
-      <p:nvGrpSpPr>
-        <p:cNvPr id="1" name=""/>
-        <p:cNvGrpSpPr/>
-        <p:nvPr/>
-      </p:nvGrpSpPr>
-      <p:grpSpPr>
-        <a:xfrm>
-          <a:off x="0" y="0"/>
-          <a:ext cx="0" cy="0"/>
-          <a:chOff x="0" y="0"/>
-          <a:chExt cx="0" cy="0"/>
-        </a:xfrm>
-      </p:grpSpPr>
-    </p:spTree>
-    <p:extLst>
-      <p:ext uri="{BB962C8B-B14F-4D97-AF65-F5344CB8AC3E}">
-        <p14:creationId xmlns:p14="http://schemas.microsoft.com/office/powerpoint/2010/main" val="3892980243"/>
       </p:ext>
     </p:extLst>
   </p:cSld>
